--- a/EC_Sprint_2_1TSCO_EvidenciasConstrucao_PULSO_VitalAnalytics.pptx
+++ b/EC_Sprint_2_1TSCO_EvidenciasConstrucao_PULSO_VitalAnalytics.pptx
@@ -13421,7 +13421,7 @@
                 <a:ea typeface="Calibri" pitchFamily="34" charset="-122"/>
                 <a:cs typeface="Calibri" pitchFamily="34" charset="-120"/>
               </a:rPr>
-              <a:t>Repositório público:   github.com/&lt;usuario&gt;/pulso-vital-analytics</a:t>
+              <a:t>Repositório público:   github.com/nelsondiniz-p/pulso-vital-analytics</a:t>
             </a:r>
             <a:endParaRPr lang="en-US" sz="1200" dirty="0"/>
           </a:p>
@@ -20252,7 +20252,21 @@
                 <a:ea typeface="Calibri" pitchFamily="34" charset="-122"/>
                 <a:cs typeface="Calibri" pitchFamily="34" charset="-120"/>
               </a:rPr>
-              <a:t>Aplicação navegável, sem servidor — roda em GitHub Pages e offline.</a:t>
+              <a:t>Aplicação no ar: </a:t>
+            </a:r>
+            <a:pPr indent="0" marL="0">
+              <a:buNone/>
+            </a:pPr>
+            <a:r>
+              <a:rPr lang="en-US" sz="1050" b="1" dirty="0">
+                <a:solidFill>
+                  <a:srgbClr val="009B98"/>
+                </a:solidFill>
+                <a:latin typeface="Calibri" pitchFamily="34" charset="0"/>
+                <a:ea typeface="Calibri" pitchFamily="34" charset="-122"/>
+                <a:cs typeface="Calibri" pitchFamily="34" charset="-120"/>
+              </a:rPr>
+              <a:t>nelsondiniz-p.github.io/pulso-vital-analytics</a:t>
             </a:r>
             <a:endParaRPr lang="en-US" sz="1050" dirty="0"/>
           </a:p>
@@ -20680,7 +20694,21 @@
                 <a:ea typeface="Calibri" pitchFamily="34" charset="-122"/>
                 <a:cs typeface="Calibri" pitchFamily="34" charset="-120"/>
               </a:rPr>
-              <a:t>Aplicação navegável, sem servidor — roda em GitHub Pages e offline.</a:t>
+              <a:t>Aplicação no ar: </a:t>
+            </a:r>
+            <a:pPr indent="0" marL="0">
+              <a:buNone/>
+            </a:pPr>
+            <a:r>
+              <a:rPr lang="en-US" sz="1050" b="1" dirty="0">
+                <a:solidFill>
+                  <a:srgbClr val="009B98"/>
+                </a:solidFill>
+                <a:latin typeface="Calibri" pitchFamily="34" charset="0"/>
+                <a:ea typeface="Calibri" pitchFamily="34" charset="-122"/>
+                <a:cs typeface="Calibri" pitchFamily="34" charset="-120"/>
+              </a:rPr>
+              <a:t>nelsondiniz-p.github.io/pulso-vital-analytics</a:t>
             </a:r>
             <a:endParaRPr lang="en-US" sz="1050" dirty="0"/>
           </a:p>
@@ -21108,7 +21136,21 @@
                 <a:ea typeface="Calibri" pitchFamily="34" charset="-122"/>
                 <a:cs typeface="Calibri" pitchFamily="34" charset="-120"/>
               </a:rPr>
-              <a:t>Aplicação navegável, sem servidor — roda em GitHub Pages e offline.</a:t>
+              <a:t>Aplicação no ar: </a:t>
+            </a:r>
+            <a:pPr indent="0" marL="0">
+              <a:buNone/>
+            </a:pPr>
+            <a:r>
+              <a:rPr lang="en-US" sz="1050" b="1" dirty="0">
+                <a:solidFill>
+                  <a:srgbClr val="009B98"/>
+                </a:solidFill>
+                <a:latin typeface="Calibri" pitchFamily="34" charset="0"/>
+                <a:ea typeface="Calibri" pitchFamily="34" charset="-122"/>
+                <a:cs typeface="Calibri" pitchFamily="34" charset="-120"/>
+              </a:rPr>
+              <a:t>nelsondiniz-p.github.io/pulso-vital-analytics</a:t>
             </a:r>
             <a:endParaRPr lang="en-US" sz="1050" dirty="0"/>
           </a:p>

--- a/EC_Sprint_2_1TSCO_EvidenciasConstrucao_PULSO_VitalAnalytics.pptx
+++ b/EC_Sprint_2_1TSCO_EvidenciasConstrucao_PULSO_VitalAnalytics.pptx
@@ -877,7 +877,7 @@
           <a:p>
             <a:r>
               <a:rPr lang="en-US" dirty="0"/>
-              <a:t>Quarta entrega: modelos. Cada técnica existe para responder uma pergunta concreta de gestão, não para demonstrar ferramenta.</a:t>
+              <a:t>Cada técnica existe para responder uma pergunta concreta de gestão, não para demonstrar ferramenta.</a:t>
             </a:r>
             <a:endParaRPr lang="en-US" dirty="0"/>
           </a:p>
@@ -965,7 +965,7 @@
           <a:p>
             <a:r>
               <a:rPr lang="en-US" dirty="0"/>
-              <a:t>Ponto forte para a banca: sabemos que a métrica aponta para k=2 e escolhemos k=4 conscientemente, porque a métrica otimiza separação estatística, não utilidade de gestão.</a:t>
+              <a:t>A silhueta aponta para k=2, e escolhemos k=4 conscientemente: a métrica otimiza separação estatística, não utilidade de gestão. Com dois grupos a rede se divide apenas em cheia e vazia, o que não orienta nenhuma decisão.</a:t>
             </a:r>
             <a:endParaRPr lang="en-US" dirty="0"/>
           </a:p>
@@ -1053,7 +1053,7 @@
           <a:p>
             <a:r>
               <a:rPr lang="en-US" dirty="0"/>
-              <a:t>Se houver uma pergunta técnica da banca, é sobre isto. Mostra que entendemos o dado, não só a ferramenta.</a:t>
+              <a:t>Os dois casos mostram que o tratamento de dados é decisão analítica, não limpeza: em ambos, o resultado sem o ajuste apontaria para o município errado.</a:t>
             </a:r>
             <a:endParaRPr lang="en-US" dirty="0"/>
           </a:p>
@@ -1141,7 +1141,7 @@
           <a:p>
             <a:r>
               <a:rPr lang="en-US" dirty="0"/>
-              <a:t>Quinta entrega: evidências visuais. Declarar a limitação do indicador é parte da entrega — um MVP que esconde o limite é pior que um que o declara.</a:t>
+              <a:t>Declarar a limitação do indicador é parte da entrega — um MVP que esconde o limite é pior que um que o declara.</a:t>
             </a:r>
             <a:endParaRPr lang="en-US" dirty="0"/>
           </a:p>
@@ -1405,7 +1405,7 @@
           <a:p>
             <a:r>
               <a:rPr lang="en-US" dirty="0"/>
-              <a:t>ATENÇÃO: substituir o bloco de código por capturas de tela do ambiente Oracle assim que o Autonomous Database estiver provisionado. A captura mais importante é a do SELECT AI showsql — pergunta em português entrando, SQL saindo.</a:t>
+              <a:t>O object_list é a fronteira do que a IA enxerga, e os COMMENT ON do esquema são o que ensina o negócio a ela. É por isso que a modelagem de dados é o trabalho que faz o Select AI funcionar — não a chamada de API.</a:t>
             </a:r>
             <a:endParaRPr lang="en-US" dirty="0"/>
           </a:p>
@@ -1581,7 +1581,7 @@
           <a:p>
             <a:r>
               <a:rPr lang="en-US" dirty="0"/>
-              <a:t>ATENÇÃO: substituir &lt;usuario&gt; pelo endereço real do repositório antes de gerar o PDF e o vídeo.</a:t>
+              <a:t>O repositório é público e reúne todo o código gerado no projeto: extração, integração, modelos, scripts do Oracle, notebook de análise exploratória e a documentação de arquitetura e implantação.</a:t>
             </a:r>
             <a:endParaRPr lang="en-US" dirty="0"/>
           </a:p>
@@ -1669,7 +1669,7 @@
           <a:p>
             <a:r>
               <a:rPr lang="en-US" dirty="0"/>
-              <a:t>ATENÇÃO: inserir o link do YouTube neste slide antes da entrega. O mesmo link vai no arquivo link_video_pitch.txt, dentro do zip.</a:t>
+              <a:t>A estrutura do pitch segue os seis blocos sugeridos, com dois minutos reservados à demonstração ao vivo — que é onde a solução se prova.</a:t>
             </a:r>
             <a:endParaRPr lang="en-US" dirty="0"/>
           </a:p>
@@ -1757,7 +1757,7 @@
           <a:p>
             <a:r>
               <a:rPr lang="en-US" dirty="0"/>
-              <a:t>Oitava entrega: resultados. O ponto a enfatizar é que nenhum número aqui é ilustrativo — todos saem de fonte pública verificável.</a:t>
+              <a:t>O ponto a enfatizar é que nenhum número aqui é ilustrativo — todos saem de fonte pública verificável.</a:t>
             </a:r>
             <a:endParaRPr lang="en-US" dirty="0"/>
           </a:p>
@@ -2109,7 +2109,7 @@
           <a:p>
             <a:r>
               <a:rPr lang="en-US" dirty="0"/>
-              <a:t>Primeira entrega: documentação de gestão atualizada. O quadro mostra o que foi concluído, o que está em andamento e o que fica para a próxima evolução — nada foi removido do planejamento original.</a:t>
+              <a:t>O quadro mostra o que foi concluído, o que está em andamento e o que fica para a próxima evolução — nada foi removido do planejamento original.</a:t>
             </a:r>
             <a:endParaRPr lang="en-US" dirty="0"/>
           </a:p>
@@ -2197,7 +2197,7 @@
           <a:p>
             <a:r>
               <a:rPr lang="en-US" dirty="0"/>
-              <a:t>Segunda entrega: escopo. Fomos deliberadamente enxutos. O que não foi implementado está declarado como evolução planejada, não escondido.</a:t>
+              <a:t>Fomos deliberadamente enxutos no escopo. O que não foi implementado está declarado como evolução planejada, não escondido.</a:t>
             </a:r>
             <a:endParaRPr lang="en-US" dirty="0"/>
           </a:p>
@@ -2549,7 +2549,7 @@
           <a:p>
             <a:r>
               <a:rPr lang="en-US" dirty="0"/>
-              <a:t>Terceira entrega: arquitetura. Cinco camadas — origem, ingestão, armazenamento, modelagem e consumo. Cada fonte entra pelo mecanismo que a natureza dela pede.</a:t>
+              <a:t>Cinco camadas — origem, ingestão, armazenamento, modelagem e consumo. Cada fonte entra pelo mecanismo que a natureza dela pede.</a:t>
             </a:r>
             <a:endParaRPr lang="en-US" dirty="0"/>
           </a:p>
@@ -12840,7 +12840,7 @@
                 <a:ea typeface="Courier New" pitchFamily="34" charset="-122"/>
                 <a:cs typeface="Courier New" pitchFamily="34" charset="-120"/>
               </a:rPr>
-              <a:t>                        guia Oracle, evidências</a:t>
+              <a:t>                        implantação, evidências</a:t>
             </a:r>
             <a:endParaRPr lang="en-US" sz="950" dirty="0"/>
           </a:p>
@@ -13221,7 +13221,7 @@
                 <a:ea typeface="Courier New" pitchFamily="34" charset="-122"/>
                 <a:cs typeface="Courier New" pitchFamily="34" charset="-120"/>
               </a:rPr>
-              <a:t>docs/guia_oracle.md</a:t>
+              <a:t>docs/implantacao_oracle.md</a:t>
             </a:r>
             <a:endParaRPr lang="en-US" sz="1100" dirty="0"/>
           </a:p>
@@ -13260,7 +13260,7 @@
                 <a:ea typeface="Calibri" pitchFamily="34" charset="-122"/>
                 <a:cs typeface="Calibri" pitchFamily="34" charset="-120"/>
               </a:rPr>
-              <a:t>Provisionamento do Autonomous Database passo a passo, com solução para cada erro comum</a:t>
+              <a:t>Implantação da camada Oracle: ordem dos scripts, validação da carga e diagnóstico do Select AI</a:t>
             </a:r>
             <a:endParaRPr lang="en-US" sz="1050" dirty="0"/>
           </a:p>
@@ -14688,7 +14688,21 @@
                 <a:ea typeface="Calibri" pitchFamily="34" charset="-122"/>
                 <a:cs typeface="Calibri" pitchFamily="34" charset="-120"/>
               </a:rPr>
-              <a:t>Link do vídeo no YouTube:   (inserir antes da entrega)</a:t>
+              <a:t>Link do vídeo no YouTube:   </a:t>
+            </a:r>
+            <a:pPr indent="0" marL="0">
+              <a:buNone/>
+            </a:pPr>
+            <a:r>
+              <a:rPr lang="en-US" sz="1200" b="1" dirty="0">
+                <a:solidFill>
+                  <a:srgbClr val="D9452B"/>
+                </a:solidFill>
+                <a:latin typeface="Calibri" pitchFamily="34" charset="0"/>
+                <a:ea typeface="Calibri" pitchFamily="34" charset="-122"/>
+                <a:cs typeface="Calibri" pitchFamily="34" charset="-120"/>
+              </a:rPr>
+              <a:t>colar aqui antes de fechar a entrega</a:t>
             </a:r>
             <a:endParaRPr lang="en-US" sz="1200" dirty="0"/>
           </a:p>

--- a/EC_Sprint_2_1TSCO_EvidenciasConstrucao_PULSO_VitalAnalytics.pptx
+++ b/EC_Sprint_2_1TSCO_EvidenciasConstrucao_PULSO_VitalAnalytics.pptx
@@ -12800,7 +12800,7 @@
                 <a:ea typeface="Courier New" pitchFamily="34" charset="-122"/>
                 <a:cs typeface="Courier New" pitchFamily="34" charset="-120"/>
               </a:rPr>
-              <a:t>data/samples/           amostras versionadas</a:t>
+              <a:t>data/                   dados tratados: raw + processed</a:t>
             </a:r>
             <a:endParaRPr lang="en-US" sz="950" dirty="0"/>
           </a:p>

--- a/EC_Sprint_2_1TSCO_EvidenciasConstrucao_PULSO_VitalAnalytics.pptx
+++ b/EC_Sprint_2_1TSCO_EvidenciasConstrucao_PULSO_VitalAnalytics.pptx
@@ -29,9 +29,10 @@
     <p:sldId id="277" r:id="rId23"/>
     <p:sldId id="278" r:id="rId24"/>
     <p:sldId id="279" r:id="rId25"/>
+    <p:sldId id="280" r:id="rId26"/>
   </p:sldIdLst>
   <p:notesMasterIdLst>
-    <p:notesMasterId r:id="rId26"/>
+    <p:notesMasterId r:id="rId27"/>
   </p:notesMasterIdLst>
   <p:sldSz cx="12192000" cy="6858000"/>
   <p:notesSz cx="6858000" cy="12192000"/>
@@ -1405,7 +1406,7 @@
           <a:p>
             <a:r>
               <a:rPr lang="en-US" dirty="0"/>
-              <a:t>O object_list é a fronteira do que a IA enxerga, e os COMMENT ON do esquema são o que ensina o negócio a ela. É por isso que a modelagem de dados é o trabalho que faz o Select AI funcionar — não a chamada de API.</a:t>
+              <a:t>O ambiente Oracle está provisionado e carregado. A consulta de controle roda dentro do banco e devolve exatamente os mesmos números do painel — é a prova de que a carga foi íntegra, não parcial.</a:t>
             </a:r>
             <a:endParaRPr lang="en-US" dirty="0"/>
           </a:p>
@@ -1581,7 +1582,7 @@
           <a:p>
             <a:r>
               <a:rPr lang="en-US" dirty="0"/>
-              <a:t>O repositório é público e reúne todo o código gerado no projeto: extração, integração, modelos, scripts do Oracle, notebook de análise exploratória e a documentação de arquitetura e implantação.</a:t>
+              <a:t>Este é o slide do diferencial. O ponto técnico a destacar: o SQL gerado é exposto e auditável, e a qualidade dele vem da modelagem — dos comentários do esquema — não da chamada de API.</a:t>
             </a:r>
             <a:endParaRPr lang="en-US" dirty="0"/>
           </a:p>
@@ -1669,7 +1670,7 @@
           <a:p>
             <a:r>
               <a:rPr lang="en-US" dirty="0"/>
-              <a:t>A estrutura do pitch segue os seis blocos sugeridos, com dois minutos reservados à demonstração ao vivo — que é onde a solução se prova.</a:t>
+              <a:t>O repositório é público e reúne todo o código gerado no projeto: extração, integração, modelos, scripts do Oracle, notebook de análise exploratória e a documentação de arquitetura e implantação.</a:t>
             </a:r>
             <a:endParaRPr lang="en-US" dirty="0"/>
           </a:p>
@@ -1757,7 +1758,7 @@
           <a:p>
             <a:r>
               <a:rPr lang="en-US" dirty="0"/>
-              <a:t>O ponto a enfatizar é que nenhum número aqui é ilustrativo — todos saem de fonte pública verificável.</a:t>
+              <a:t>A estrutura do pitch segue os seis blocos sugeridos, com dois minutos reservados à demonstração ao vivo — que é onde a solução se prova.</a:t>
             </a:r>
             <a:endParaRPr lang="en-US" dirty="0"/>
           </a:p>
@@ -1845,7 +1846,7 @@
           <a:p>
             <a:r>
               <a:rPr lang="en-US" dirty="0"/>
-              <a:t>Fechamento com a mensagem de impacto do projeto.</a:t>
+              <a:t>O ponto a enfatizar é que nenhum número aqui é ilustrativo — todos saem de fonte pública verificável.</a:t>
             </a:r>
             <a:endParaRPr lang="en-US" dirty="0"/>
           </a:p>
@@ -1933,7 +1934,7 @@
           <a:p>
             <a:r>
               <a:rPr lang="en-US" dirty="0"/>
-              <a:t>Encerramento e agradecimentos.</a:t>
+              <a:t>Fechamento com a mensagem de impacto do projeto.</a:t>
             </a:r>
             <a:endParaRPr lang="en-US" dirty="0"/>
           </a:p>
@@ -1957,6 +1958,94 @@
             <a:fld id="{F7021451-1387-4CA6-816F-3879F97B5CBC}" type="slidenum">
               <a:rPr lang="en-US"/>
               <a:t>24</a:t>
+            </a:fld>
+            <a:endParaRPr lang="en-US"/>
+          </a:p>
+        </p:txBody>
+      </p:sp>
+    </p:spTree>
+    <p:extLst>
+      <p:ext uri="{BB962C8B-B14F-4D97-AF65-F5344CB8AC3E}">
+        <p14:creationId xmlns:p14="http://schemas.microsoft.com/office/powerpoint/2010/main" val="1024086991"/>
+      </p:ext>
+    </p:extLst>
+  </p:cSld>
+  <p:clrMapOvr>
+    <a:masterClrMapping/>
+  </p:clrMapOvr>
+</p:notes>
+</file>
+
+<file path=ppt/notesSlides/notesSlide25.xml><?xml version="1.0" encoding="utf-8"?>
+<p:notes xmlns:a="http://schemas.openxmlformats.org/drawingml/2006/main" xmlns:r="http://schemas.openxmlformats.org/officeDocument/2006/relationships" xmlns:p="http://schemas.openxmlformats.org/presentationml/2006/main">
+  <p:cSld>
+    <p:spTree>
+      <p:nvGrpSpPr>
+        <p:cNvPr id="1" name=""/>
+        <p:cNvGrpSpPr/>
+        <p:nvPr/>
+      </p:nvGrpSpPr>
+      <p:grpSpPr>
+        <a:xfrm>
+          <a:off x="0" y="0"/>
+          <a:ext cx="0" cy="0"/>
+          <a:chOff x="0" y="0"/>
+          <a:chExt cx="0" cy="0"/>
+        </a:xfrm>
+      </p:grpSpPr>
+      <p:sp>
+        <p:nvSpPr>
+          <p:cNvPr id="2" name="Slide Image Placeholder 1"/>
+          <p:cNvSpPr>
+            <a:spLocks noGrp="1" noRot="1" noChangeAspect="1"/>
+          </p:cNvSpPr>
+          <p:nvPr>
+            <p:ph type="sldImg"/>
+          </p:nvPr>
+        </p:nvSpPr>
+        <p:spPr/>
+      </p:sp>
+      <p:sp>
+        <p:nvSpPr>
+          <p:cNvPr id="3" name="Notes Placeholder 2"/>
+          <p:cNvSpPr>
+            <a:spLocks noGrp="1"/>
+          </p:cNvSpPr>
+          <p:nvPr>
+            <p:ph type="body" idx="1"/>
+          </p:nvPr>
+        </p:nvSpPr>
+        <p:spPr/>
+        <p:txBody>
+          <a:bodyPr/>
+          <a:lstStyle/>
+          <a:p>
+            <a:r>
+              <a:rPr lang="en-US" dirty="0"/>
+              <a:t>Encerramento e agradecimentos.</a:t>
+            </a:r>
+            <a:endParaRPr lang="en-US" dirty="0"/>
+          </a:p>
+        </p:txBody>
+      </p:sp>
+      <p:sp>
+        <p:nvSpPr>
+          <p:cNvPr id="4" name="Slide Number Placeholder 3"/>
+          <p:cNvSpPr>
+            <a:spLocks noGrp="1"/>
+          </p:cNvSpPr>
+          <p:nvPr>
+            <p:ph type="sldNum" sz="quarter" idx="10"/>
+          </p:nvPr>
+        </p:nvSpPr>
+        <p:spPr/>
+        <p:txBody>
+          <a:bodyPr/>
+          <a:lstStyle/>
+          <a:p>
+            <a:fld id="{F7021451-1387-4CA6-816F-3879F97B5CBC}" type="slidenum">
+              <a:rPr lang="en-US"/>
+              <a:t>25</a:t>
             </a:fld>
             <a:endParaRPr lang="en-US"/>
           </a:p>
@@ -2924,24 +3013,22 @@
       </p:grpSpPr>
       <p:pic>
         <p:nvPicPr>
-          <p:cNvPr id="2" name="Image 0" descr="/home/claude/pulso/docs/evidencias/m2_ecg_branco.png">    </p:cNvPr>
+          <p:cNvPr id="2" name="Image 0" descr="/home/claude/pulso/docs/evidencias/logo_pulso.png">    </p:cNvPr>
           <p:cNvPicPr>
             <a:picLocks noChangeAspect="1"/>
           </p:cNvPicPr>
           <p:nvPr/>
         </p:nvPicPr>
         <p:blipFill>
-          <a:blip r:embed="rId1">
-            <a:alphaModFix amt="22000"/>
-          </a:blip>
+          <a:blip r:embed="rId1"/>
           <a:stretch>
             <a:fillRect/>
           </a:stretch>
         </p:blipFill>
         <p:spPr>
           <a:xfrm>
-            <a:off x="0" y="932688"/>
-            <a:ext cx="12188952" cy="1060704"/>
+            <a:off x="566928" y="1042416"/>
+            <a:ext cx="3063240" cy="1737360"/>
           </a:xfrm>
           <a:prstGeom prst="rect">
             <a:avLst/>
@@ -2956,8 +3043,8 @@
         </p:nvSpPr>
         <p:spPr>
           <a:xfrm>
-            <a:off x="566928" y="2121408"/>
-            <a:ext cx="11055096" cy="1024128"/>
+            <a:off x="566928" y="2889504"/>
+            <a:ext cx="11055096" cy="932688"/>
           </a:xfrm>
           <a:prstGeom prst="rect">
             <a:avLst/>
@@ -2973,7 +3060,7 @@
               <a:buNone/>
             </a:pPr>
             <a:r>
-              <a:rPr lang="en-US" sz="6200" b="1" spc="600" kern="0" dirty="0">
+              <a:rPr lang="en-US" sz="5600" b="1" spc="600" kern="0" dirty="0">
                 <a:solidFill>
                   <a:srgbClr val="FFFFFF"/>
                 </a:solidFill>
@@ -2983,7 +3070,7 @@
               </a:rPr>
               <a:t>PULSO</a:t>
             </a:r>
-            <a:endParaRPr lang="en-US" sz="6200" dirty="0"/>
+            <a:endParaRPr lang="en-US" sz="5600" dirty="0"/>
           </a:p>
         </p:txBody>
       </p:sp>
@@ -2995,24 +3082,24 @@
         </p:nvSpPr>
         <p:spPr>
           <a:xfrm>
-            <a:off x="566928" y="3182112"/>
-            <a:ext cx="11055096" cy="384048"/>
-          </a:xfrm>
-          <a:prstGeom prst="rect">
-            <a:avLst/>
-          </a:prstGeom>
-          <a:noFill/>
-          <a:ln/>
-        </p:spPr>
-        <p:txBody>
-          <a:bodyPr wrap="square" lIns="0" tIns="0" rIns="0" bIns="0" rtlCol="0" anchor="ctr"/>
-          <a:lstStyle/>
-          <a:p>
-            <a:pPr indent="0" marL="0">
-              <a:buNone/>
-            </a:pPr>
-            <a:r>
-              <a:rPr lang="en-US" sz="1900" dirty="0">
+            <a:off x="566928" y="3840480"/>
+            <a:ext cx="11055096" cy="365760"/>
+          </a:xfrm>
+          <a:prstGeom prst="rect">
+            <a:avLst/>
+          </a:prstGeom>
+          <a:noFill/>
+          <a:ln/>
+        </p:spPr>
+        <p:txBody>
+          <a:bodyPr wrap="square" lIns="0" tIns="0" rIns="0" bIns="0" rtlCol="0" anchor="ctr"/>
+          <a:lstStyle/>
+          <a:p>
+            <a:pPr indent="0" marL="0">
+              <a:buNone/>
+            </a:pPr>
+            <a:r>
+              <a:rPr lang="en-US" sz="1700" dirty="0">
                 <a:solidFill>
                   <a:srgbClr val="009B98"/>
                 </a:solidFill>
@@ -3022,7 +3109,7 @@
               </a:rPr>
               <a:t>Painel Único de Leitos, Saúde e Ocupação</a:t>
             </a:r>
-            <a:endParaRPr lang="en-US" sz="1900" dirty="0"/>
+            <a:endParaRPr lang="en-US" sz="1700" dirty="0"/>
           </a:p>
         </p:txBody>
       </p:sp>
@@ -3034,7 +3121,7 @@
         </p:nvSpPr>
         <p:spPr>
           <a:xfrm>
-            <a:off x="566928" y="3767328"/>
+            <a:off x="566928" y="4352544"/>
             <a:ext cx="1463040" cy="32004"/>
           </a:xfrm>
           <a:prstGeom prst="rect">
@@ -3054,24 +3141,24 @@
         </p:nvSpPr>
         <p:spPr>
           <a:xfrm>
-            <a:off x="566928" y="3986784"/>
-            <a:ext cx="8595360" cy="365760"/>
-          </a:xfrm>
-          <a:prstGeom prst="rect">
-            <a:avLst/>
-          </a:prstGeom>
-          <a:noFill/>
-          <a:ln/>
-        </p:spPr>
-        <p:txBody>
-          <a:bodyPr wrap="square" lIns="0" tIns="0" rIns="0" bIns="0" rtlCol="0" anchor="ctr"/>
-          <a:lstStyle/>
-          <a:p>
-            <a:pPr indent="0" marL="0">
-              <a:buNone/>
-            </a:pPr>
-            <a:r>
-              <a:rPr lang="en-US" sz="1500" dirty="0">
+            <a:off x="566928" y="4553712"/>
+            <a:ext cx="8595360" cy="329184"/>
+          </a:xfrm>
+          <a:prstGeom prst="rect">
+            <a:avLst/>
+          </a:prstGeom>
+          <a:noFill/>
+          <a:ln/>
+        </p:spPr>
+        <p:txBody>
+          <a:bodyPr wrap="square" lIns="0" tIns="0" rIns="0" bIns="0" rtlCol="0" anchor="ctr"/>
+          <a:lstStyle/>
+          <a:p>
+            <a:pPr indent="0" marL="0">
+              <a:buNone/>
+            </a:pPr>
+            <a:r>
+              <a:rPr lang="en-US" sz="1400" dirty="0">
                 <a:solidFill>
                   <a:srgbClr val="C9DBE2"/>
                 </a:solidFill>
@@ -3081,7 +3168,7 @@
               </a:rPr>
               <a:t>Sprint 2 — MVP preliminar e evidências de construção da solução</a:t>
             </a:r>
-            <a:endParaRPr lang="en-US" sz="1500" dirty="0"/>
+            <a:endParaRPr lang="en-US" sz="1400" dirty="0"/>
           </a:p>
         </p:txBody>
       </p:sp>
@@ -3093,24 +3180,24 @@
         </p:nvSpPr>
         <p:spPr>
           <a:xfrm>
-            <a:off x="566928" y="4407408"/>
-            <a:ext cx="8595360" cy="329184"/>
-          </a:xfrm>
-          <a:prstGeom prst="rect">
-            <a:avLst/>
-          </a:prstGeom>
-          <a:noFill/>
-          <a:ln/>
-        </p:spPr>
-        <p:txBody>
-          <a:bodyPr wrap="square" lIns="0" tIns="0" rIns="0" bIns="0" rtlCol="0" anchor="ctr"/>
-          <a:lstStyle/>
-          <a:p>
-            <a:pPr indent="0" marL="0">
-              <a:buNone/>
-            </a:pPr>
-            <a:r>
-              <a:rPr lang="en-US" sz="1300" dirty="0">
+            <a:off x="566928" y="4919472"/>
+            <a:ext cx="8595360" cy="310896"/>
+          </a:xfrm>
+          <a:prstGeom prst="rect">
+            <a:avLst/>
+          </a:prstGeom>
+          <a:noFill/>
+          <a:ln/>
+        </p:spPr>
+        <p:txBody>
+          <a:bodyPr wrap="square" lIns="0" tIns="0" rIns="0" bIns="0" rtlCol="0" anchor="ctr"/>
+          <a:lstStyle/>
+          <a:p>
+            <a:pPr indent="0" marL="0">
+              <a:buNone/>
+            </a:pPr>
+            <a:r>
+              <a:rPr lang="en-US" sz="1250" dirty="0">
                 <a:solidFill>
                   <a:srgbClr val="6B8592"/>
                 </a:solidFill>
@@ -3118,9 +3205,9 @@
                 <a:ea typeface="Calibri" pitchFamily="34" charset="-122"/>
                 <a:cs typeface="Calibri" pitchFamily="34" charset="-120"/>
               </a:rPr>
-              <a:t>Equipe Vital Analytics  ·  Turma 1TSCOA  ·  Challenge Oracle + FIAP 2026</a:t>
-            </a:r>
-            <a:endParaRPr lang="en-US" sz="1300" dirty="0"/>
+              <a:t>Equipe Vital Analytics  ·  Turma 1TSCOB  ·  Challenge Oracle + FIAP 2026</a:t>
+            </a:r>
+            <a:endParaRPr lang="en-US" sz="1250" dirty="0"/>
           </a:p>
         </p:txBody>
       </p:sp>
@@ -3132,8 +3219,8 @@
         </p:nvSpPr>
         <p:spPr>
           <a:xfrm>
-            <a:off x="566928" y="5138928"/>
-            <a:ext cx="3474720" cy="457200"/>
+            <a:off x="566928" y="5504688"/>
+            <a:ext cx="3474720" cy="420624"/>
           </a:xfrm>
           <a:prstGeom prst="rect">
             <a:avLst/>
@@ -3149,7 +3236,7 @@
               <a:buNone/>
             </a:pPr>
             <a:r>
-              <a:rPr lang="en-US" sz="2500" b="1" dirty="0">
+              <a:rPr lang="en-US" sz="2200" b="1" dirty="0">
                 <a:solidFill>
                   <a:srgbClr val="009B98"/>
                 </a:solidFill>
@@ -3159,7 +3246,7 @@
               </a:rPr>
               <a:t>2,91 mi</a:t>
             </a:r>
-            <a:endParaRPr lang="en-US" sz="2500" dirty="0"/>
+            <a:endParaRPr lang="en-US" sz="2200" dirty="0"/>
           </a:p>
         </p:txBody>
       </p:sp>
@@ -3171,24 +3258,24 @@
         </p:nvSpPr>
         <p:spPr>
           <a:xfrm>
-            <a:off x="566928" y="5614416"/>
-            <a:ext cx="3474720" cy="310896"/>
-          </a:xfrm>
-          <a:prstGeom prst="rect">
-            <a:avLst/>
-          </a:prstGeom>
-          <a:noFill/>
-          <a:ln/>
-        </p:spPr>
-        <p:txBody>
-          <a:bodyPr wrap="square" lIns="0" tIns="0" rIns="0" bIns="0" rtlCol="0" anchor="ctr"/>
-          <a:lstStyle/>
-          <a:p>
-            <a:pPr indent="0" marL="0">
-              <a:buNone/>
-            </a:pPr>
-            <a:r>
-              <a:rPr lang="en-US" sz="1100" dirty="0">
+            <a:off x="566928" y="5943600"/>
+            <a:ext cx="3474720" cy="292608"/>
+          </a:xfrm>
+          <a:prstGeom prst="rect">
+            <a:avLst/>
+          </a:prstGeom>
+          <a:noFill/>
+          <a:ln/>
+        </p:spPr>
+        <p:txBody>
+          <a:bodyPr wrap="square" lIns="0" tIns="0" rIns="0" bIns="0" rtlCol="0" anchor="ctr"/>
+          <a:lstStyle/>
+          <a:p>
+            <a:pPr indent="0" marL="0">
+              <a:buNone/>
+            </a:pPr>
+            <a:r>
+              <a:rPr lang="en-US" sz="1050" dirty="0">
                 <a:solidFill>
                   <a:srgbClr val="9FB6C0"/>
                 </a:solidFill>
@@ -3198,7 +3285,7 @@
               </a:rPr>
               <a:t>internações reais processadas</a:t>
             </a:r>
-            <a:endParaRPr lang="en-US" sz="1100" dirty="0"/>
+            <a:endParaRPr lang="en-US" sz="1050" dirty="0"/>
           </a:p>
         </p:txBody>
       </p:sp>
@@ -3210,8 +3297,8 @@
         </p:nvSpPr>
         <p:spPr>
           <a:xfrm>
-            <a:off x="4315968" y="5138928"/>
-            <a:ext cx="3474720" cy="457200"/>
+            <a:off x="4315968" y="5504688"/>
+            <a:ext cx="3474720" cy="420624"/>
           </a:xfrm>
           <a:prstGeom prst="rect">
             <a:avLst/>
@@ -3227,7 +3314,7 @@
               <a:buNone/>
             </a:pPr>
             <a:r>
-              <a:rPr lang="en-US" sz="2500" b="1" dirty="0">
+              <a:rPr lang="en-US" sz="2200" b="1" dirty="0">
                 <a:solidFill>
                   <a:srgbClr val="009B98"/>
                 </a:solidFill>
@@ -3237,7 +3324,7 @@
               </a:rPr>
               <a:t>3 fontes</a:t>
             </a:r>
-            <a:endParaRPr lang="en-US" sz="2500" dirty="0"/>
+            <a:endParaRPr lang="en-US" sz="2200" dirty="0"/>
           </a:p>
         </p:txBody>
       </p:sp>
@@ -3249,24 +3336,24 @@
         </p:nvSpPr>
         <p:spPr>
           <a:xfrm>
-            <a:off x="4315968" y="5614416"/>
-            <a:ext cx="3474720" cy="310896"/>
-          </a:xfrm>
-          <a:prstGeom prst="rect">
-            <a:avLst/>
-          </a:prstGeom>
-          <a:noFill/>
-          <a:ln/>
-        </p:spPr>
-        <p:txBody>
-          <a:bodyPr wrap="square" lIns="0" tIns="0" rIns="0" bIns="0" rtlCol="0" anchor="ctr"/>
-          <a:lstStyle/>
-          <a:p>
-            <a:pPr indent="0" marL="0">
-              <a:buNone/>
-            </a:pPr>
-            <a:r>
-              <a:rPr lang="en-US" sz="1100" dirty="0">
+            <a:off x="4315968" y="5943600"/>
+            <a:ext cx="3474720" cy="292608"/>
+          </a:xfrm>
+          <a:prstGeom prst="rect">
+            <a:avLst/>
+          </a:prstGeom>
+          <a:noFill/>
+          <a:ln/>
+        </p:spPr>
+        <p:txBody>
+          <a:bodyPr wrap="square" lIns="0" tIns="0" rIns="0" bIns="0" rtlCol="0" anchor="ctr"/>
+          <a:lstStyle/>
+          <a:p>
+            <a:pPr indent="0" marL="0">
+              <a:buNone/>
+            </a:pPr>
+            <a:r>
+              <a:rPr lang="en-US" sz="1050" dirty="0">
                 <a:solidFill>
                   <a:srgbClr val="9FB6C0"/>
                 </a:solidFill>
@@ -3276,7 +3363,7 @@
               </a:rPr>
               <a:t>SIH/SUS · CNES · IBGE</a:t>
             </a:r>
-            <a:endParaRPr lang="en-US" sz="1100" dirty="0"/>
+            <a:endParaRPr lang="en-US" sz="1050" dirty="0"/>
           </a:p>
         </p:txBody>
       </p:sp>
@@ -3288,8 +3375,8 @@
         </p:nvSpPr>
         <p:spPr>
           <a:xfrm>
-            <a:off x="8065008" y="5138928"/>
-            <a:ext cx="3474720" cy="457200"/>
+            <a:off x="8065008" y="5504688"/>
+            <a:ext cx="3474720" cy="420624"/>
           </a:xfrm>
           <a:prstGeom prst="rect">
             <a:avLst/>
@@ -3305,7 +3392,7 @@
               <a:buNone/>
             </a:pPr>
             <a:r>
-              <a:rPr lang="en-US" sz="2500" b="1" dirty="0">
+              <a:rPr lang="en-US" sz="2200" b="1" dirty="0">
                 <a:solidFill>
                   <a:srgbClr val="009B98"/>
                 </a:solidFill>
@@ -3315,7 +3402,7 @@
               </a:rPr>
               <a:t>645</a:t>
             </a:r>
-            <a:endParaRPr lang="en-US" sz="2500" dirty="0"/>
+            <a:endParaRPr lang="en-US" sz="2200" dirty="0"/>
           </a:p>
         </p:txBody>
       </p:sp>
@@ -3327,24 +3414,24 @@
         </p:nvSpPr>
         <p:spPr>
           <a:xfrm>
-            <a:off x="8065008" y="5614416"/>
-            <a:ext cx="3474720" cy="310896"/>
-          </a:xfrm>
-          <a:prstGeom prst="rect">
-            <a:avLst/>
-          </a:prstGeom>
-          <a:noFill/>
-          <a:ln/>
-        </p:spPr>
-        <p:txBody>
-          <a:bodyPr wrap="square" lIns="0" tIns="0" rIns="0" bIns="0" rtlCol="0" anchor="ctr"/>
-          <a:lstStyle/>
-          <a:p>
-            <a:pPr indent="0" marL="0">
-              <a:buNone/>
-            </a:pPr>
-            <a:r>
-              <a:rPr lang="en-US" sz="1100" dirty="0">
+            <a:off x="8065008" y="5943600"/>
+            <a:ext cx="3474720" cy="292608"/>
+          </a:xfrm>
+          <a:prstGeom prst="rect">
+            <a:avLst/>
+          </a:prstGeom>
+          <a:noFill/>
+          <a:ln/>
+        </p:spPr>
+        <p:txBody>
+          <a:bodyPr wrap="square" lIns="0" tIns="0" rIns="0" bIns="0" rtlCol="0" anchor="ctr"/>
+          <a:lstStyle/>
+          <a:p>
+            <a:pPr indent="0" marL="0">
+              <a:buNone/>
+            </a:pPr>
+            <a:r>
+              <a:rPr lang="en-US" sz="1050" dirty="0">
                 <a:solidFill>
                   <a:srgbClr val="9FB6C0"/>
                 </a:solidFill>
@@ -3354,7 +3441,7 @@
               </a:rPr>
               <a:t>municípios analisados</a:t>
             </a:r>
-            <a:endParaRPr lang="en-US" sz="1100" dirty="0"/>
+            <a:endParaRPr lang="en-US" sz="1050" dirty="0"/>
           </a:p>
         </p:txBody>
       </p:sp>
@@ -4408,7 +4495,7 @@
                 <a:ea typeface="Calibri" pitchFamily="34" charset="-122"/>
                 <a:cs typeface="Calibri" pitchFamily="34" charset="-120"/>
               </a:rPr>
-              <a:t>PULSO · Vital Analytics · 1TSCOA</a:t>
+              <a:t>PULSO · Vital Analytics · 1TSCOB</a:t>
             </a:r>
             <a:endParaRPr lang="en-US" sz="850" dirty="0"/>
           </a:p>
@@ -4775,7 +4862,7 @@
                 <a:ea typeface="Calibri" pitchFamily="34" charset="-122"/>
                 <a:cs typeface="Calibri" pitchFamily="34" charset="-120"/>
               </a:rPr>
-              <a:t>PULSO · Vital Analytics · 1TSCOA</a:t>
+              <a:t>PULSO · Vital Analytics · 1TSCOB</a:t>
             </a:r>
             <a:endParaRPr lang="en-US" sz="850" dirty="0"/>
           </a:p>
@@ -5625,7 +5712,7 @@
                 <a:ea typeface="Calibri" pitchFamily="34" charset="-122"/>
                 <a:cs typeface="Calibri" pitchFamily="34" charset="-120"/>
               </a:rPr>
-              <a:t>PULSO · Vital Analytics · 1TSCOA</a:t>
+              <a:t>PULSO · Vital Analytics · 1TSCOB</a:t>
             </a:r>
             <a:endParaRPr lang="en-US" sz="850" dirty="0"/>
           </a:p>
@@ -6822,7 +6909,7 @@
                 <a:ea typeface="Calibri" pitchFamily="34" charset="-122"/>
                 <a:cs typeface="Calibri" pitchFamily="34" charset="-120"/>
               </a:rPr>
-              <a:t>PULSO · Vital Analytics · 1TSCOA</a:t>
+              <a:t>PULSO · Vital Analytics · 1TSCOB</a:t>
             </a:r>
             <a:endParaRPr lang="en-US" sz="850" dirty="0"/>
           </a:p>
@@ -8137,7 +8224,7 @@
                 <a:ea typeface="Calibri" pitchFamily="34" charset="-122"/>
                 <a:cs typeface="Calibri" pitchFamily="34" charset="-120"/>
               </a:rPr>
-              <a:t>PULSO · Vital Analytics · 1TSCOA</a:t>
+              <a:t>PULSO · Vital Analytics · 1TSCOB</a:t>
             </a:r>
             <a:endParaRPr lang="en-US" sz="850" dirty="0"/>
           </a:p>
@@ -8985,7 +9072,7 @@
                 <a:ea typeface="Calibri" pitchFamily="34" charset="-122"/>
                 <a:cs typeface="Calibri" pitchFamily="34" charset="-120"/>
               </a:rPr>
-              <a:t>PULSO · Vital Analytics · 1TSCOA</a:t>
+              <a:t>PULSO · Vital Analytics · 1TSCOB</a:t>
             </a:r>
             <a:endParaRPr lang="en-US" sz="850" dirty="0"/>
           </a:p>
@@ -9418,7 +9505,7 @@
                 <a:ea typeface="Calibri" pitchFamily="34" charset="-122"/>
                 <a:cs typeface="Calibri" pitchFamily="34" charset="-120"/>
               </a:rPr>
-              <a:t>PULSO · Vital Analytics · 1TSCOA</a:t>
+              <a:t>PULSO · Vital Analytics · 1TSCOB</a:t>
             </a:r>
             <a:endParaRPr lang="en-US" sz="850" dirty="0"/>
           </a:p>
@@ -9790,7 +9877,7 @@
                 <a:ea typeface="Calibri" pitchFamily="34" charset="-122"/>
                 <a:cs typeface="Calibri" pitchFamily="34" charset="-120"/>
               </a:rPr>
-              <a:t>PULSO · Vital Analytics · 1TSCOA</a:t>
+              <a:t>PULSO · Vital Analytics · 1TSCOB</a:t>
             </a:r>
             <a:endParaRPr lang="en-US" sz="850" dirty="0"/>
           </a:p>
@@ -10223,7 +10310,7 @@
                 <a:ea typeface="Calibri" pitchFamily="34" charset="-122"/>
                 <a:cs typeface="Calibri" pitchFamily="34" charset="-120"/>
               </a:rPr>
-              <a:t>PULSO · Vital Analytics · 1TSCOA</a:t>
+              <a:t>PULSO · Vital Analytics · 1TSCOB</a:t>
             </a:r>
             <a:endParaRPr lang="en-US" sz="850" dirty="0"/>
           </a:p>
@@ -10385,7 +10472,7 @@
                 <a:ea typeface="Arial" pitchFamily="34" charset="-122"/>
                 <a:cs typeface="Arial" pitchFamily="34" charset="-120"/>
               </a:rPr>
-              <a:t>Camada Oracle — Select AI e persistência</a:t>
+              <a:t>Camada Oracle — ambiente no ar e carga conferida</a:t>
             </a:r>
             <a:endParaRPr lang="en-US" sz="2500" dirty="0"/>
           </a:p>
@@ -10424,26 +10511,196 @@
                 <a:ea typeface="Calibri" pitchFamily="34" charset="-122"/>
                 <a:cs typeface="Calibri" pitchFamily="34" charset="-120"/>
               </a:rPr>
-              <a:t>O gestor pergunta em português; o banco gera o SQL, executa e responde</a:t>
+              <a:t>Autonomous Database 23ai Always Free, região Brazil East (São Paulo)</a:t>
             </a:r>
             <a:endParaRPr lang="en-US" sz="1250" dirty="0"/>
           </a:p>
         </p:txBody>
       </p:sp>
-      <p:sp>
-        <p:nvSpPr>
-          <p:cNvPr id="6" name="Shape 4"/>
+      <p:pic>
+        <p:nvPicPr>
+          <p:cNvPr id="6" name="Image 0" descr="/home/claude/pulso/docs/evidencias/oracle/oracle_01_adb_provisionado.png">    </p:cNvPr>
+          <p:cNvPicPr>
+            <a:picLocks noChangeAspect="1"/>
+          </p:cNvPicPr>
+          <p:nvPr/>
+        </p:nvPicPr>
+        <p:blipFill>
+          <a:blip r:embed="rId1"/>
+          <a:stretch>
+            <a:fillRect/>
+          </a:stretch>
+        </p:blipFill>
+        <p:spPr>
+          <a:xfrm>
+            <a:off x="566928" y="1426464"/>
+            <a:ext cx="5532120" cy="2542032"/>
+          </a:xfrm>
+          <a:prstGeom prst="rect">
+            <a:avLst/>
+          </a:prstGeom>
+        </p:spPr>
+      </p:pic>
+      <p:sp>
+        <p:nvSpPr>
+          <p:cNvPr id="7" name="Shape 4"/>
           <p:cNvSpPr/>
           <p:nvPr/>
         </p:nvSpPr>
         <p:spPr>
           <a:xfrm>
-            <a:off x="566928" y="1444752"/>
-            <a:ext cx="5779008" cy="4224528"/>
+            <a:off x="566928" y="1426464"/>
+            <a:ext cx="5532120" cy="2542032"/>
+          </a:xfrm>
+          <a:prstGeom prst="rect">
+            <a:avLst/>
+          </a:prstGeom>
+          <a:ln w="9525">
+            <a:solidFill>
+              <a:srgbClr val="D3DFE3"/>
+            </a:solidFill>
+            <a:prstDash val="solid"/>
+          </a:ln>
+        </p:spPr>
+      </p:sp>
+      <p:sp>
+        <p:nvSpPr>
+          <p:cNvPr id="8" name="Text 5"/>
+          <p:cNvSpPr txBox="1"/>
+          <p:nvPr/>
+        </p:nvSpPr>
+        <p:spPr>
+          <a:xfrm>
+            <a:off x="566928" y="4023360"/>
+            <a:ext cx="5532120" cy="274320"/>
+          </a:xfrm>
+          <a:prstGeom prst="rect">
+            <a:avLst/>
+          </a:prstGeom>
+          <a:noFill/>
+          <a:ln/>
+        </p:spPr>
+        <p:txBody>
+          <a:bodyPr wrap="square" lIns="0" tIns="0" rIns="0" bIns="0" rtlCol="0" anchor="ctr"/>
+          <a:lstStyle/>
+          <a:p>
+            <a:pPr indent="0" marL="0">
+              <a:buNone/>
+            </a:pPr>
+            <a:r>
+              <a:rPr lang="en-US" sz="1050" i="1" dirty="0">
+                <a:solidFill>
+                  <a:srgbClr val="6B8592"/>
+                </a:solidFill>
+                <a:latin typeface="Calibri" pitchFamily="34" charset="0"/>
+                <a:ea typeface="Calibri" pitchFamily="34" charset="-122"/>
+                <a:cs typeface="Calibri" pitchFamily="34" charset="-120"/>
+              </a:rPr>
+              <a:t>Instância PULSO com status Available</a:t>
+            </a:r>
+            <a:endParaRPr lang="en-US" sz="1050" dirty="0"/>
+          </a:p>
+        </p:txBody>
+      </p:sp>
+      <p:pic>
+        <p:nvPicPr>
+          <p:cNvPr id="9" name="Image 1" descr="/home/claude/pulso/docs/evidencias/oracle/evidencia_08_controle.png">    </p:cNvPr>
+          <p:cNvPicPr>
+            <a:picLocks noChangeAspect="1"/>
+          </p:cNvPicPr>
+          <p:nvPr/>
+        </p:nvPicPr>
+        <p:blipFill>
+          <a:blip r:embed="rId2"/>
+          <a:stretch>
+            <a:fillRect/>
+          </a:stretch>
+        </p:blipFill>
+        <p:spPr>
+          <a:xfrm>
+            <a:off x="6373368" y="1426464"/>
+            <a:ext cx="5239512" cy="2542032"/>
+          </a:xfrm>
+          <a:prstGeom prst="rect">
+            <a:avLst/>
+          </a:prstGeom>
+        </p:spPr>
+      </p:pic>
+      <p:sp>
+        <p:nvSpPr>
+          <p:cNvPr id="10" name="Shape 6"/>
+          <p:cNvSpPr/>
+          <p:nvPr/>
+        </p:nvSpPr>
+        <p:spPr>
+          <a:xfrm>
+            <a:off x="6373368" y="1426464"/>
+            <a:ext cx="5239512" cy="2542032"/>
+          </a:xfrm>
+          <a:prstGeom prst="rect">
+            <a:avLst/>
+          </a:prstGeom>
+          <a:ln w="9525">
+            <a:solidFill>
+              <a:srgbClr val="D3DFE3"/>
+            </a:solidFill>
+            <a:prstDash val="solid"/>
+          </a:ln>
+        </p:spPr>
+      </p:sp>
+      <p:sp>
+        <p:nvSpPr>
+          <p:cNvPr id="11" name="Text 7"/>
+          <p:cNvSpPr txBox="1"/>
+          <p:nvPr/>
+        </p:nvSpPr>
+        <p:spPr>
+          <a:xfrm>
+            <a:off x="6373368" y="4023360"/>
+            <a:ext cx="5239512" cy="274320"/>
+          </a:xfrm>
+          <a:prstGeom prst="rect">
+            <a:avLst/>
+          </a:prstGeom>
+          <a:noFill/>
+          <a:ln/>
+        </p:spPr>
+        <p:txBody>
+          <a:bodyPr wrap="square" lIns="0" tIns="0" rIns="0" bIns="0" rtlCol="0" anchor="ctr"/>
+          <a:lstStyle/>
+          <a:p>
+            <a:pPr indent="0" marL="0">
+              <a:buNone/>
+            </a:pPr>
+            <a:r>
+              <a:rPr lang="en-US" sz="1050" i="1" dirty="0">
+                <a:solidFill>
+                  <a:srgbClr val="6B8592"/>
+                </a:solidFill>
+                <a:latin typeface="Calibri" pitchFamily="34" charset="0"/>
+                <a:ea typeface="Calibri" pitchFamily="34" charset="-122"/>
+                <a:cs typeface="Calibri" pitchFamily="34" charset="-120"/>
+              </a:rPr>
+              <a:t>Consulta de controle executada dentro do banco</a:t>
+            </a:r>
+            <a:endParaRPr lang="en-US" sz="1050" dirty="0"/>
+          </a:p>
+        </p:txBody>
+      </p:sp>
+      <p:sp>
+        <p:nvSpPr>
+          <p:cNvPr id="12" name="Shape 8"/>
+          <p:cNvSpPr/>
+          <p:nvPr/>
+        </p:nvSpPr>
+        <p:spPr>
+          <a:xfrm>
+            <a:off x="566928" y="4425696"/>
+            <a:ext cx="11055096" cy="1371600"/>
           </a:xfrm>
           <a:prstGeom prst="roundRect">
             <a:avLst>
-              <a:gd name="adj" fmla="val 1948"/>
+              <a:gd name="adj" fmla="val 6000"/>
             </a:avLst>
           </a:prstGeom>
           <a:solidFill>
@@ -10454,779 +10711,506 @@
       </p:sp>
       <p:sp>
         <p:nvSpPr>
-          <p:cNvPr id="7" name="Text 5"/>
-          <p:cNvSpPr txBox="1"/>
-          <p:nvPr/>
-        </p:nvSpPr>
-        <p:spPr>
-          <a:xfrm>
-            <a:off x="841248" y="1645920"/>
-            <a:ext cx="5230368" cy="256032"/>
-          </a:xfrm>
-          <a:prstGeom prst="rect">
-            <a:avLst/>
-          </a:prstGeom>
-          <a:noFill/>
-          <a:ln/>
-        </p:spPr>
-        <p:txBody>
-          <a:bodyPr wrap="square" lIns="0" tIns="0" rIns="0" bIns="0" rtlCol="0" anchor="ctr"/>
-          <a:lstStyle/>
-          <a:p>
-            <a:pPr indent="0" marL="0">
-              <a:buNone/>
-            </a:pPr>
-            <a:r>
-              <a:rPr lang="en-US" sz="900" b="1" spc="60" kern="0" dirty="0">
+          <p:cNvPr id="13" name="Text 9"/>
+          <p:cNvSpPr txBox="1"/>
+          <p:nvPr/>
+        </p:nvSpPr>
+        <p:spPr>
+          <a:xfrm>
+            <a:off x="877824" y="4572000"/>
+            <a:ext cx="10433304" cy="274320"/>
+          </a:xfrm>
+          <a:prstGeom prst="rect">
+            <a:avLst/>
+          </a:prstGeom>
+          <a:noFill/>
+          <a:ln/>
+        </p:spPr>
+        <p:txBody>
+          <a:bodyPr wrap="square" lIns="0" tIns="0" rIns="0" bIns="0" rtlCol="0" anchor="ctr"/>
+          <a:lstStyle/>
+          <a:p>
+            <a:pPr indent="0" marL="0">
+              <a:buNone/>
+            </a:pPr>
+            <a:r>
+              <a:rPr lang="en-US" sz="1250" b="1" dirty="0">
                 <a:solidFill>
                   <a:srgbClr val="009B98"/>
                 </a:solidFill>
-                <a:latin typeface="Calibri" pitchFamily="34" charset="0"/>
-                <a:ea typeface="Calibri" pitchFamily="34" charset="-122"/>
-                <a:cs typeface="Calibri" pitchFamily="34" charset="-120"/>
-              </a:rPr>
-              <a:t>PERFIL DE IA CONFIGURADO NO AUTONOMOUS DATABASE</a:t>
-            </a:r>
-            <a:endParaRPr lang="en-US" sz="900" dirty="0"/>
-          </a:p>
-        </p:txBody>
-      </p:sp>
-      <p:sp>
-        <p:nvSpPr>
-          <p:cNvPr id="8" name="Text 6"/>
-          <p:cNvSpPr txBox="1"/>
-          <p:nvPr/>
-        </p:nvSpPr>
-        <p:spPr>
-          <a:xfrm>
-            <a:off x="841248" y="1956816"/>
-            <a:ext cx="5230368" cy="3511296"/>
-          </a:xfrm>
-          <a:prstGeom prst="rect">
-            <a:avLst/>
-          </a:prstGeom>
-          <a:noFill/>
-          <a:ln/>
-        </p:spPr>
-        <p:txBody>
-          <a:bodyPr wrap="square" lIns="0" tIns="0" rIns="0" bIns="0" rtlCol="0" anchor="t"/>
-          <a:lstStyle/>
-          <a:p>
-            <a:pPr indent="0" marL="0">
-              <a:lnSpc>
-                <a:spcPct val="98000"/>
-              </a:lnSpc>
-              <a:buNone/>
-            </a:pPr>
-            <a:r>
-              <a:rPr lang="en-US" sz="950" dirty="0">
-                <a:solidFill>
-                  <a:srgbClr val="BFD8DC"/>
-                </a:solidFill>
-                <a:latin typeface="Courier New" pitchFamily="34" charset="0"/>
-                <a:ea typeface="Courier New" pitchFamily="34" charset="-122"/>
-                <a:cs typeface="Courier New" pitchFamily="34" charset="-120"/>
-              </a:rPr>
-              <a:t>BEGIN</a:t>
-            </a:r>
-            <a:endParaRPr lang="en-US" sz="950" dirty="0"/>
-          </a:p>
-          <a:p>
-            <a:pPr indent="0" marL="0">
-              <a:lnSpc>
-                <a:spcPct val="98000"/>
-              </a:lnSpc>
-              <a:buNone/>
-            </a:pPr>
-            <a:r>
-              <a:rPr lang="en-US" sz="950" dirty="0">
-                <a:solidFill>
-                  <a:srgbClr val="BFD8DC"/>
-                </a:solidFill>
-                <a:latin typeface="Courier New" pitchFamily="34" charset="0"/>
-                <a:ea typeface="Courier New" pitchFamily="34" charset="-122"/>
-                <a:cs typeface="Courier New" pitchFamily="34" charset="-120"/>
-              </a:rPr>
-              <a:t>  DBMS_CLOUD_AI.CREATE_PROFILE(</a:t>
-            </a:r>
-            <a:endParaRPr lang="en-US" sz="950" dirty="0"/>
-          </a:p>
-          <a:p>
-            <a:pPr indent="0" marL="0">
-              <a:lnSpc>
-                <a:spcPct val="98000"/>
-              </a:lnSpc>
-              <a:buNone/>
-            </a:pPr>
-            <a:r>
-              <a:rPr lang="en-US" sz="950" dirty="0">
-                <a:solidFill>
-                  <a:srgbClr val="BFD8DC"/>
-                </a:solidFill>
-                <a:latin typeface="Courier New" pitchFamily="34" charset="0"/>
-                <a:ea typeface="Courier New" pitchFamily="34" charset="-122"/>
-                <a:cs typeface="Courier New" pitchFamily="34" charset="-120"/>
-              </a:rPr>
-              <a:t>    profile_name =&gt; 'PULSO_AI',</a:t>
-            </a:r>
-            <a:endParaRPr lang="en-US" sz="950" dirty="0"/>
-          </a:p>
-          <a:p>
-            <a:pPr indent="0" marL="0">
-              <a:lnSpc>
-                <a:spcPct val="98000"/>
-              </a:lnSpc>
-              <a:buNone/>
-            </a:pPr>
-            <a:r>
-              <a:rPr lang="en-US" sz="950" dirty="0">
-                <a:solidFill>
-                  <a:srgbClr val="BFD8DC"/>
-                </a:solidFill>
-                <a:latin typeface="Courier New" pitchFamily="34" charset="0"/>
-                <a:ea typeface="Courier New" pitchFamily="34" charset="-122"/>
-                <a:cs typeface="Courier New" pitchFamily="34" charset="-120"/>
-              </a:rPr>
-              <a:t>    attributes   =&gt; '{</a:t>
-            </a:r>
-            <a:endParaRPr lang="en-US" sz="950" dirty="0"/>
-          </a:p>
-          <a:p>
-            <a:pPr indent="0" marL="0">
-              <a:lnSpc>
-                <a:spcPct val="98000"/>
-              </a:lnSpc>
-              <a:buNone/>
-            </a:pPr>
-            <a:r>
-              <a:rPr lang="en-US" sz="950" dirty="0">
-                <a:solidFill>
-                  <a:srgbClr val="BFD8DC"/>
-                </a:solidFill>
-                <a:latin typeface="Courier New" pitchFamily="34" charset="0"/>
-                <a:ea typeface="Courier New" pitchFamily="34" charset="-122"/>
-                <a:cs typeface="Courier New" pitchFamily="34" charset="-120"/>
-              </a:rPr>
-              <a:t>      "provider"        : "openai",</a:t>
-            </a:r>
-            <a:endParaRPr lang="en-US" sz="950" dirty="0"/>
-          </a:p>
-          <a:p>
-            <a:pPr indent="0" marL="0">
-              <a:lnSpc>
-                <a:spcPct val="98000"/>
-              </a:lnSpc>
-              <a:buNone/>
-            </a:pPr>
-            <a:r>
-              <a:rPr lang="en-US" sz="950" dirty="0">
-                <a:solidFill>
-                  <a:srgbClr val="BFD8DC"/>
-                </a:solidFill>
-                <a:latin typeface="Courier New" pitchFamily="34" charset="0"/>
-                <a:ea typeface="Courier New" pitchFamily="34" charset="-122"/>
-                <a:cs typeface="Courier New" pitchFamily="34" charset="-120"/>
-              </a:rPr>
-              <a:t>      "credential_name" : "CRED_IA_PULSO",</a:t>
-            </a:r>
-            <a:endParaRPr lang="en-US" sz="950" dirty="0"/>
-          </a:p>
-          <a:p>
-            <a:pPr indent="0" marL="0">
-              <a:lnSpc>
-                <a:spcPct val="98000"/>
-              </a:lnSpc>
-              <a:buNone/>
-            </a:pPr>
-            <a:r>
-              <a:rPr lang="en-US" sz="950" dirty="0">
-                <a:solidFill>
-                  <a:srgbClr val="BFD8DC"/>
-                </a:solidFill>
-                <a:latin typeface="Courier New" pitchFamily="34" charset="0"/>
-                <a:ea typeface="Courier New" pitchFamily="34" charset="-122"/>
-                <a:cs typeface="Courier New" pitchFamily="34" charset="-120"/>
-              </a:rPr>
-              <a:t>      "comments"        : "true",</a:t>
-            </a:r>
-            <a:endParaRPr lang="en-US" sz="950" dirty="0"/>
-          </a:p>
-          <a:p>
-            <a:pPr indent="0" marL="0">
-              <a:lnSpc>
-                <a:spcPct val="98000"/>
-              </a:lnSpc>
-              <a:buNone/>
-            </a:pPr>
-            <a:r>
-              <a:rPr lang="en-US" sz="950" dirty="0">
-                <a:solidFill>
-                  <a:srgbClr val="BFD8DC"/>
-                </a:solidFill>
-                <a:latin typeface="Courier New" pitchFamily="34" charset="0"/>
-                <a:ea typeface="Courier New" pitchFamily="34" charset="-122"/>
-                <a:cs typeface="Courier New" pitchFamily="34" charset="-120"/>
-              </a:rPr>
-              <a:t>      "object_list"     : [</a:t>
-            </a:r>
-            <a:endParaRPr lang="en-US" sz="950" dirty="0"/>
-          </a:p>
-          <a:p>
-            <a:pPr indent="0" marL="0">
-              <a:lnSpc>
-                <a:spcPct val="98000"/>
-              </a:lnSpc>
-              <a:buNone/>
-            </a:pPr>
-            <a:r>
-              <a:rPr lang="en-US" sz="950" dirty="0">
-                <a:solidFill>
-                  <a:srgbClr val="BFD8DC"/>
-                </a:solidFill>
-                <a:latin typeface="Courier New" pitchFamily="34" charset="0"/>
-                <a:ea typeface="Courier New" pitchFamily="34" charset="-122"/>
-                <a:cs typeface="Courier New" pitchFamily="34" charset="-120"/>
-              </a:rPr>
-              <a:t>        {"owner":"ADMIN","name":"mv_indicadores_municipio"},</a:t>
-            </a:r>
-            <a:endParaRPr lang="en-US" sz="950" dirty="0"/>
-          </a:p>
-          <a:p>
-            <a:pPr indent="0" marL="0">
-              <a:lnSpc>
-                <a:spcPct val="98000"/>
-              </a:lnSpc>
-              <a:buNone/>
-            </a:pPr>
-            <a:r>
-              <a:rPr lang="en-US" sz="950" dirty="0">
-                <a:solidFill>
-                  <a:srgbClr val="BFD8DC"/>
-                </a:solidFill>
-                <a:latin typeface="Courier New" pitchFamily="34" charset="0"/>
-                <a:ea typeface="Courier New" pitchFamily="34" charset="-122"/>
-                <a:cs typeface="Courier New" pitchFamily="34" charset="-120"/>
-              </a:rPr>
-              <a:t>        {"owner":"ADMIN","name":"mv_ranking_criticidade"},</a:t>
-            </a:r>
-            <a:endParaRPr lang="en-US" sz="950" dirty="0"/>
-          </a:p>
-          <a:p>
-            <a:pPr indent="0" marL="0">
-              <a:lnSpc>
-                <a:spcPct val="98000"/>
-              </a:lnSpc>
-              <a:buNone/>
-            </a:pPr>
-            <a:r>
-              <a:rPr lang="en-US" sz="950" dirty="0">
-                <a:solidFill>
-                  <a:srgbClr val="BFD8DC"/>
-                </a:solidFill>
-                <a:latin typeface="Courier New" pitchFamily="34" charset="0"/>
-                <a:ea typeface="Courier New" pitchFamily="34" charset="-122"/>
-                <a:cs typeface="Courier New" pitchFamily="34" charset="-120"/>
-              </a:rPr>
-              <a:t>        {"owner":"ADMIN","name":"mv_tendencia_municipio"},</a:t>
-            </a:r>
-            <a:endParaRPr lang="en-US" sz="950" dirty="0"/>
-          </a:p>
-          <a:p>
-            <a:pPr indent="0" marL="0">
-              <a:lnSpc>
-                <a:spcPct val="98000"/>
-              </a:lnSpc>
-              <a:buNone/>
-            </a:pPr>
-            <a:r>
-              <a:rPr lang="en-US" sz="950" dirty="0">
-                <a:solidFill>
-                  <a:srgbClr val="BFD8DC"/>
-                </a:solidFill>
-                <a:latin typeface="Courier New" pitchFamily="34" charset="0"/>
-                <a:ea typeface="Courier New" pitchFamily="34" charset="-122"/>
-                <a:cs typeface="Courier New" pitchFamily="34" charset="-120"/>
-              </a:rPr>
-              <a:t>        {"owner":"ADMIN","name":"vw_perfil_assistencial"}</a:t>
-            </a:r>
-            <a:endParaRPr lang="en-US" sz="950" dirty="0"/>
-          </a:p>
-          <a:p>
-            <a:pPr indent="0" marL="0">
-              <a:lnSpc>
-                <a:spcPct val="98000"/>
-              </a:lnSpc>
-              <a:buNone/>
-            </a:pPr>
-            <a:r>
-              <a:rPr lang="en-US" sz="950" dirty="0">
-                <a:solidFill>
-                  <a:srgbClr val="BFD8DC"/>
-                </a:solidFill>
-                <a:latin typeface="Courier New" pitchFamily="34" charset="0"/>
-                <a:ea typeface="Courier New" pitchFamily="34" charset="-122"/>
-                <a:cs typeface="Courier New" pitchFamily="34" charset="-120"/>
-              </a:rPr>
-              <a:t>      ]}'</a:t>
-            </a:r>
-            <a:endParaRPr lang="en-US" sz="950" dirty="0"/>
-          </a:p>
-          <a:p>
-            <a:pPr indent="0" marL="0">
-              <a:lnSpc>
-                <a:spcPct val="98000"/>
-              </a:lnSpc>
-              <a:buNone/>
-            </a:pPr>
-            <a:r>
-              <a:rPr lang="en-US" sz="950" dirty="0">
-                <a:solidFill>
-                  <a:srgbClr val="BFD8DC"/>
-                </a:solidFill>
-                <a:latin typeface="Courier New" pitchFamily="34" charset="0"/>
-                <a:ea typeface="Courier New" pitchFamily="34" charset="-122"/>
-                <a:cs typeface="Courier New" pitchFamily="34" charset="-120"/>
-              </a:rPr>
-              <a:t>  );</a:t>
-            </a:r>
-            <a:endParaRPr lang="en-US" sz="950" dirty="0"/>
-          </a:p>
-          <a:p>
-            <a:pPr indent="0" marL="0">
-              <a:lnSpc>
-                <a:spcPct val="98000"/>
-              </a:lnSpc>
-              <a:buNone/>
-            </a:pPr>
-            <a:r>
-              <a:rPr lang="en-US" sz="950" dirty="0">
-                <a:solidFill>
-                  <a:srgbClr val="BFD8DC"/>
-                </a:solidFill>
-                <a:latin typeface="Courier New" pitchFamily="34" charset="0"/>
-                <a:ea typeface="Courier New" pitchFamily="34" charset="-122"/>
-                <a:cs typeface="Courier New" pitchFamily="34" charset="-120"/>
-              </a:rPr>
-              <a:t>END;</a:t>
-            </a:r>
-            <a:endParaRPr lang="en-US" sz="950" dirty="0"/>
-          </a:p>
-          <a:p>
-            <a:pPr indent="0" marL="0">
-              <a:lnSpc>
-                <a:spcPct val="98000"/>
-              </a:lnSpc>
-              <a:buNone/>
-            </a:pPr>
-            <a:r>
-              <a:rPr lang="en-US" sz="950" dirty="0">
-                <a:solidFill>
-                  <a:srgbClr val="BFD8DC"/>
-                </a:solidFill>
-                <a:latin typeface="Courier New" pitchFamily="34" charset="0"/>
-                <a:ea typeface="Courier New" pitchFamily="34" charset="-122"/>
-                <a:cs typeface="Courier New" pitchFamily="34" charset="-120"/>
-              </a:rPr>
-              <a:t>/</a:t>
-            </a:r>
-            <a:endParaRPr lang="en-US" sz="950" dirty="0"/>
-          </a:p>
-          <a:p>
-            <a:pPr indent="0" marL="0">
-              <a:lnSpc>
-                <a:spcPct val="98000"/>
-              </a:lnSpc>
-              <a:buNone/>
-            </a:pPr>
-            <a:endParaRPr lang="en-US" sz="950" dirty="0"/>
-          </a:p>
-          <a:p>
-            <a:pPr indent="0" marL="0">
-              <a:lnSpc>
-                <a:spcPct val="98000"/>
-              </a:lnSpc>
-              <a:buNone/>
-            </a:pPr>
-            <a:r>
-              <a:rPr lang="en-US" sz="950" dirty="0">
-                <a:solidFill>
-                  <a:srgbClr val="BFD8DC"/>
-                </a:solidFill>
-                <a:latin typeface="Courier New" pitchFamily="34" charset="0"/>
-                <a:ea typeface="Courier New" pitchFamily="34" charset="-122"/>
-                <a:cs typeface="Courier New" pitchFamily="34" charset="-120"/>
-              </a:rPr>
-              <a:t>SELECT AI showsql</a:t>
-            </a:r>
-            <a:endParaRPr lang="en-US" sz="950" dirty="0"/>
-          </a:p>
-          <a:p>
-            <a:pPr indent="0" marL="0">
-              <a:lnSpc>
-                <a:spcPct val="98000"/>
-              </a:lnSpc>
-              <a:buNone/>
-            </a:pPr>
-            <a:r>
-              <a:rPr lang="en-US" sz="950" dirty="0">
-                <a:solidFill>
-                  <a:srgbClr val="BFD8DC"/>
-                </a:solidFill>
-                <a:latin typeface="Courier New" pitchFamily="34" charset="0"/>
-                <a:ea typeface="Courier New" pitchFamily="34" charset="-122"/>
-                <a:cs typeface="Courier New" pitchFamily="34" charset="-120"/>
-              </a:rPr>
-              <a:t>  'quais municipios estao com a</a:t>
-            </a:r>
-            <a:endParaRPr lang="en-US" sz="950" dirty="0"/>
-          </a:p>
-          <a:p>
-            <a:pPr indent="0" marL="0">
-              <a:lnSpc>
-                <a:spcPct val="98000"/>
-              </a:lnSpc>
-              <a:buNone/>
-            </a:pPr>
-            <a:r>
-              <a:rPr lang="en-US" sz="950" dirty="0">
-                <a:solidFill>
-                  <a:srgbClr val="BFD8DC"/>
-                </a:solidFill>
-                <a:latin typeface="Courier New" pitchFamily="34" charset="0"/>
-                <a:ea typeface="Courier New" pitchFamily="34" charset="-122"/>
-                <a:cs typeface="Courier New" pitchFamily="34" charset="-120"/>
-              </a:rPr>
-              <a:t>   capacidade hospitalar ultrapassada';</a:t>
-            </a:r>
-            <a:endParaRPr lang="en-US" sz="950" dirty="0"/>
-          </a:p>
-        </p:txBody>
-      </p:sp>
-      <p:sp>
-        <p:nvSpPr>
-          <p:cNvPr id="9" name="Shape 7"/>
-          <p:cNvSpPr/>
-          <p:nvPr/>
-        </p:nvSpPr>
-        <p:spPr>
-          <a:xfrm>
-            <a:off x="6620256" y="1444752"/>
-            <a:ext cx="5001768" cy="1975104"/>
-          </a:xfrm>
-          <a:prstGeom prst="roundRect">
-            <a:avLst>
-              <a:gd name="adj" fmla="val 4167"/>
-            </a:avLst>
-          </a:prstGeom>
-          <a:solidFill>
-            <a:srgbClr val="EEF3F4"/>
-          </a:solidFill>
-          <a:ln/>
-        </p:spPr>
-      </p:sp>
-      <p:sp>
-        <p:nvSpPr>
-          <p:cNvPr id="10" name="Text 8"/>
-          <p:cNvSpPr txBox="1"/>
-          <p:nvPr/>
-        </p:nvSpPr>
-        <p:spPr>
-          <a:xfrm>
-            <a:off x="6894576" y="1645920"/>
-            <a:ext cx="4453128" cy="256032"/>
-          </a:xfrm>
-          <a:prstGeom prst="rect">
-            <a:avLst/>
-          </a:prstGeom>
-          <a:noFill/>
-          <a:ln/>
-        </p:spPr>
-        <p:txBody>
-          <a:bodyPr wrap="square" lIns="0" tIns="0" rIns="0" bIns="0" rtlCol="0" anchor="ctr"/>
-          <a:lstStyle/>
-          <a:p>
-            <a:pPr indent="0" marL="0">
-              <a:buNone/>
-            </a:pPr>
-            <a:r>
-              <a:rPr lang="en-US" sz="900" b="1" spc="60" kern="0" dirty="0">
-                <a:solidFill>
-                  <a:srgbClr val="6B8592"/>
-                </a:solidFill>
-                <a:latin typeface="Calibri" pitchFamily="34" charset="0"/>
-                <a:ea typeface="Calibri" pitchFamily="34" charset="-122"/>
-                <a:cs typeface="Calibri" pitchFamily="34" charset="-120"/>
-              </a:rPr>
-              <a:t>POR QUE A MODELAGEM É O QUE FAZ O SELECT AI FUNCIONAR</a:t>
-            </a:r>
-            <a:endParaRPr lang="en-US" sz="900" dirty="0"/>
-          </a:p>
-        </p:txBody>
-      </p:sp>
-      <p:sp>
-        <p:nvSpPr>
-          <p:cNvPr id="11" name="Text 9"/>
-          <p:cNvSpPr txBox="1"/>
-          <p:nvPr/>
-        </p:nvSpPr>
-        <p:spPr>
-          <a:xfrm>
-            <a:off x="6894576" y="1938528"/>
-            <a:ext cx="4453128" cy="1353312"/>
-          </a:xfrm>
-          <a:prstGeom prst="rect">
-            <a:avLst/>
-          </a:prstGeom>
-          <a:noFill/>
-          <a:ln/>
-        </p:spPr>
-        <p:txBody>
-          <a:bodyPr wrap="square" lIns="0" tIns="0" rIns="0" bIns="0" rtlCol="0" anchor="t"/>
-          <a:lstStyle/>
-          <a:p>
-            <a:pPr indent="0" marL="0">
-              <a:lnSpc>
-                <a:spcPct val="112000"/>
-              </a:lnSpc>
-              <a:buNone/>
-            </a:pPr>
-            <a:r>
-              <a:rPr lang="en-US" sz="1100" dirty="0">
-                <a:solidFill>
-                  <a:srgbClr val="3C5C6B"/>
-                </a:solidFill>
-                <a:latin typeface="Calibri" pitchFamily="34" charset="0"/>
-                <a:ea typeface="Calibri" pitchFamily="34" charset="-122"/>
-                <a:cs typeface="Calibri" pitchFamily="34" charset="-120"/>
-              </a:rPr>
-              <a:t>O object_list é a fronteira do que a IA enxerga — expomos oito views de negócio, não as tabelas cruas. E o atributo "comments" faz a IA ler os COMMENT ON do esquema: é o que permite a ela entender que ocupação acima de 100% significa capacidade ultrapassada, sem que isso esteja escrito na pergunta.</a:t>
-            </a:r>
-            <a:endParaRPr lang="en-US" sz="1100" dirty="0"/>
-          </a:p>
-        </p:txBody>
-      </p:sp>
-      <p:sp>
-        <p:nvSpPr>
-          <p:cNvPr id="12" name="Shape 10"/>
-          <p:cNvSpPr/>
-          <p:nvPr/>
-        </p:nvSpPr>
-        <p:spPr>
-          <a:xfrm>
-            <a:off x="6620256" y="3566160"/>
-            <a:ext cx="5001768" cy="2103120"/>
-          </a:xfrm>
-          <a:prstGeom prst="roundRect">
-            <a:avLst>
-              <a:gd name="adj" fmla="val 3913"/>
-            </a:avLst>
-          </a:prstGeom>
-          <a:solidFill>
-            <a:srgbClr val="EEF3F4"/>
-          </a:solidFill>
-          <a:ln/>
-        </p:spPr>
-      </p:sp>
-      <p:sp>
-        <p:nvSpPr>
-          <p:cNvPr id="13" name="Text 11"/>
-          <p:cNvSpPr txBox="1"/>
-          <p:nvPr/>
-        </p:nvSpPr>
-        <p:spPr>
-          <a:xfrm>
-            <a:off x="6894576" y="3767328"/>
-            <a:ext cx="4453128" cy="256032"/>
-          </a:xfrm>
-          <a:prstGeom prst="rect">
-            <a:avLst/>
-          </a:prstGeom>
-          <a:noFill/>
-          <a:ln/>
-        </p:spPr>
-        <p:txBody>
-          <a:bodyPr wrap="square" lIns="0" tIns="0" rIns="0" bIns="0" rtlCol="0" anchor="ctr"/>
-          <a:lstStyle/>
-          <a:p>
-            <a:pPr indent="0" marL="0">
-              <a:buNone/>
-            </a:pPr>
-            <a:r>
-              <a:rPr lang="en-US" sz="900" b="1" spc="60" kern="0" dirty="0">
-                <a:solidFill>
-                  <a:srgbClr val="6B8592"/>
-                </a:solidFill>
-                <a:latin typeface="Calibri" pitchFamily="34" charset="0"/>
-                <a:ea typeface="Calibri" pitchFamily="34" charset="-122"/>
-                <a:cs typeface="Calibri" pitchFamily="34" charset="-120"/>
-              </a:rPr>
-              <a:t>SETE PERGUNTAS DE NEGÓCIO IMPLEMENTADAS</a:t>
-            </a:r>
-            <a:endParaRPr lang="en-US" sz="900" dirty="0"/>
-          </a:p>
-        </p:txBody>
-      </p:sp>
-      <p:sp>
-        <p:nvSpPr>
-          <p:cNvPr id="14" name="Text 12"/>
-          <p:cNvSpPr txBox="1"/>
-          <p:nvPr/>
-        </p:nvSpPr>
-        <p:spPr>
-          <a:xfrm>
-            <a:off x="6894576" y="4078224"/>
-            <a:ext cx="4453128" cy="1517904"/>
-          </a:xfrm>
-          <a:prstGeom prst="rect">
-            <a:avLst/>
-          </a:prstGeom>
-          <a:noFill/>
-          <a:ln/>
-        </p:spPr>
-        <p:txBody>
-          <a:bodyPr wrap="square" lIns="0" tIns="0" rIns="0" bIns="0" rtlCol="0" anchor="t"/>
-          <a:lstStyle/>
-          <a:p>
-            <a:pPr marL="342900" indent="-342900">
-              <a:lnSpc>
-                <a:spcPct val="105000"/>
-              </a:lnSpc>
-              <a:spcAft>
-                <a:spcPts val="700"/>
-              </a:spcAft>
-              <a:buSzPct val="100000"/>
-              <a:buChar char="•"/>
+                <a:latin typeface="Arial" pitchFamily="34" charset="0"/>
+                <a:ea typeface="Arial" pitchFamily="34" charset="-122"/>
+                <a:cs typeface="Arial" pitchFamily="34" charset="-120"/>
+              </a:rPr>
+              <a:t>Os números do banco batem com os do painel</a:t>
+            </a:r>
+            <a:endParaRPr lang="en-US" sz="1250" dirty="0"/>
+          </a:p>
+        </p:txBody>
+      </p:sp>
+      <p:sp>
+        <p:nvSpPr>
+          <p:cNvPr id="14" name="Text 10"/>
+          <p:cNvSpPr txBox="1"/>
+          <p:nvPr/>
+        </p:nvSpPr>
+        <p:spPr>
+          <a:xfrm>
+            <a:off x="877824" y="4882896"/>
+            <a:ext cx="1738884" cy="365760"/>
+          </a:xfrm>
+          <a:prstGeom prst="rect">
+            <a:avLst/>
+          </a:prstGeom>
+          <a:noFill/>
+          <a:ln/>
+        </p:spPr>
+        <p:txBody>
+          <a:bodyPr wrap="square" lIns="0" tIns="0" rIns="0" bIns="0" rtlCol="0" anchor="b"/>
+          <a:lstStyle/>
+          <a:p>
+            <a:pPr indent="0" marL="0">
+              <a:buNone/>
+            </a:pPr>
+            <a:r>
+              <a:rPr lang="en-US" sz="1600" b="1" dirty="0">
+                <a:solidFill>
+                  <a:srgbClr val="FFFFFF"/>
+                </a:solidFill>
+                <a:latin typeface="Arial" pitchFamily="34" charset="0"/>
+                <a:ea typeface="Arial" pitchFamily="34" charset="-122"/>
+                <a:cs typeface="Arial" pitchFamily="34" charset="-120"/>
+              </a:rPr>
+              <a:t>645</a:t>
+            </a:r>
+            <a:endParaRPr lang="en-US" sz="1600" dirty="0"/>
+          </a:p>
+        </p:txBody>
+      </p:sp>
+      <p:sp>
+        <p:nvSpPr>
+          <p:cNvPr id="15" name="Text 11"/>
+          <p:cNvSpPr txBox="1"/>
+          <p:nvPr/>
+        </p:nvSpPr>
+        <p:spPr>
+          <a:xfrm>
+            <a:off x="877824" y="5266944"/>
+            <a:ext cx="1738884" cy="274320"/>
+          </a:xfrm>
+          <a:prstGeom prst="rect">
+            <a:avLst/>
+          </a:prstGeom>
+          <a:noFill/>
+          <a:ln/>
+        </p:spPr>
+        <p:txBody>
+          <a:bodyPr wrap="square" lIns="0" tIns="0" rIns="0" bIns="0" rtlCol="0" anchor="ctr"/>
+          <a:lstStyle/>
+          <a:p>
+            <a:pPr indent="0" marL="0">
+              <a:buNone/>
             </a:pPr>
             <a:r>
               <a:rPr lang="en-US" sz="1000" dirty="0">
                 <a:solidFill>
-                  <a:srgbClr val="3C5C6B"/>
-                </a:solidFill>
-                <a:latin typeface="Calibri" pitchFamily="34" charset="0"/>
-                <a:ea typeface="Calibri" pitchFamily="34" charset="-122"/>
-                <a:cs typeface="Calibri" pitchFamily="34" charset="-120"/>
-              </a:rPr>
-              <a:t>Quais municípios ultrapassaram a capacidade</a:t>
+                  <a:srgbClr val="9FB6C0"/>
+                </a:solidFill>
+                <a:latin typeface="Calibri" pitchFamily="34" charset="0"/>
+                <a:ea typeface="Calibri" pitchFamily="34" charset="-122"/>
+                <a:cs typeface="Calibri" pitchFamily="34" charset="-120"/>
+              </a:rPr>
+              <a:t>municípios</a:t>
             </a:r>
             <a:endParaRPr lang="en-US" sz="1000" dirty="0"/>
           </a:p>
-          <a:p>
-            <a:pPr marL="342900" indent="-342900">
-              <a:lnSpc>
-                <a:spcPct val="105000"/>
-              </a:lnSpc>
-              <a:spcAft>
-                <a:spcPts val="700"/>
-              </a:spcAft>
-              <a:buSzPct val="100000"/>
-              <a:buChar char="•"/>
+        </p:txBody>
+      </p:sp>
+      <p:sp>
+        <p:nvSpPr>
+          <p:cNvPr id="16" name="Text 12"/>
+          <p:cNvSpPr txBox="1"/>
+          <p:nvPr/>
+        </p:nvSpPr>
+        <p:spPr>
+          <a:xfrm>
+            <a:off x="2616708" y="4882896"/>
+            <a:ext cx="1738884" cy="365760"/>
+          </a:xfrm>
+          <a:prstGeom prst="rect">
+            <a:avLst/>
+          </a:prstGeom>
+          <a:noFill/>
+          <a:ln/>
+        </p:spPr>
+        <p:txBody>
+          <a:bodyPr wrap="square" lIns="0" tIns="0" rIns="0" bIns="0" rtlCol="0" anchor="b"/>
+          <a:lstStyle/>
+          <a:p>
+            <a:pPr indent="0" marL="0">
+              <a:buNone/>
+            </a:pPr>
+            <a:r>
+              <a:rPr lang="en-US" sz="1600" b="1" dirty="0">
+                <a:solidFill>
+                  <a:srgbClr val="FFFFFF"/>
+                </a:solidFill>
+                <a:latin typeface="Arial" pitchFamily="34" charset="0"/>
+                <a:ea typeface="Arial" pitchFamily="34" charset="-122"/>
+                <a:cs typeface="Arial" pitchFamily="34" charset="-120"/>
+              </a:rPr>
+              <a:t>2.913.953</a:t>
+            </a:r>
+            <a:endParaRPr lang="en-US" sz="1600" dirty="0"/>
+          </a:p>
+        </p:txBody>
+      </p:sp>
+      <p:sp>
+        <p:nvSpPr>
+          <p:cNvPr id="17" name="Text 13"/>
+          <p:cNvSpPr txBox="1"/>
+          <p:nvPr/>
+        </p:nvSpPr>
+        <p:spPr>
+          <a:xfrm>
+            <a:off x="2616708" y="5266944"/>
+            <a:ext cx="1738884" cy="274320"/>
+          </a:xfrm>
+          <a:prstGeom prst="rect">
+            <a:avLst/>
+          </a:prstGeom>
+          <a:noFill/>
+          <a:ln/>
+        </p:spPr>
+        <p:txBody>
+          <a:bodyPr wrap="square" lIns="0" tIns="0" rIns="0" bIns="0" rtlCol="0" anchor="ctr"/>
+          <a:lstStyle/>
+          <a:p>
+            <a:pPr indent="0" marL="0">
+              <a:buNone/>
             </a:pPr>
             <a:r>
               <a:rPr lang="en-US" sz="1000" dirty="0">
                 <a:solidFill>
-                  <a:srgbClr val="3C5C6B"/>
-                </a:solidFill>
-                <a:latin typeface="Calibri" pitchFamily="34" charset="0"/>
-                <a:ea typeface="Calibri" pitchFamily="34" charset="-122"/>
-                <a:cs typeface="Calibri" pitchFamily="34" charset="-120"/>
-              </a:rPr>
-              <a:t>Quais perfis de atendimento mais pressionam a rede</a:t>
+                  <a:srgbClr val="9FB6C0"/>
+                </a:solidFill>
+                <a:latin typeface="Calibri" pitchFamily="34" charset="0"/>
+                <a:ea typeface="Calibri" pitchFamily="34" charset="-122"/>
+                <a:cs typeface="Calibri" pitchFamily="34" charset="-120"/>
+              </a:rPr>
+              <a:t>internações</a:t>
             </a:r>
             <a:endParaRPr lang="en-US" sz="1000" dirty="0"/>
           </a:p>
-          <a:p>
-            <a:pPr marL="342900" indent="-342900">
-              <a:lnSpc>
-                <a:spcPct val="105000"/>
-              </a:lnSpc>
-              <a:spcAft>
-                <a:spcPts val="700"/>
-              </a:spcAft>
-              <a:buSzPct val="100000"/>
-              <a:buChar char="•"/>
+        </p:txBody>
+      </p:sp>
+      <p:sp>
+        <p:nvSpPr>
+          <p:cNvPr id="18" name="Text 14"/>
+          <p:cNvSpPr txBox="1"/>
+          <p:nvPr/>
+        </p:nvSpPr>
+        <p:spPr>
+          <a:xfrm>
+            <a:off x="4355592" y="4882896"/>
+            <a:ext cx="1738884" cy="365760"/>
+          </a:xfrm>
+          <a:prstGeom prst="rect">
+            <a:avLst/>
+          </a:prstGeom>
+          <a:noFill/>
+          <a:ln/>
+        </p:spPr>
+        <p:txBody>
+          <a:bodyPr wrap="square" lIns="0" tIns="0" rIns="0" bIns="0" rtlCol="0" anchor="b"/>
+          <a:lstStyle/>
+          <a:p>
+            <a:pPr indent="0" marL="0">
+              <a:buNone/>
+            </a:pPr>
+            <a:r>
+              <a:rPr lang="en-US" sz="1600" b="1" dirty="0">
+                <a:solidFill>
+                  <a:srgbClr val="FFFFFF"/>
+                </a:solidFill>
+                <a:latin typeface="Arial" pitchFamily="34" charset="0"/>
+                <a:ea typeface="Arial" pitchFamily="34" charset="-122"/>
+                <a:cs typeface="Arial" pitchFamily="34" charset="-120"/>
+              </a:rPr>
+              <a:t>R$ 5,69 bi</a:t>
+            </a:r>
+            <a:endParaRPr lang="en-US" sz="1600" dirty="0"/>
+          </a:p>
+        </p:txBody>
+      </p:sp>
+      <p:sp>
+        <p:nvSpPr>
+          <p:cNvPr id="19" name="Text 15"/>
+          <p:cNvSpPr txBox="1"/>
+          <p:nvPr/>
+        </p:nvSpPr>
+        <p:spPr>
+          <a:xfrm>
+            <a:off x="4355592" y="5266944"/>
+            <a:ext cx="1738884" cy="274320"/>
+          </a:xfrm>
+          <a:prstGeom prst="rect">
+            <a:avLst/>
+          </a:prstGeom>
+          <a:noFill/>
+          <a:ln/>
+        </p:spPr>
+        <p:txBody>
+          <a:bodyPr wrap="square" lIns="0" tIns="0" rIns="0" bIns="0" rtlCol="0" anchor="ctr"/>
+          <a:lstStyle/>
+          <a:p>
+            <a:pPr indent="0" marL="0">
+              <a:buNone/>
             </a:pPr>
             <a:r>
               <a:rPr lang="en-US" sz="1000" dirty="0">
                 <a:solidFill>
-                  <a:srgbClr val="3C5C6B"/>
-                </a:solidFill>
-                <a:latin typeface="Calibri" pitchFamily="34" charset="0"/>
-                <a:ea typeface="Calibri" pitchFamily="34" charset="-122"/>
-                <a:cs typeface="Calibri" pitchFamily="34" charset="-120"/>
-              </a:rPr>
-              <a:t>Onde as internações crescem mais rápido</a:t>
+                  <a:srgbClr val="9FB6C0"/>
+                </a:solidFill>
+                <a:latin typeface="Calibri" pitchFamily="34" charset="0"/>
+                <a:ea typeface="Calibri" pitchFamily="34" charset="-122"/>
+                <a:cs typeface="Calibri" pitchFamily="34" charset="-120"/>
+              </a:rPr>
+              <a:t>recurso</a:t>
             </a:r>
             <a:endParaRPr lang="en-US" sz="1000" dirty="0"/>
           </a:p>
-          <a:p>
-            <a:pPr marL="342900" indent="-342900">
-              <a:lnSpc>
-                <a:spcPct val="105000"/>
-              </a:lnSpc>
-              <a:spcAft>
-                <a:spcPts val="700"/>
-              </a:spcAft>
-              <a:buSzPct val="100000"/>
-              <a:buChar char="•"/>
+        </p:txBody>
+      </p:sp>
+      <p:sp>
+        <p:nvSpPr>
+          <p:cNvPr id="20" name="Text 16"/>
+          <p:cNvSpPr txBox="1"/>
+          <p:nvPr/>
+        </p:nvSpPr>
+        <p:spPr>
+          <a:xfrm>
+            <a:off x="6094476" y="4882896"/>
+            <a:ext cx="1738884" cy="365760"/>
+          </a:xfrm>
+          <a:prstGeom prst="rect">
+            <a:avLst/>
+          </a:prstGeom>
+          <a:noFill/>
+          <a:ln/>
+        </p:spPr>
+        <p:txBody>
+          <a:bodyPr wrap="square" lIns="0" tIns="0" rIns="0" bIns="0" rtlCol="0" anchor="b"/>
+          <a:lstStyle/>
+          <a:p>
+            <a:pPr indent="0" marL="0">
+              <a:buNone/>
+            </a:pPr>
+            <a:r>
+              <a:rPr lang="en-US" sz="1600" b="1" dirty="0">
+                <a:solidFill>
+                  <a:srgbClr val="FFFFFF"/>
+                </a:solidFill>
+                <a:latin typeface="Arial" pitchFamily="34" charset="0"/>
+                <a:ea typeface="Arial" pitchFamily="34" charset="-122"/>
+                <a:cs typeface="Arial" pitchFamily="34" charset="-120"/>
+              </a:rPr>
+              <a:t>55.090</a:t>
+            </a:r>
+            <a:endParaRPr lang="en-US" sz="1600" dirty="0"/>
+          </a:p>
+        </p:txBody>
+      </p:sp>
+      <p:sp>
+        <p:nvSpPr>
+          <p:cNvPr id="21" name="Text 17"/>
+          <p:cNvSpPr txBox="1"/>
+          <p:nvPr/>
+        </p:nvSpPr>
+        <p:spPr>
+          <a:xfrm>
+            <a:off x="6094476" y="5266944"/>
+            <a:ext cx="1738884" cy="274320"/>
+          </a:xfrm>
+          <a:prstGeom prst="rect">
+            <a:avLst/>
+          </a:prstGeom>
+          <a:noFill/>
+          <a:ln/>
+        </p:spPr>
+        <p:txBody>
+          <a:bodyPr wrap="square" lIns="0" tIns="0" rIns="0" bIns="0" rtlCol="0" anchor="ctr"/>
+          <a:lstStyle/>
+          <a:p>
+            <a:pPr indent="0" marL="0">
+              <a:buNone/>
             </a:pPr>
             <a:r>
               <a:rPr lang="en-US" sz="1000" dirty="0">
                 <a:solidFill>
-                  <a:srgbClr val="3C5C6B"/>
-                </a:solidFill>
-                <a:latin typeface="Calibri" pitchFamily="34" charset="0"/>
-                <a:ea typeface="Calibri" pitchFamily="34" charset="-122"/>
-                <a:cs typeface="Calibri" pitchFamily="34" charset="-120"/>
-              </a:rPr>
-              <a:t>Quais municípios têm poucos leitos para a população</a:t>
+                  <a:srgbClr val="9FB6C0"/>
+                </a:solidFill>
+                <a:latin typeface="Calibri" pitchFamily="34" charset="0"/>
+                <a:ea typeface="Calibri" pitchFamily="34" charset="-122"/>
+                <a:cs typeface="Calibri" pitchFamily="34" charset="-120"/>
+              </a:rPr>
+              <a:t>leitos SUS</a:t>
             </a:r>
             <a:endParaRPr lang="en-US" sz="1000" dirty="0"/>
           </a:p>
-          <a:p>
-            <a:pPr marL="342900" indent="-342900">
-              <a:lnSpc>
-                <a:spcPct val="105000"/>
-              </a:lnSpc>
-              <a:spcAft>
-                <a:spcPts val="700"/>
-              </a:spcAft>
-              <a:buSzPct val="100000"/>
-              <a:buChar char="•"/>
+        </p:txBody>
+      </p:sp>
+      <p:sp>
+        <p:nvSpPr>
+          <p:cNvPr id="22" name="Text 18"/>
+          <p:cNvSpPr txBox="1"/>
+          <p:nvPr/>
+        </p:nvSpPr>
+        <p:spPr>
+          <a:xfrm>
+            <a:off x="7833360" y="4882896"/>
+            <a:ext cx="1738884" cy="365760"/>
+          </a:xfrm>
+          <a:prstGeom prst="rect">
+            <a:avLst/>
+          </a:prstGeom>
+          <a:noFill/>
+          <a:ln/>
+        </p:spPr>
+        <p:txBody>
+          <a:bodyPr wrap="square" lIns="0" tIns="0" rIns="0" bIns="0" rtlCol="0" anchor="b"/>
+          <a:lstStyle/>
+          <a:p>
+            <a:pPr indent="0" marL="0">
+              <a:buNone/>
+            </a:pPr>
+            <a:r>
+              <a:rPr lang="en-US" sz="1600" b="1" dirty="0">
+                <a:solidFill>
+                  <a:srgbClr val="D9452B"/>
+                </a:solidFill>
+                <a:latin typeface="Arial" pitchFamily="34" charset="0"/>
+                <a:ea typeface="Arial" pitchFamily="34" charset="-122"/>
+                <a:cs typeface="Arial" pitchFamily="34" charset="-120"/>
+              </a:rPr>
+              <a:t>15</a:t>
+            </a:r>
+            <a:endParaRPr lang="en-US" sz="1600" dirty="0"/>
+          </a:p>
+        </p:txBody>
+      </p:sp>
+      <p:sp>
+        <p:nvSpPr>
+          <p:cNvPr id="23" name="Text 19"/>
+          <p:cNvSpPr txBox="1"/>
+          <p:nvPr/>
+        </p:nvSpPr>
+        <p:spPr>
+          <a:xfrm>
+            <a:off x="7833360" y="5266944"/>
+            <a:ext cx="1738884" cy="274320"/>
+          </a:xfrm>
+          <a:prstGeom prst="rect">
+            <a:avLst/>
+          </a:prstGeom>
+          <a:noFill/>
+          <a:ln/>
+        </p:spPr>
+        <p:txBody>
+          <a:bodyPr wrap="square" lIns="0" tIns="0" rIns="0" bIns="0" rtlCol="0" anchor="ctr"/>
+          <a:lstStyle/>
+          <a:p>
+            <a:pPr indent="0" marL="0">
+              <a:buNone/>
             </a:pPr>
             <a:r>
               <a:rPr lang="en-US" sz="1000" dirty="0">
                 <a:solidFill>
-                  <a:srgbClr val="3C5C6B"/>
-                </a:solidFill>
-                <a:latin typeface="Calibri" pitchFamily="34" charset="0"/>
-                <a:ea typeface="Calibri" pitchFamily="34" charset="-122"/>
-                <a:cs typeface="Calibri" pitchFamily="34" charset="-120"/>
-              </a:rPr>
-              <a:t>Onde o custo médio de internação é mais alto</a:t>
+                  <a:srgbClr val="9FB6C0"/>
+                </a:solidFill>
+                <a:latin typeface="Calibri" pitchFamily="34" charset="0"/>
+                <a:ea typeface="Calibri" pitchFamily="34" charset="-122"/>
+                <a:cs typeface="Calibri" pitchFamily="34" charset="-120"/>
+              </a:rPr>
+              <a:t>críticos</a:t>
             </a:r>
             <a:endParaRPr lang="en-US" sz="1000" dirty="0"/>
           </a:p>
-          <a:p>
-            <a:pPr marL="342900" indent="-342900">
-              <a:lnSpc>
-                <a:spcPct val="105000"/>
-              </a:lnSpc>
-              <a:spcAft>
-                <a:spcPts val="700"/>
-              </a:spcAft>
-              <a:buSzPct val="100000"/>
-              <a:buChar char="•"/>
+        </p:txBody>
+      </p:sp>
+      <p:sp>
+        <p:nvSpPr>
+          <p:cNvPr id="24" name="Text 20"/>
+          <p:cNvSpPr txBox="1"/>
+          <p:nvPr/>
+        </p:nvSpPr>
+        <p:spPr>
+          <a:xfrm>
+            <a:off x="9572244" y="4882896"/>
+            <a:ext cx="1738884" cy="365760"/>
+          </a:xfrm>
+          <a:prstGeom prst="rect">
+            <a:avLst/>
+          </a:prstGeom>
+          <a:noFill/>
+          <a:ln/>
+        </p:spPr>
+        <p:txBody>
+          <a:bodyPr wrap="square" lIns="0" tIns="0" rIns="0" bIns="0" rtlCol="0" anchor="b"/>
+          <a:lstStyle/>
+          <a:p>
+            <a:pPr indent="0" marL="0">
+              <a:buNone/>
+            </a:pPr>
+            <a:r>
+              <a:rPr lang="en-US" sz="1600" b="1" dirty="0">
+                <a:solidFill>
+                  <a:srgbClr val="D9452B"/>
+                </a:solidFill>
+                <a:latin typeface="Arial" pitchFamily="34" charset="0"/>
+                <a:ea typeface="Arial" pitchFamily="34" charset="-122"/>
+                <a:cs typeface="Arial" pitchFamily="34" charset="-120"/>
+              </a:rPr>
+              <a:t>31</a:t>
+            </a:r>
+            <a:endParaRPr lang="en-US" sz="1600" dirty="0"/>
+          </a:p>
+        </p:txBody>
+      </p:sp>
+      <p:sp>
+        <p:nvSpPr>
+          <p:cNvPr id="25" name="Text 21"/>
+          <p:cNvSpPr txBox="1"/>
+          <p:nvPr/>
+        </p:nvSpPr>
+        <p:spPr>
+          <a:xfrm>
+            <a:off x="9572244" y="5266944"/>
+            <a:ext cx="1738884" cy="274320"/>
+          </a:xfrm>
+          <a:prstGeom prst="rect">
+            <a:avLst/>
+          </a:prstGeom>
+          <a:noFill/>
+          <a:ln/>
+        </p:spPr>
+        <p:txBody>
+          <a:bodyPr wrap="square" lIns="0" tIns="0" rIns="0" bIns="0" rtlCol="0" anchor="ctr"/>
+          <a:lstStyle/>
+          <a:p>
+            <a:pPr indent="0" marL="0">
+              <a:buNone/>
             </a:pPr>
             <a:r>
               <a:rPr lang="en-US" sz="1000" dirty="0">
                 <a:solidFill>
-                  <a:srgbClr val="3C5C6B"/>
-                </a:solidFill>
-                <a:latin typeface="Calibri" pitchFamily="34" charset="0"/>
-                <a:ea typeface="Calibri" pitchFamily="34" charset="-122"/>
-                <a:cs typeface="Calibri" pitchFamily="34" charset="-120"/>
-              </a:rPr>
-              <a:t>Qual região concentra mais casos críticos</a:t>
+                  <a:srgbClr val="9FB6C0"/>
+                </a:solidFill>
+                <a:latin typeface="Calibri" pitchFamily="34" charset="0"/>
+                <a:ea typeface="Calibri" pitchFamily="34" charset="-122"/>
+                <a:cs typeface="Calibri" pitchFamily="34" charset="-120"/>
+              </a:rPr>
+              <a:t>em atenção</a:t>
             </a:r>
             <a:endParaRPr lang="en-US" sz="1000" dirty="0"/>
           </a:p>
@@ -11234,46 +11218,7 @@
       </p:sp>
       <p:sp>
         <p:nvSpPr>
-          <p:cNvPr id="15" name="Text 13"/>
-          <p:cNvSpPr txBox="1"/>
-          <p:nvPr/>
-        </p:nvSpPr>
-        <p:spPr>
-          <a:xfrm>
-            <a:off x="566928" y="5815584"/>
-            <a:ext cx="11055096" cy="365760"/>
-          </a:xfrm>
-          <a:prstGeom prst="rect">
-            <a:avLst/>
-          </a:prstGeom>
-          <a:noFill/>
-          <a:ln/>
-        </p:spPr>
-        <p:txBody>
-          <a:bodyPr wrap="square" lIns="0" tIns="0" rIns="0" bIns="0" rtlCol="0" anchor="ctr"/>
-          <a:lstStyle/>
-          <a:p>
-            <a:pPr indent="0" marL="0">
-              <a:buNone/>
-            </a:pPr>
-            <a:r>
-              <a:rPr lang="en-US" sz="1050" i="1" dirty="0">
-                <a:solidFill>
-                  <a:srgbClr val="6B8592"/>
-                </a:solidFill>
-                <a:latin typeface="Calibri" pitchFamily="34" charset="0"/>
-                <a:ea typeface="Calibri" pitchFamily="34" charset="-122"/>
-                <a:cs typeface="Calibri" pitchFamily="34" charset="-120"/>
-              </a:rPr>
-              <a:t>Scripts completos em sql/ — DDL comentado, ingestão nos três mecanismos, views analíticas, perfil de IA e as perguntas com o SQL equivalente escrito à mão para conferência.</a:t>
-            </a:r>
-            <a:endParaRPr lang="en-US" sz="1050" dirty="0"/>
-          </a:p>
-        </p:txBody>
-      </p:sp>
-      <p:sp>
-        <p:nvSpPr>
-          <p:cNvPr id="16" name="Text 14"/>
+          <p:cNvPr id="26" name="Text 22"/>
           <p:cNvSpPr txBox="1"/>
           <p:nvPr/>
         </p:nvSpPr>
@@ -11304,7 +11249,7 @@
                 <a:ea typeface="Calibri" pitchFamily="34" charset="-122"/>
                 <a:cs typeface="Calibri" pitchFamily="34" charset="-120"/>
               </a:rPr>
-              <a:t>PULSO · Vital Analytics · 1TSCOA</a:t>
+              <a:t>PULSO · Vital Analytics · 1TSCOB</a:t>
             </a:r>
             <a:endParaRPr lang="en-US" sz="850" dirty="0"/>
           </a:p>
@@ -11312,7 +11257,7 @@
       </p:sp>
       <p:sp>
         <p:nvSpPr>
-          <p:cNvPr id="17" name="Text 15"/>
+          <p:cNvPr id="27" name="Text 23"/>
           <p:cNvSpPr txBox="1"/>
           <p:nvPr/>
         </p:nvSpPr>
@@ -11446,7 +11391,7 @@
                 <a:ea typeface="Calibri" pitchFamily="34" charset="-122"/>
                 <a:cs typeface="Calibri" pitchFamily="34" charset="-120"/>
               </a:rPr>
-              <a:t>Turma 1TSCOA · Challenge Oracle + FIAP 2026</a:t>
+              <a:t>Turma 1TSCOB · Challenge Oracle + FIAP 2026</a:t>
             </a:r>
             <a:endParaRPr lang="en-US" sz="1250" dirty="0"/>
           </a:p>
@@ -12316,7 +12261,7 @@
                 <a:ea typeface="Calibri" pitchFamily="34" charset="-122"/>
                 <a:cs typeface="Calibri" pitchFamily="34" charset="-120"/>
               </a:rPr>
-              <a:t>PULSO · Vital Analytics · 1TSCOA</a:t>
+              <a:t>PULSO · Vital Analytics · 1TSCOB</a:t>
             </a:r>
             <a:endParaRPr lang="en-US" sz="850" dirty="0"/>
           </a:p>
@@ -12439,7 +12384,7 @@
                 <a:ea typeface="Arial" pitchFamily="34" charset="-122"/>
                 <a:cs typeface="Arial" pitchFamily="34" charset="-120"/>
               </a:rPr>
-              <a:t>6</a:t>
+              <a:t>5</a:t>
             </a:r>
             <a:endParaRPr lang="en-US" sz="1700" dirty="0"/>
           </a:p>
@@ -12478,7 +12423,7 @@
                 <a:ea typeface="Arial" pitchFamily="34" charset="-122"/>
                 <a:cs typeface="Arial" pitchFamily="34" charset="-120"/>
               </a:rPr>
-              <a:t>Repositório técnico e código-fonte</a:t>
+              <a:t>Select AI — a pergunta em português vira SQL</a:t>
             </a:r>
             <a:endParaRPr lang="en-US" sz="2500" dirty="0"/>
           </a:p>
@@ -12517,26 +12462,72 @@
                 <a:ea typeface="Calibri" pitchFamily="34" charset="-122"/>
                 <a:cs typeface="Calibri" pitchFamily="34" charset="-120"/>
               </a:rPr>
-              <a:t>Todo o código gerado no projeto, versionado e documentado</a:t>
+              <a:t>O diferencial da solução, executando no Autonomous Database</a:t>
             </a:r>
             <a:endParaRPr lang="en-US" sz="1250" dirty="0"/>
           </a:p>
         </p:txBody>
       </p:sp>
-      <p:sp>
-        <p:nvSpPr>
-          <p:cNvPr id="6" name="Shape 4"/>
+      <p:pic>
+        <p:nvPicPr>
+          <p:cNvPr id="6" name="Image 0" descr="/home/claude/pulso/docs/evidencias/oracle/oracle_04_selectai_showsql.png">    </p:cNvPr>
+          <p:cNvPicPr>
+            <a:picLocks noChangeAspect="1"/>
+          </p:cNvPicPr>
+          <p:nvPr/>
+        </p:nvPicPr>
+        <p:blipFill>
+          <a:blip r:embed="rId1"/>
+          <a:stretch>
+            <a:fillRect/>
+          </a:stretch>
+        </p:blipFill>
+        <p:spPr>
+          <a:xfrm>
+            <a:off x="566928" y="1426464"/>
+            <a:ext cx="6949440" cy="3566160"/>
+          </a:xfrm>
+          <a:prstGeom prst="rect">
+            <a:avLst/>
+          </a:prstGeom>
+        </p:spPr>
+      </p:pic>
+      <p:sp>
+        <p:nvSpPr>
+          <p:cNvPr id="7" name="Shape 4"/>
           <p:cNvSpPr/>
           <p:nvPr/>
         </p:nvSpPr>
         <p:spPr>
           <a:xfrm>
-            <a:off x="566928" y="1481328"/>
-            <a:ext cx="4937760" cy="4206240"/>
+            <a:off x="566928" y="1426464"/>
+            <a:ext cx="6949440" cy="3566160"/>
+          </a:xfrm>
+          <a:prstGeom prst="rect">
+            <a:avLst/>
+          </a:prstGeom>
+          <a:ln w="9525">
+            <a:solidFill>
+              <a:srgbClr val="D3DFE3"/>
+            </a:solidFill>
+            <a:prstDash val="solid"/>
+          </a:ln>
+        </p:spPr>
+      </p:sp>
+      <p:sp>
+        <p:nvSpPr>
+          <p:cNvPr id="8" name="Shape 5"/>
+          <p:cNvSpPr/>
+          <p:nvPr/>
+        </p:nvSpPr>
+        <p:spPr>
+          <a:xfrm>
+            <a:off x="7790688" y="1426464"/>
+            <a:ext cx="3831336" cy="3566160"/>
           </a:xfrm>
           <a:prstGeom prst="roundRect">
             <a:avLst>
-              <a:gd name="adj" fmla="val 1957"/>
+              <a:gd name="adj" fmla="val 2308"/>
             </a:avLst>
           </a:prstGeom>
           <a:solidFill>
@@ -12547,53 +12538,53 @@
       </p:sp>
       <p:sp>
         <p:nvSpPr>
-          <p:cNvPr id="7" name="Text 5"/>
-          <p:cNvSpPr txBox="1"/>
-          <p:nvPr/>
-        </p:nvSpPr>
-        <p:spPr>
-          <a:xfrm>
-            <a:off x="841248" y="1682496"/>
-            <a:ext cx="4389120" cy="256032"/>
-          </a:xfrm>
-          <a:prstGeom prst="rect">
-            <a:avLst/>
-          </a:prstGeom>
-          <a:noFill/>
-          <a:ln/>
-        </p:spPr>
-        <p:txBody>
-          <a:bodyPr wrap="square" lIns="0" tIns="0" rIns="0" bIns="0" rtlCol="0" anchor="ctr"/>
-          <a:lstStyle/>
-          <a:p>
-            <a:pPr indent="0" marL="0">
-              <a:buNone/>
-            </a:pPr>
-            <a:r>
-              <a:rPr lang="en-US" sz="900" b="1" spc="60" kern="0" dirty="0">
-                <a:solidFill>
-                  <a:srgbClr val="6B8592"/>
-                </a:solidFill>
-                <a:latin typeface="Calibri" pitchFamily="34" charset="0"/>
-                <a:ea typeface="Calibri" pitchFamily="34" charset="-122"/>
-                <a:cs typeface="Calibri" pitchFamily="34" charset="-120"/>
-              </a:rPr>
-              <a:t>ESTRUTURA DO REPOSITÓRIO</a:t>
-            </a:r>
-            <a:endParaRPr lang="en-US" sz="900" dirty="0"/>
-          </a:p>
-        </p:txBody>
-      </p:sp>
-      <p:sp>
-        <p:nvSpPr>
-          <p:cNvPr id="8" name="Text 6"/>
-          <p:cNvSpPr txBox="1"/>
-          <p:nvPr/>
-        </p:nvSpPr>
-        <p:spPr>
-          <a:xfrm>
-            <a:off x="841248" y="1975104"/>
-            <a:ext cx="4389120" cy="3566160"/>
+          <p:cNvPr id="9" name="Text 6"/>
+          <p:cNvSpPr txBox="1"/>
+          <p:nvPr/>
+        </p:nvSpPr>
+        <p:spPr>
+          <a:xfrm>
+            <a:off x="8046720" y="1645920"/>
+            <a:ext cx="3319272" cy="256032"/>
+          </a:xfrm>
+          <a:prstGeom prst="rect">
+            <a:avLst/>
+          </a:prstGeom>
+          <a:noFill/>
+          <a:ln/>
+        </p:spPr>
+        <p:txBody>
+          <a:bodyPr wrap="square" lIns="0" tIns="0" rIns="0" bIns="0" rtlCol="0" anchor="ctr"/>
+          <a:lstStyle/>
+          <a:p>
+            <a:pPr indent="0" marL="0">
+              <a:buNone/>
+            </a:pPr>
+            <a:r>
+              <a:rPr lang="en-US" sz="1050" b="1" spc="80" kern="0" dirty="0">
+                <a:solidFill>
+                  <a:srgbClr val="009B98"/>
+                </a:solidFill>
+                <a:latin typeface="Arial" pitchFamily="34" charset="0"/>
+                <a:ea typeface="Arial" pitchFamily="34" charset="-122"/>
+                <a:cs typeface="Arial" pitchFamily="34" charset="-120"/>
+              </a:rPr>
+              <a:t>O QUE ACONTECE AQUI</a:t>
+            </a:r>
+            <a:endParaRPr lang="en-US" sz="1050" dirty="0"/>
+          </a:p>
+        </p:txBody>
+      </p:sp>
+      <p:sp>
+        <p:nvSpPr>
+          <p:cNvPr id="10" name="Text 7"/>
+          <p:cNvSpPr txBox="1"/>
+          <p:nvPr/>
+        </p:nvSpPr>
+        <p:spPr>
+          <a:xfrm>
+            <a:off x="8046720" y="1975104"/>
+            <a:ext cx="3319272" cy="2834640"/>
           </a:xfrm>
           <a:prstGeom prst="rect">
             <a:avLst/>
@@ -12607,279 +12598,97 @@
           <a:p>
             <a:pPr indent="0" marL="0">
               <a:lnSpc>
-                <a:spcPct val="106000"/>
+                <a:spcPct val="114000"/>
               </a:lnSpc>
               <a:buNone/>
             </a:pPr>
             <a:r>
-              <a:rPr lang="en-US" sz="950" dirty="0">
+              <a:rPr lang="en-US" sz="1100" dirty="0">
                 <a:solidFill>
                   <a:srgbClr val="3C5C6B"/>
                 </a:solidFill>
-                <a:latin typeface="Courier New" pitchFamily="34" charset="0"/>
-                <a:ea typeface="Courier New" pitchFamily="34" charset="-122"/>
-                <a:cs typeface="Courier New" pitchFamily="34" charset="-120"/>
-              </a:rPr>
-              <a:t>src/</a:t>
-            </a:r>
-            <a:endParaRPr lang="en-US" sz="950" dirty="0"/>
+                <a:latin typeface="Calibri" pitchFamily="34" charset="0"/>
+                <a:ea typeface="Calibri" pitchFamily="34" charset="-122"/>
+                <a:cs typeface="Calibri" pitchFamily="34" charset="-120"/>
+              </a:rPr>
+              <a:t>A pergunta entra em português no DBMS_CLOUD_AI. O banco lê o esquema, gera a consulta, executa e devolve o resultado — sem que ninguém escreva SQL.</a:t>
+            </a:r>
+            <a:endParaRPr lang="en-US" sz="1100" dirty="0"/>
           </a:p>
           <a:p>
             <a:pPr indent="0" marL="0">
               <a:lnSpc>
-                <a:spcPct val="106000"/>
+                <a:spcPct val="114000"/>
               </a:lnSpc>
               <a:buNone/>
             </a:pPr>
-            <a:r>
-              <a:rPr lang="en-US" sz="950" dirty="0">
+            <a:endParaRPr lang="en-US" sz="1100" dirty="0"/>
+          </a:p>
+          <a:p>
+            <a:pPr indent="0" marL="0">
+              <a:lnSpc>
+                <a:spcPct val="114000"/>
+              </a:lnSpc>
+              <a:buNone/>
+            </a:pPr>
+            <a:r>
+              <a:rPr lang="en-US" sz="1100" dirty="0">
                 <a:solidFill>
                   <a:srgbClr val="3C5C6B"/>
                 </a:solidFill>
-                <a:latin typeface="Courier New" pitchFamily="34" charset="0"/>
-                <a:ea typeface="Courier New" pitchFamily="34" charset="-122"/>
-                <a:cs typeface="Courier New" pitchFamily="34" charset="-120"/>
-              </a:rPr>
-              <a:t>  run_pipeline.py       orquestrador ponta a ponta</a:t>
-            </a:r>
-            <a:endParaRPr lang="en-US" sz="950" dirty="0"/>
+                <a:latin typeface="Calibri" pitchFamily="34" charset="0"/>
+                <a:ea typeface="Calibri" pitchFamily="34" charset="-122"/>
+                <a:cs typeface="Calibri" pitchFamily="34" charset="-120"/>
+              </a:rPr>
+              <a:t>O modificador showsql expõe a consulta gerada. É o que torna a resposta auditável: o gestor não precisa confiar na IA, ele vê o SQL que produziu o número.</a:t>
+            </a:r>
+            <a:endParaRPr lang="en-US" sz="1100" dirty="0"/>
           </a:p>
           <a:p>
             <a:pPr indent="0" marL="0">
               <a:lnSpc>
-                <a:spcPct val="106000"/>
+                <a:spcPct val="114000"/>
               </a:lnSpc>
               <a:buNone/>
             </a:pPr>
-            <a:r>
-              <a:rPr lang="en-US" sz="950" dirty="0">
+            <a:endParaRPr lang="en-US" sz="1100" dirty="0"/>
+          </a:p>
+          <a:p>
+            <a:pPr indent="0" marL="0">
+              <a:lnSpc>
+                <a:spcPct val="114000"/>
+              </a:lnSpc>
+              <a:buNone/>
+            </a:pPr>
+            <a:r>
+              <a:rPr lang="en-US" sz="1100" dirty="0">
                 <a:solidFill>
                   <a:srgbClr val="3C5C6B"/>
                 </a:solidFill>
-                <a:latin typeface="Courier New" pitchFamily="34" charset="0"/>
-                <a:ea typeface="Courier New" pitchFamily="34" charset="-122"/>
-                <a:cs typeface="Courier New" pitchFamily="34" charset="-120"/>
-              </a:rPr>
-              <a:t>  etl/tabnet_client.py  cliente do CGI do DATASUS</a:t>
-            </a:r>
-            <a:endParaRPr lang="en-US" sz="950" dirty="0"/>
-          </a:p>
-          <a:p>
-            <a:pPr indent="0" marL="0">
-              <a:lnSpc>
-                <a:spcPct val="106000"/>
-              </a:lnSpc>
-              <a:buNone/>
-            </a:pPr>
-            <a:r>
-              <a:rPr lang="en-US" sz="950" dirty="0">
-                <a:solidFill>
-                  <a:srgbClr val="3C5C6B"/>
-                </a:solidFill>
-                <a:latin typeface="Courier New" pitchFamily="34" charset="0"/>
-                <a:ea typeface="Courier New" pitchFamily="34" charset="-122"/>
-                <a:cs typeface="Courier New" pitchFamily="34" charset="-120"/>
-              </a:rPr>
-              <a:t>  etl/extract_*.py      as três fontes</a:t>
-            </a:r>
-            <a:endParaRPr lang="en-US" sz="950" dirty="0"/>
-          </a:p>
-          <a:p>
-            <a:pPr indent="0" marL="0">
-              <a:lnSpc>
-                <a:spcPct val="106000"/>
-              </a:lnSpc>
-              <a:buNone/>
-            </a:pPr>
-            <a:r>
-              <a:rPr lang="en-US" sz="950" dirty="0">
-                <a:solidFill>
-                  <a:srgbClr val="3C5C6B"/>
-                </a:solidFill>
-                <a:latin typeface="Courier New" pitchFamily="34" charset="0"/>
-                <a:ea typeface="Courier New" pitchFamily="34" charset="-122"/>
-                <a:cs typeface="Courier New" pitchFamily="34" charset="-120"/>
-              </a:rPr>
-              <a:t>  etl/transform.py      integração e indicadores</a:t>
-            </a:r>
-            <a:endParaRPr lang="en-US" sz="950" dirty="0"/>
-          </a:p>
-          <a:p>
-            <a:pPr indent="0" marL="0">
-              <a:lnSpc>
-                <a:spcPct val="106000"/>
-              </a:lnSpc>
-              <a:buNone/>
-            </a:pPr>
-            <a:r>
-              <a:rPr lang="en-US" sz="950" dirty="0">
-                <a:solidFill>
-                  <a:srgbClr val="3C5C6B"/>
-                </a:solidFill>
-                <a:latin typeface="Courier New" pitchFamily="34" charset="0"/>
-                <a:ea typeface="Courier New" pitchFamily="34" charset="-122"/>
-                <a:cs typeface="Courier New" pitchFamily="34" charset="-120"/>
-              </a:rPr>
-              <a:t>  analytics/modelos.py  K-Means, índice, regressão</a:t>
-            </a:r>
-            <a:endParaRPr lang="en-US" sz="950" dirty="0"/>
-          </a:p>
-          <a:p>
-            <a:pPr indent="0" marL="0">
-              <a:lnSpc>
-                <a:spcPct val="106000"/>
-              </a:lnSpc>
-              <a:buNone/>
-            </a:pPr>
-            <a:r>
-              <a:rPr lang="en-US" sz="950" dirty="0">
-                <a:solidFill>
-                  <a:srgbClr val="3C5C6B"/>
-                </a:solidFill>
-                <a:latin typeface="Courier New" pitchFamily="34" charset="0"/>
-                <a:ea typeface="Courier New" pitchFamily="34" charset="-122"/>
-                <a:cs typeface="Courier New" pitchFamily="34" charset="-120"/>
-              </a:rPr>
-              <a:t>  viz/                  gráficos e dashboard</a:t>
-            </a:r>
-            <a:endParaRPr lang="en-US" sz="950" dirty="0"/>
-          </a:p>
-          <a:p>
-            <a:pPr indent="0" marL="0">
-              <a:lnSpc>
-                <a:spcPct val="106000"/>
-              </a:lnSpc>
-              <a:buNone/>
-            </a:pPr>
-            <a:r>
-              <a:rPr lang="en-US" sz="950" dirty="0">
-                <a:solidFill>
-                  <a:srgbClr val="3C5C6B"/>
-                </a:solidFill>
-                <a:latin typeface="Courier New" pitchFamily="34" charset="0"/>
-                <a:ea typeface="Courier New" pitchFamily="34" charset="-122"/>
-                <a:cs typeface="Courier New" pitchFamily="34" charset="-120"/>
-              </a:rPr>
-              <a:t>sql/                    01 a 05 — Oracle 23ai</a:t>
-            </a:r>
-            <a:endParaRPr lang="en-US" sz="950" dirty="0"/>
-          </a:p>
-          <a:p>
-            <a:pPr indent="0" marL="0">
-              <a:lnSpc>
-                <a:spcPct val="106000"/>
-              </a:lnSpc>
-              <a:buNone/>
-            </a:pPr>
-            <a:r>
-              <a:rPr lang="en-US" sz="950" dirty="0">
-                <a:solidFill>
-                  <a:srgbClr val="3C5C6B"/>
-                </a:solidFill>
-                <a:latin typeface="Courier New" pitchFamily="34" charset="0"/>
-                <a:ea typeface="Courier New" pitchFamily="34" charset="-122"/>
-                <a:cs typeface="Courier New" pitchFamily="34" charset="-120"/>
-              </a:rPr>
-              <a:t>notebooks/              análise exploratória</a:t>
-            </a:r>
-            <a:endParaRPr lang="en-US" sz="950" dirty="0"/>
-          </a:p>
-          <a:p>
-            <a:pPr indent="0" marL="0">
-              <a:lnSpc>
-                <a:spcPct val="106000"/>
-              </a:lnSpc>
-              <a:buNone/>
-            </a:pPr>
-            <a:r>
-              <a:rPr lang="en-US" sz="950" dirty="0">
-                <a:solidFill>
-                  <a:srgbClr val="3C5C6B"/>
-                </a:solidFill>
-                <a:latin typeface="Courier New" pitchFamily="34" charset="0"/>
-                <a:ea typeface="Courier New" pitchFamily="34" charset="-122"/>
-                <a:cs typeface="Courier New" pitchFamily="34" charset="-120"/>
-              </a:rPr>
-              <a:t>data/                   dados tratados: raw + processed</a:t>
-            </a:r>
-            <a:endParaRPr lang="en-US" sz="950" dirty="0"/>
-          </a:p>
-          <a:p>
-            <a:pPr indent="0" marL="0">
-              <a:lnSpc>
-                <a:spcPct val="106000"/>
-              </a:lnSpc>
-              <a:buNone/>
-            </a:pPr>
-            <a:r>
-              <a:rPr lang="en-US" sz="950" dirty="0">
-                <a:solidFill>
-                  <a:srgbClr val="3C5C6B"/>
-                </a:solidFill>
-                <a:latin typeface="Courier New" pitchFamily="34" charset="0"/>
-                <a:ea typeface="Courier New" pitchFamily="34" charset="-122"/>
-                <a:cs typeface="Courier New" pitchFamily="34" charset="-120"/>
-              </a:rPr>
-              <a:t>docs/                   arquitetura, dicionário,</a:t>
-            </a:r>
-            <a:endParaRPr lang="en-US" sz="950" dirty="0"/>
-          </a:p>
-          <a:p>
-            <a:pPr indent="0" marL="0">
-              <a:lnSpc>
-                <a:spcPct val="106000"/>
-              </a:lnSpc>
-              <a:buNone/>
-            </a:pPr>
-            <a:r>
-              <a:rPr lang="en-US" sz="950" dirty="0">
-                <a:solidFill>
-                  <a:srgbClr val="3C5C6B"/>
-                </a:solidFill>
-                <a:latin typeface="Courier New" pitchFamily="34" charset="0"/>
-                <a:ea typeface="Courier New" pitchFamily="34" charset="-122"/>
-                <a:cs typeface="Courier New" pitchFamily="34" charset="-120"/>
-              </a:rPr>
-              <a:t>                        implantação, evidências</a:t>
-            </a:r>
-            <a:endParaRPr lang="en-US" sz="950" dirty="0"/>
-          </a:p>
-          <a:p>
-            <a:pPr indent="0" marL="0">
-              <a:lnSpc>
-                <a:spcPct val="106000"/>
-              </a:lnSpc>
-              <a:buNone/>
-            </a:pPr>
-            <a:r>
-              <a:rPr lang="en-US" sz="950" dirty="0">
-                <a:solidFill>
-                  <a:srgbClr val="3C5C6B"/>
-                </a:solidFill>
-                <a:latin typeface="Courier New" pitchFamily="34" charset="0"/>
-                <a:ea typeface="Courier New" pitchFamily="34" charset="-122"/>
-                <a:cs typeface="Courier New" pitchFamily="34" charset="-120"/>
-              </a:rPr>
-              <a:t>dashboard/              aplicação navegável</a:t>
-            </a:r>
-            <a:endParaRPr lang="en-US" sz="950" dirty="0"/>
-          </a:p>
-        </p:txBody>
-      </p:sp>
-      <p:sp>
-        <p:nvSpPr>
-          <p:cNvPr id="9" name="Shape 7"/>
+                <a:latin typeface="Calibri" pitchFamily="34" charset="0"/>
+                <a:ea typeface="Calibri" pitchFamily="34" charset="-122"/>
+                <a:cs typeface="Calibri" pitchFamily="34" charset="-120"/>
+              </a:rPr>
+              <a:t>As oito views do object_list são a fronteira do que a IA enxerga, e os COMMENT ON do esquema são o que ensina o negócio a ela.</a:t>
+            </a:r>
+            <a:endParaRPr lang="en-US" sz="1100" dirty="0"/>
+          </a:p>
+        </p:txBody>
+      </p:sp>
+      <p:sp>
+        <p:nvSpPr>
+          <p:cNvPr id="11" name="Shape 8"/>
           <p:cNvSpPr/>
           <p:nvPr/>
         </p:nvSpPr>
         <p:spPr>
           <a:xfrm>
-            <a:off x="5779008" y="1481328"/>
-            <a:ext cx="5843016" cy="768096"/>
+            <a:off x="566928" y="5120640"/>
+            <a:ext cx="11055096" cy="877824"/>
           </a:xfrm>
           <a:prstGeom prst="roundRect">
             <a:avLst>
-              <a:gd name="adj" fmla="val 10714"/>
+              <a:gd name="adj" fmla="val 9375"/>
             </a:avLst>
           </a:prstGeom>
           <a:solidFill>
@@ -12890,53 +12699,14 @@
       </p:sp>
       <p:sp>
         <p:nvSpPr>
-          <p:cNvPr id="10" name="Text 8"/>
-          <p:cNvSpPr txBox="1"/>
-          <p:nvPr/>
-        </p:nvSpPr>
-        <p:spPr>
-          <a:xfrm>
-            <a:off x="6035040" y="1572768"/>
-            <a:ext cx="5330952" cy="256032"/>
-          </a:xfrm>
-          <a:prstGeom prst="rect">
-            <a:avLst/>
-          </a:prstGeom>
-          <a:noFill/>
-          <a:ln/>
-        </p:spPr>
-        <p:txBody>
-          <a:bodyPr wrap="square" lIns="0" tIns="0" rIns="0" bIns="0" rtlCol="0" anchor="ctr"/>
-          <a:lstStyle/>
-          <a:p>
-            <a:pPr indent="0" marL="0">
-              <a:buNone/>
-            </a:pPr>
-            <a:r>
-              <a:rPr lang="en-US" sz="1100" b="1" dirty="0">
-                <a:solidFill>
-                  <a:srgbClr val="009B98"/>
-                </a:solidFill>
-                <a:latin typeface="Courier New" pitchFamily="34" charset="0"/>
-                <a:ea typeface="Courier New" pitchFamily="34" charset="-122"/>
-                <a:cs typeface="Courier New" pitchFamily="34" charset="-120"/>
-              </a:rPr>
-              <a:t>README.md</a:t>
-            </a:r>
-            <a:endParaRPr lang="en-US" sz="1100" dirty="0"/>
-          </a:p>
-        </p:txBody>
-      </p:sp>
-      <p:sp>
-        <p:nvSpPr>
-          <p:cNvPr id="11" name="Text 9"/>
-          <p:cNvSpPr txBox="1"/>
-          <p:nvPr/>
-        </p:nvSpPr>
-        <p:spPr>
-          <a:xfrm>
-            <a:off x="6035040" y="1828800"/>
-            <a:ext cx="5330952" cy="365760"/>
+          <p:cNvPr id="12" name="Text 9"/>
+          <p:cNvSpPr txBox="1"/>
+          <p:nvPr/>
+        </p:nvSpPr>
+        <p:spPr>
+          <a:xfrm>
+            <a:off x="859536" y="5266944"/>
+            <a:ext cx="10469880" cy="603504"/>
           </a:xfrm>
           <a:prstGeom prst="rect">
             <a:avLst/>
@@ -12949,6 +12719,26 @@
           <a:lstStyle/>
           <a:p>
             <a:pPr indent="0" marL="0">
+              <a:lnSpc>
+                <a:spcPct val="110000"/>
+              </a:lnSpc>
+              <a:buNone/>
+            </a:pPr>
+            <a:r>
+              <a:rPr lang="en-US" sz="1050" b="1" dirty="0">
+                <a:solidFill>
+                  <a:srgbClr val="0A2A3B"/>
+                </a:solidFill>
+                <a:latin typeface="Calibri" pitchFamily="34" charset="0"/>
+                <a:ea typeface="Calibri" pitchFamily="34" charset="-122"/>
+                <a:cs typeface="Calibri" pitchFamily="34" charset="-120"/>
+              </a:rPr>
+              <a:t>O que aprendemos calibrando esta camada.  </a:t>
+            </a:r>
+            <a:pPr indent="0" marL="0">
+              <a:lnSpc>
+                <a:spcPct val="110000"/>
+              </a:lnSpc>
               <a:buNone/>
             </a:pPr>
             <a:r>
@@ -12960,7 +12750,7 @@
                 <a:ea typeface="Calibri" pitchFamily="34" charset="-122"/>
                 <a:cs typeface="Calibri" pitchFamily="34" charset="-120"/>
               </a:rPr>
-              <a:t>Problema, arquitetura, resultados com dados reais, como executar e limitações declaradas</a:t>
+              <a:t>A qualidade do SQL gerado depende inteiramente da riqueza dos comentários do esquema. Quando a coluna não declara os valores que aceita, a IA infere um — e infere errado. Enumerar os domínios no COMMENT ON foi o ajuste que fez a camada responder corretamente.</a:t>
             </a:r>
             <a:endParaRPr lang="en-US" sz="1050" dirty="0"/>
           </a:p>
@@ -12968,468 +12758,7 @@
       </p:sp>
       <p:sp>
         <p:nvSpPr>
-          <p:cNvPr id="12" name="Shape 10"/>
-          <p:cNvSpPr/>
-          <p:nvPr/>
-        </p:nvSpPr>
-        <p:spPr>
-          <a:xfrm>
-            <a:off x="5779008" y="2340864"/>
-            <a:ext cx="5843016" cy="768096"/>
-          </a:xfrm>
-          <a:prstGeom prst="roundRect">
-            <a:avLst>
-              <a:gd name="adj" fmla="val 10714"/>
-            </a:avLst>
-          </a:prstGeom>
-          <a:solidFill>
-            <a:srgbClr val="EEF3F4"/>
-          </a:solidFill>
-          <a:ln/>
-        </p:spPr>
-      </p:sp>
-      <p:sp>
-        <p:nvSpPr>
-          <p:cNvPr id="13" name="Text 11"/>
-          <p:cNvSpPr txBox="1"/>
-          <p:nvPr/>
-        </p:nvSpPr>
-        <p:spPr>
-          <a:xfrm>
-            <a:off x="6035040" y="2432304"/>
-            <a:ext cx="5330952" cy="256032"/>
-          </a:xfrm>
-          <a:prstGeom prst="rect">
-            <a:avLst/>
-          </a:prstGeom>
-          <a:noFill/>
-          <a:ln/>
-        </p:spPr>
-        <p:txBody>
-          <a:bodyPr wrap="square" lIns="0" tIns="0" rIns="0" bIns="0" rtlCol="0" anchor="ctr"/>
-          <a:lstStyle/>
-          <a:p>
-            <a:pPr indent="0" marL="0">
-              <a:buNone/>
-            </a:pPr>
-            <a:r>
-              <a:rPr lang="en-US" sz="1100" b="1" dirty="0">
-                <a:solidFill>
-                  <a:srgbClr val="009B98"/>
-                </a:solidFill>
-                <a:latin typeface="Courier New" pitchFamily="34" charset="0"/>
-                <a:ea typeface="Courier New" pitchFamily="34" charset="-122"/>
-                <a:cs typeface="Courier New" pitchFamily="34" charset="-120"/>
-              </a:rPr>
-              <a:t>docs/arquitetura.md</a:t>
-            </a:r>
-            <a:endParaRPr lang="en-US" sz="1100" dirty="0"/>
-          </a:p>
-        </p:txBody>
-      </p:sp>
-      <p:sp>
-        <p:nvSpPr>
-          <p:cNvPr id="14" name="Text 12"/>
-          <p:cNvSpPr txBox="1"/>
-          <p:nvPr/>
-        </p:nvSpPr>
-        <p:spPr>
-          <a:xfrm>
-            <a:off x="6035040" y="2688336"/>
-            <a:ext cx="5330952" cy="365760"/>
-          </a:xfrm>
-          <a:prstGeom prst="rect">
-            <a:avLst/>
-          </a:prstGeom>
-          <a:noFill/>
-          <a:ln/>
-        </p:spPr>
-        <p:txBody>
-          <a:bodyPr wrap="square" lIns="0" tIns="0" rIns="0" bIns="0" rtlCol="0" anchor="t"/>
-          <a:lstStyle/>
-          <a:p>
-            <a:pPr indent="0" marL="0">
-              <a:buNone/>
-            </a:pPr>
-            <a:r>
-              <a:rPr lang="en-US" sz="1050" dirty="0">
-                <a:solidFill>
-                  <a:srgbClr val="3C5C6B"/>
-                </a:solidFill>
-                <a:latin typeface="Calibri" pitchFamily="34" charset="0"/>
-                <a:ea typeface="Calibri" pitchFamily="34" charset="-122"/>
-                <a:cs typeface="Calibri" pitchFamily="34" charset="-120"/>
-              </a:rPr>
-              <a:t>Arquitetura em cinco camadas, fluxo do dado ponta a ponta, implementado × planejado</a:t>
-            </a:r>
-            <a:endParaRPr lang="en-US" sz="1050" dirty="0"/>
-          </a:p>
-        </p:txBody>
-      </p:sp>
-      <p:sp>
-        <p:nvSpPr>
-          <p:cNvPr id="15" name="Shape 13"/>
-          <p:cNvSpPr/>
-          <p:nvPr/>
-        </p:nvSpPr>
-        <p:spPr>
-          <a:xfrm>
-            <a:off x="5779008" y="3200400"/>
-            <a:ext cx="5843016" cy="768096"/>
-          </a:xfrm>
-          <a:prstGeom prst="roundRect">
-            <a:avLst>
-              <a:gd name="adj" fmla="val 10714"/>
-            </a:avLst>
-          </a:prstGeom>
-          <a:solidFill>
-            <a:srgbClr val="EEF3F4"/>
-          </a:solidFill>
-          <a:ln/>
-        </p:spPr>
-      </p:sp>
-      <p:sp>
-        <p:nvSpPr>
-          <p:cNvPr id="16" name="Text 14"/>
-          <p:cNvSpPr txBox="1"/>
-          <p:nvPr/>
-        </p:nvSpPr>
-        <p:spPr>
-          <a:xfrm>
-            <a:off x="6035040" y="3291840"/>
-            <a:ext cx="5330952" cy="256032"/>
-          </a:xfrm>
-          <a:prstGeom prst="rect">
-            <a:avLst/>
-          </a:prstGeom>
-          <a:noFill/>
-          <a:ln/>
-        </p:spPr>
-        <p:txBody>
-          <a:bodyPr wrap="square" lIns="0" tIns="0" rIns="0" bIns="0" rtlCol="0" anchor="ctr"/>
-          <a:lstStyle/>
-          <a:p>
-            <a:pPr indent="0" marL="0">
-              <a:buNone/>
-            </a:pPr>
-            <a:r>
-              <a:rPr lang="en-US" sz="1100" b="1" dirty="0">
-                <a:solidFill>
-                  <a:srgbClr val="009B98"/>
-                </a:solidFill>
-                <a:latin typeface="Courier New" pitchFamily="34" charset="0"/>
-                <a:ea typeface="Courier New" pitchFamily="34" charset="-122"/>
-                <a:cs typeface="Courier New" pitchFamily="34" charset="-120"/>
-              </a:rPr>
-              <a:t>docs/dicionario_dados.md</a:t>
-            </a:r>
-            <a:endParaRPr lang="en-US" sz="1100" dirty="0"/>
-          </a:p>
-        </p:txBody>
-      </p:sp>
-      <p:sp>
-        <p:nvSpPr>
-          <p:cNvPr id="17" name="Text 15"/>
-          <p:cNvSpPr txBox="1"/>
-          <p:nvPr/>
-        </p:nvSpPr>
-        <p:spPr>
-          <a:xfrm>
-            <a:off x="6035040" y="3547872"/>
-            <a:ext cx="5330952" cy="365760"/>
-          </a:xfrm>
-          <a:prstGeom prst="rect">
-            <a:avLst/>
-          </a:prstGeom>
-          <a:noFill/>
-          <a:ln/>
-        </p:spPr>
-        <p:txBody>
-          <a:bodyPr wrap="square" lIns="0" tIns="0" rIns="0" bIns="0" rtlCol="0" anchor="t"/>
-          <a:lstStyle/>
-          <a:p>
-            <a:pPr indent="0" marL="0">
-              <a:buNone/>
-            </a:pPr>
-            <a:r>
-              <a:rPr lang="en-US" sz="1050" dirty="0">
-                <a:solidFill>
-                  <a:srgbClr val="3C5C6B"/>
-                </a:solidFill>
-                <a:latin typeface="Calibri" pitchFamily="34" charset="0"/>
-                <a:ea typeface="Calibri" pitchFamily="34" charset="-122"/>
-                <a:cs typeface="Calibri" pitchFamily="34" charset="-120"/>
-              </a:rPr>
-              <a:t>Cada campo de cada tabela, com a ressalva metodológica de cada indicador</a:t>
-            </a:r>
-            <a:endParaRPr lang="en-US" sz="1050" dirty="0"/>
-          </a:p>
-        </p:txBody>
-      </p:sp>
-      <p:sp>
-        <p:nvSpPr>
-          <p:cNvPr id="18" name="Shape 16"/>
-          <p:cNvSpPr/>
-          <p:nvPr/>
-        </p:nvSpPr>
-        <p:spPr>
-          <a:xfrm>
-            <a:off x="5779008" y="4059936"/>
-            <a:ext cx="5843016" cy="768096"/>
-          </a:xfrm>
-          <a:prstGeom prst="roundRect">
-            <a:avLst>
-              <a:gd name="adj" fmla="val 10714"/>
-            </a:avLst>
-          </a:prstGeom>
-          <a:solidFill>
-            <a:srgbClr val="EEF3F4"/>
-          </a:solidFill>
-          <a:ln/>
-        </p:spPr>
-      </p:sp>
-      <p:sp>
-        <p:nvSpPr>
-          <p:cNvPr id="19" name="Text 17"/>
-          <p:cNvSpPr txBox="1"/>
-          <p:nvPr/>
-        </p:nvSpPr>
-        <p:spPr>
-          <a:xfrm>
-            <a:off x="6035040" y="4151376"/>
-            <a:ext cx="5330952" cy="256032"/>
-          </a:xfrm>
-          <a:prstGeom prst="rect">
-            <a:avLst/>
-          </a:prstGeom>
-          <a:noFill/>
-          <a:ln/>
-        </p:spPr>
-        <p:txBody>
-          <a:bodyPr wrap="square" lIns="0" tIns="0" rIns="0" bIns="0" rtlCol="0" anchor="ctr"/>
-          <a:lstStyle/>
-          <a:p>
-            <a:pPr indent="0" marL="0">
-              <a:buNone/>
-            </a:pPr>
-            <a:r>
-              <a:rPr lang="en-US" sz="1100" b="1" dirty="0">
-                <a:solidFill>
-                  <a:srgbClr val="009B98"/>
-                </a:solidFill>
-                <a:latin typeface="Courier New" pitchFamily="34" charset="0"/>
-                <a:ea typeface="Courier New" pitchFamily="34" charset="-122"/>
-                <a:cs typeface="Courier New" pitchFamily="34" charset="-120"/>
-              </a:rPr>
-              <a:t>docs/implantacao_oracle.md</a:t>
-            </a:r>
-            <a:endParaRPr lang="en-US" sz="1100" dirty="0"/>
-          </a:p>
-        </p:txBody>
-      </p:sp>
-      <p:sp>
-        <p:nvSpPr>
-          <p:cNvPr id="20" name="Text 18"/>
-          <p:cNvSpPr txBox="1"/>
-          <p:nvPr/>
-        </p:nvSpPr>
-        <p:spPr>
-          <a:xfrm>
-            <a:off x="6035040" y="4407408"/>
-            <a:ext cx="5330952" cy="365760"/>
-          </a:xfrm>
-          <a:prstGeom prst="rect">
-            <a:avLst/>
-          </a:prstGeom>
-          <a:noFill/>
-          <a:ln/>
-        </p:spPr>
-        <p:txBody>
-          <a:bodyPr wrap="square" lIns="0" tIns="0" rIns="0" bIns="0" rtlCol="0" anchor="t"/>
-          <a:lstStyle/>
-          <a:p>
-            <a:pPr indent="0" marL="0">
-              <a:buNone/>
-            </a:pPr>
-            <a:r>
-              <a:rPr lang="en-US" sz="1050" dirty="0">
-                <a:solidFill>
-                  <a:srgbClr val="3C5C6B"/>
-                </a:solidFill>
-                <a:latin typeface="Calibri" pitchFamily="34" charset="0"/>
-                <a:ea typeface="Calibri" pitchFamily="34" charset="-122"/>
-                <a:cs typeface="Calibri" pitchFamily="34" charset="-120"/>
-              </a:rPr>
-              <a:t>Implantação da camada Oracle: ordem dos scripts, validação da carga e diagnóstico do Select AI</a:t>
-            </a:r>
-            <a:endParaRPr lang="en-US" sz="1050" dirty="0"/>
-          </a:p>
-        </p:txBody>
-      </p:sp>
-      <p:sp>
-        <p:nvSpPr>
-          <p:cNvPr id="21" name="Shape 19"/>
-          <p:cNvSpPr/>
-          <p:nvPr/>
-        </p:nvSpPr>
-        <p:spPr>
-          <a:xfrm>
-            <a:off x="5779008" y="4919472"/>
-            <a:ext cx="5843016" cy="768096"/>
-          </a:xfrm>
-          <a:prstGeom prst="roundRect">
-            <a:avLst>
-              <a:gd name="adj" fmla="val 10714"/>
-            </a:avLst>
-          </a:prstGeom>
-          <a:solidFill>
-            <a:srgbClr val="EEF3F4"/>
-          </a:solidFill>
-          <a:ln/>
-        </p:spPr>
-      </p:sp>
-      <p:sp>
-        <p:nvSpPr>
-          <p:cNvPr id="22" name="Text 20"/>
-          <p:cNvSpPr txBox="1"/>
-          <p:nvPr/>
-        </p:nvSpPr>
-        <p:spPr>
-          <a:xfrm>
-            <a:off x="6035040" y="5010912"/>
-            <a:ext cx="5330952" cy="256032"/>
-          </a:xfrm>
-          <a:prstGeom prst="rect">
-            <a:avLst/>
-          </a:prstGeom>
-          <a:noFill/>
-          <a:ln/>
-        </p:spPr>
-        <p:txBody>
-          <a:bodyPr wrap="square" lIns="0" tIns="0" rIns="0" bIns="0" rtlCol="0" anchor="ctr"/>
-          <a:lstStyle/>
-          <a:p>
-            <a:pPr indent="0" marL="0">
-              <a:buNone/>
-            </a:pPr>
-            <a:r>
-              <a:rPr lang="en-US" sz="1100" b="1" dirty="0">
-                <a:solidFill>
-                  <a:srgbClr val="009B98"/>
-                </a:solidFill>
-                <a:latin typeface="Courier New" pitchFamily="34" charset="0"/>
-                <a:ea typeface="Courier New" pitchFamily="34" charset="-122"/>
-                <a:cs typeface="Courier New" pitchFamily="34" charset="-120"/>
-              </a:rPr>
-              <a:t>notebooks/</a:t>
-            </a:r>
-            <a:endParaRPr lang="en-US" sz="1100" dirty="0"/>
-          </a:p>
-        </p:txBody>
-      </p:sp>
-      <p:sp>
-        <p:nvSpPr>
-          <p:cNvPr id="23" name="Text 21"/>
-          <p:cNvSpPr txBox="1"/>
-          <p:nvPr/>
-        </p:nvSpPr>
-        <p:spPr>
-          <a:xfrm>
-            <a:off x="6035040" y="5266944"/>
-            <a:ext cx="5330952" cy="365760"/>
-          </a:xfrm>
-          <a:prstGeom prst="rect">
-            <a:avLst/>
-          </a:prstGeom>
-          <a:noFill/>
-          <a:ln/>
-        </p:spPr>
-        <p:txBody>
-          <a:bodyPr wrap="square" lIns="0" tIns="0" rIns="0" bIns="0" rtlCol="0" anchor="t"/>
-          <a:lstStyle/>
-          <a:p>
-            <a:pPr indent="0" marL="0">
-              <a:buNone/>
-            </a:pPr>
-            <a:r>
-              <a:rPr lang="en-US" sz="1050" dirty="0">
-                <a:solidFill>
-                  <a:srgbClr val="3C5C6B"/>
-                </a:solidFill>
-                <a:latin typeface="Calibri" pitchFamily="34" charset="0"/>
-                <a:ea typeface="Calibri" pitchFamily="34" charset="-122"/>
-                <a:cs typeface="Calibri" pitchFamily="34" charset="-120"/>
-              </a:rPr>
-              <a:t>Análise exploratória que precedeu e justifica as decisões de modelagem</a:t>
-            </a:r>
-            <a:endParaRPr lang="en-US" sz="1050" dirty="0"/>
-          </a:p>
-        </p:txBody>
-      </p:sp>
-      <p:sp>
-        <p:nvSpPr>
-          <p:cNvPr id="24" name="Shape 22"/>
-          <p:cNvSpPr/>
-          <p:nvPr/>
-        </p:nvSpPr>
-        <p:spPr>
-          <a:xfrm>
-            <a:off x="566928" y="5797296"/>
-            <a:ext cx="11055096" cy="475488"/>
-          </a:xfrm>
-          <a:prstGeom prst="roundRect">
-            <a:avLst>
-              <a:gd name="adj" fmla="val 17308"/>
-            </a:avLst>
-          </a:prstGeom>
-          <a:solidFill>
-            <a:srgbClr val="0A2A3B"/>
-          </a:solidFill>
-          <a:ln/>
-        </p:spPr>
-      </p:sp>
-      <p:sp>
-        <p:nvSpPr>
-          <p:cNvPr id="25" name="Text 23"/>
-          <p:cNvSpPr txBox="1"/>
-          <p:nvPr/>
-        </p:nvSpPr>
-        <p:spPr>
-          <a:xfrm>
-            <a:off x="859536" y="5797296"/>
-            <a:ext cx="10469880" cy="475488"/>
-          </a:xfrm>
-          <a:prstGeom prst="rect">
-            <a:avLst/>
-          </a:prstGeom>
-          <a:noFill/>
-          <a:ln/>
-        </p:spPr>
-        <p:txBody>
-          <a:bodyPr wrap="square" lIns="0" tIns="0" rIns="0" bIns="0" rtlCol="0" anchor="ctr"/>
-          <a:lstStyle/>
-          <a:p>
-            <a:pPr indent="0" marL="0">
-              <a:buNone/>
-            </a:pPr>
-            <a:r>
-              <a:rPr lang="en-US" sz="1200" b="1" dirty="0">
-                <a:solidFill>
-                  <a:srgbClr val="009B98"/>
-                </a:solidFill>
-                <a:latin typeface="Calibri" pitchFamily="34" charset="0"/>
-                <a:ea typeface="Calibri" pitchFamily="34" charset="-122"/>
-                <a:cs typeface="Calibri" pitchFamily="34" charset="-120"/>
-              </a:rPr>
-              <a:t>Repositório público:   github.com/nelsondiniz-p/pulso-vital-analytics</a:t>
-            </a:r>
-            <a:endParaRPr lang="en-US" sz="1200" dirty="0"/>
-          </a:p>
-        </p:txBody>
-      </p:sp>
-      <p:sp>
-        <p:nvSpPr>
-          <p:cNvPr id="26" name="Text 24"/>
+          <p:cNvPr id="13" name="Text 10"/>
           <p:cNvSpPr txBox="1"/>
           <p:nvPr/>
         </p:nvSpPr>
@@ -13460,7 +12789,7 @@
                 <a:ea typeface="Calibri" pitchFamily="34" charset="-122"/>
                 <a:cs typeface="Calibri" pitchFamily="34" charset="-120"/>
               </a:rPr>
-              <a:t>PULSO · Vital Analytics · 1TSCOA</a:t>
+              <a:t>PULSO · Vital Analytics · 1TSCOB</a:t>
             </a:r>
             <a:endParaRPr lang="en-US" sz="850" dirty="0"/>
           </a:p>
@@ -13468,7 +12797,7 @@
       </p:sp>
       <p:sp>
         <p:nvSpPr>
-          <p:cNvPr id="27" name="Text 25"/>
+          <p:cNvPr id="14" name="Text 11"/>
           <p:cNvSpPr txBox="1"/>
           <p:nvPr/>
         </p:nvSpPr>
@@ -13583,7 +12912,7 @@
                 <a:ea typeface="Arial" pitchFamily="34" charset="-122"/>
                 <a:cs typeface="Arial" pitchFamily="34" charset="-120"/>
               </a:rPr>
-              <a:t>7</a:t>
+              <a:t>6</a:t>
             </a:r>
             <a:endParaRPr lang="en-US" sz="1700" dirty="0"/>
           </a:p>
@@ -13622,7 +12951,7 @@
                 <a:ea typeface="Arial" pitchFamily="34" charset="-122"/>
                 <a:cs typeface="Arial" pitchFamily="34" charset="-120"/>
               </a:rPr>
-              <a:t>Vídeo pitch e demonstração hands on</a:t>
+              <a:t>Repositório técnico e código-fonte</a:t>
             </a:r>
             <a:endParaRPr lang="en-US" sz="2500" dirty="0"/>
           </a:p>
@@ -13661,7 +12990,7 @@
                 <a:ea typeface="Calibri" pitchFamily="34" charset="-122"/>
                 <a:cs typeface="Calibri" pitchFamily="34" charset="-120"/>
               </a:rPr>
-              <a:t>Cinco minutos: problema, solução, demonstração ao vivo e resultados</a:t>
+              <a:t>Todo o código gerado no projeto, versionado e documentado</a:t>
             </a:r>
             <a:endParaRPr lang="en-US" sz="1250" dirty="0"/>
           </a:p>
@@ -13676,11 +13005,11 @@
         <p:spPr>
           <a:xfrm>
             <a:off x="566928" y="1481328"/>
-            <a:ext cx="11055096" cy="640080"/>
+            <a:ext cx="4937760" cy="4206240"/>
           </a:xfrm>
           <a:prstGeom prst="roundRect">
             <a:avLst>
-              <a:gd name="adj" fmla="val 12857"/>
+              <a:gd name="adj" fmla="val 1957"/>
             </a:avLst>
           </a:prstGeom>
           <a:solidFill>
@@ -13691,157 +13020,339 @@
       </p:sp>
       <p:sp>
         <p:nvSpPr>
-          <p:cNvPr id="7" name="Shape 5"/>
+          <p:cNvPr id="7" name="Text 5"/>
+          <p:cNvSpPr txBox="1"/>
+          <p:nvPr/>
+        </p:nvSpPr>
+        <p:spPr>
+          <a:xfrm>
+            <a:off x="841248" y="1682496"/>
+            <a:ext cx="4389120" cy="256032"/>
+          </a:xfrm>
+          <a:prstGeom prst="rect">
+            <a:avLst/>
+          </a:prstGeom>
+          <a:noFill/>
+          <a:ln/>
+        </p:spPr>
+        <p:txBody>
+          <a:bodyPr wrap="square" lIns="0" tIns="0" rIns="0" bIns="0" rtlCol="0" anchor="ctr"/>
+          <a:lstStyle/>
+          <a:p>
+            <a:pPr indent="0" marL="0">
+              <a:buNone/>
+            </a:pPr>
+            <a:r>
+              <a:rPr lang="en-US" sz="900" b="1" spc="60" kern="0" dirty="0">
+                <a:solidFill>
+                  <a:srgbClr val="6B8592"/>
+                </a:solidFill>
+                <a:latin typeface="Calibri" pitchFamily="34" charset="0"/>
+                <a:ea typeface="Calibri" pitchFamily="34" charset="-122"/>
+                <a:cs typeface="Calibri" pitchFamily="34" charset="-120"/>
+              </a:rPr>
+              <a:t>ESTRUTURA DO REPOSITÓRIO</a:t>
+            </a:r>
+            <a:endParaRPr lang="en-US" sz="900" dirty="0"/>
+          </a:p>
+        </p:txBody>
+      </p:sp>
+      <p:sp>
+        <p:nvSpPr>
+          <p:cNvPr id="8" name="Text 6"/>
+          <p:cNvSpPr txBox="1"/>
+          <p:nvPr/>
+        </p:nvSpPr>
+        <p:spPr>
+          <a:xfrm>
+            <a:off x="841248" y="1975104"/>
+            <a:ext cx="4389120" cy="3566160"/>
+          </a:xfrm>
+          <a:prstGeom prst="rect">
+            <a:avLst/>
+          </a:prstGeom>
+          <a:noFill/>
+          <a:ln/>
+        </p:spPr>
+        <p:txBody>
+          <a:bodyPr wrap="square" lIns="0" tIns="0" rIns="0" bIns="0" rtlCol="0" anchor="t"/>
+          <a:lstStyle/>
+          <a:p>
+            <a:pPr indent="0" marL="0">
+              <a:lnSpc>
+                <a:spcPct val="106000"/>
+              </a:lnSpc>
+              <a:buNone/>
+            </a:pPr>
+            <a:r>
+              <a:rPr lang="en-US" sz="950" dirty="0">
+                <a:solidFill>
+                  <a:srgbClr val="3C5C6B"/>
+                </a:solidFill>
+                <a:latin typeface="Courier New" pitchFamily="34" charset="0"/>
+                <a:ea typeface="Courier New" pitchFamily="34" charset="-122"/>
+                <a:cs typeface="Courier New" pitchFamily="34" charset="-120"/>
+              </a:rPr>
+              <a:t>src/</a:t>
+            </a:r>
+            <a:endParaRPr lang="en-US" sz="950" dirty="0"/>
+          </a:p>
+          <a:p>
+            <a:pPr indent="0" marL="0">
+              <a:lnSpc>
+                <a:spcPct val="106000"/>
+              </a:lnSpc>
+              <a:buNone/>
+            </a:pPr>
+            <a:r>
+              <a:rPr lang="en-US" sz="950" dirty="0">
+                <a:solidFill>
+                  <a:srgbClr val="3C5C6B"/>
+                </a:solidFill>
+                <a:latin typeface="Courier New" pitchFamily="34" charset="0"/>
+                <a:ea typeface="Courier New" pitchFamily="34" charset="-122"/>
+                <a:cs typeface="Courier New" pitchFamily="34" charset="-120"/>
+              </a:rPr>
+              <a:t>  run_pipeline.py       orquestrador ponta a ponta</a:t>
+            </a:r>
+            <a:endParaRPr lang="en-US" sz="950" dirty="0"/>
+          </a:p>
+          <a:p>
+            <a:pPr indent="0" marL="0">
+              <a:lnSpc>
+                <a:spcPct val="106000"/>
+              </a:lnSpc>
+              <a:buNone/>
+            </a:pPr>
+            <a:r>
+              <a:rPr lang="en-US" sz="950" dirty="0">
+                <a:solidFill>
+                  <a:srgbClr val="3C5C6B"/>
+                </a:solidFill>
+                <a:latin typeface="Courier New" pitchFamily="34" charset="0"/>
+                <a:ea typeface="Courier New" pitchFamily="34" charset="-122"/>
+                <a:cs typeface="Courier New" pitchFamily="34" charset="-120"/>
+              </a:rPr>
+              <a:t>  etl/tabnet_client.py  cliente do CGI do DATASUS</a:t>
+            </a:r>
+            <a:endParaRPr lang="en-US" sz="950" dirty="0"/>
+          </a:p>
+          <a:p>
+            <a:pPr indent="0" marL="0">
+              <a:lnSpc>
+                <a:spcPct val="106000"/>
+              </a:lnSpc>
+              <a:buNone/>
+            </a:pPr>
+            <a:r>
+              <a:rPr lang="en-US" sz="950" dirty="0">
+                <a:solidFill>
+                  <a:srgbClr val="3C5C6B"/>
+                </a:solidFill>
+                <a:latin typeface="Courier New" pitchFamily="34" charset="0"/>
+                <a:ea typeface="Courier New" pitchFamily="34" charset="-122"/>
+                <a:cs typeface="Courier New" pitchFamily="34" charset="-120"/>
+              </a:rPr>
+              <a:t>  etl/extract_*.py      as três fontes</a:t>
+            </a:r>
+            <a:endParaRPr lang="en-US" sz="950" dirty="0"/>
+          </a:p>
+          <a:p>
+            <a:pPr indent="0" marL="0">
+              <a:lnSpc>
+                <a:spcPct val="106000"/>
+              </a:lnSpc>
+              <a:buNone/>
+            </a:pPr>
+            <a:r>
+              <a:rPr lang="en-US" sz="950" dirty="0">
+                <a:solidFill>
+                  <a:srgbClr val="3C5C6B"/>
+                </a:solidFill>
+                <a:latin typeface="Courier New" pitchFamily="34" charset="0"/>
+                <a:ea typeface="Courier New" pitchFamily="34" charset="-122"/>
+                <a:cs typeface="Courier New" pitchFamily="34" charset="-120"/>
+              </a:rPr>
+              <a:t>  etl/transform.py      integração e indicadores</a:t>
+            </a:r>
+            <a:endParaRPr lang="en-US" sz="950" dirty="0"/>
+          </a:p>
+          <a:p>
+            <a:pPr indent="0" marL="0">
+              <a:lnSpc>
+                <a:spcPct val="106000"/>
+              </a:lnSpc>
+              <a:buNone/>
+            </a:pPr>
+            <a:r>
+              <a:rPr lang="en-US" sz="950" dirty="0">
+                <a:solidFill>
+                  <a:srgbClr val="3C5C6B"/>
+                </a:solidFill>
+                <a:latin typeface="Courier New" pitchFamily="34" charset="0"/>
+                <a:ea typeface="Courier New" pitchFamily="34" charset="-122"/>
+                <a:cs typeface="Courier New" pitchFamily="34" charset="-120"/>
+              </a:rPr>
+              <a:t>  analytics/modelos.py  K-Means, índice, regressão</a:t>
+            </a:r>
+            <a:endParaRPr lang="en-US" sz="950" dirty="0"/>
+          </a:p>
+          <a:p>
+            <a:pPr indent="0" marL="0">
+              <a:lnSpc>
+                <a:spcPct val="106000"/>
+              </a:lnSpc>
+              <a:buNone/>
+            </a:pPr>
+            <a:r>
+              <a:rPr lang="en-US" sz="950" dirty="0">
+                <a:solidFill>
+                  <a:srgbClr val="3C5C6B"/>
+                </a:solidFill>
+                <a:latin typeface="Courier New" pitchFamily="34" charset="0"/>
+                <a:ea typeface="Courier New" pitchFamily="34" charset="-122"/>
+                <a:cs typeface="Courier New" pitchFamily="34" charset="-120"/>
+              </a:rPr>
+              <a:t>  viz/                  gráficos e dashboard</a:t>
+            </a:r>
+            <a:endParaRPr lang="en-US" sz="950" dirty="0"/>
+          </a:p>
+          <a:p>
+            <a:pPr indent="0" marL="0">
+              <a:lnSpc>
+                <a:spcPct val="106000"/>
+              </a:lnSpc>
+              <a:buNone/>
+            </a:pPr>
+            <a:r>
+              <a:rPr lang="en-US" sz="950" dirty="0">
+                <a:solidFill>
+                  <a:srgbClr val="3C5C6B"/>
+                </a:solidFill>
+                <a:latin typeface="Courier New" pitchFamily="34" charset="0"/>
+                <a:ea typeface="Courier New" pitchFamily="34" charset="-122"/>
+                <a:cs typeface="Courier New" pitchFamily="34" charset="-120"/>
+              </a:rPr>
+              <a:t>sql/                    01 a 05 — Oracle 23ai</a:t>
+            </a:r>
+            <a:endParaRPr lang="en-US" sz="950" dirty="0"/>
+          </a:p>
+          <a:p>
+            <a:pPr indent="0" marL="0">
+              <a:lnSpc>
+                <a:spcPct val="106000"/>
+              </a:lnSpc>
+              <a:buNone/>
+            </a:pPr>
+            <a:r>
+              <a:rPr lang="en-US" sz="950" dirty="0">
+                <a:solidFill>
+                  <a:srgbClr val="3C5C6B"/>
+                </a:solidFill>
+                <a:latin typeface="Courier New" pitchFamily="34" charset="0"/>
+                <a:ea typeface="Courier New" pitchFamily="34" charset="-122"/>
+                <a:cs typeface="Courier New" pitchFamily="34" charset="-120"/>
+              </a:rPr>
+              <a:t>notebooks/              análise exploratória</a:t>
+            </a:r>
+            <a:endParaRPr lang="en-US" sz="950" dirty="0"/>
+          </a:p>
+          <a:p>
+            <a:pPr indent="0" marL="0">
+              <a:lnSpc>
+                <a:spcPct val="106000"/>
+              </a:lnSpc>
+              <a:buNone/>
+            </a:pPr>
+            <a:r>
+              <a:rPr lang="en-US" sz="950" dirty="0">
+                <a:solidFill>
+                  <a:srgbClr val="3C5C6B"/>
+                </a:solidFill>
+                <a:latin typeface="Courier New" pitchFamily="34" charset="0"/>
+                <a:ea typeface="Courier New" pitchFamily="34" charset="-122"/>
+                <a:cs typeface="Courier New" pitchFamily="34" charset="-120"/>
+              </a:rPr>
+              <a:t>data/                   dados tratados: raw + processed</a:t>
+            </a:r>
+            <a:endParaRPr lang="en-US" sz="950" dirty="0"/>
+          </a:p>
+          <a:p>
+            <a:pPr indent="0" marL="0">
+              <a:lnSpc>
+                <a:spcPct val="106000"/>
+              </a:lnSpc>
+              <a:buNone/>
+            </a:pPr>
+            <a:r>
+              <a:rPr lang="en-US" sz="950" dirty="0">
+                <a:solidFill>
+                  <a:srgbClr val="3C5C6B"/>
+                </a:solidFill>
+                <a:latin typeface="Courier New" pitchFamily="34" charset="0"/>
+                <a:ea typeface="Courier New" pitchFamily="34" charset="-122"/>
+                <a:cs typeface="Courier New" pitchFamily="34" charset="-120"/>
+              </a:rPr>
+              <a:t>docs/                   arquitetura, dicionário,</a:t>
+            </a:r>
+            <a:endParaRPr lang="en-US" sz="950" dirty="0"/>
+          </a:p>
+          <a:p>
+            <a:pPr indent="0" marL="0">
+              <a:lnSpc>
+                <a:spcPct val="106000"/>
+              </a:lnSpc>
+              <a:buNone/>
+            </a:pPr>
+            <a:r>
+              <a:rPr lang="en-US" sz="950" dirty="0">
+                <a:solidFill>
+                  <a:srgbClr val="3C5C6B"/>
+                </a:solidFill>
+                <a:latin typeface="Courier New" pitchFamily="34" charset="0"/>
+                <a:ea typeface="Courier New" pitchFamily="34" charset="-122"/>
+                <a:cs typeface="Courier New" pitchFamily="34" charset="-120"/>
+              </a:rPr>
+              <a:t>                        implantação, evidências</a:t>
+            </a:r>
+            <a:endParaRPr lang="en-US" sz="950" dirty="0"/>
+          </a:p>
+          <a:p>
+            <a:pPr indent="0" marL="0">
+              <a:lnSpc>
+                <a:spcPct val="106000"/>
+              </a:lnSpc>
+              <a:buNone/>
+            </a:pPr>
+            <a:r>
+              <a:rPr lang="en-US" sz="950" dirty="0">
+                <a:solidFill>
+                  <a:srgbClr val="3C5C6B"/>
+                </a:solidFill>
+                <a:latin typeface="Courier New" pitchFamily="34" charset="0"/>
+                <a:ea typeface="Courier New" pitchFamily="34" charset="-122"/>
+                <a:cs typeface="Courier New" pitchFamily="34" charset="-120"/>
+              </a:rPr>
+              <a:t>dashboard/              aplicação navegável</a:t>
+            </a:r>
+            <a:endParaRPr lang="en-US" sz="950" dirty="0"/>
+          </a:p>
+        </p:txBody>
+      </p:sp>
+      <p:sp>
+        <p:nvSpPr>
+          <p:cNvPr id="9" name="Shape 7"/>
           <p:cNvSpPr/>
           <p:nvPr/>
         </p:nvSpPr>
         <p:spPr>
           <a:xfrm>
-            <a:off x="749808" y="1618488"/>
-            <a:ext cx="1371600" cy="365760"/>
+            <a:off x="5779008" y="1481328"/>
+            <a:ext cx="5843016" cy="768096"/>
           </a:xfrm>
           <a:prstGeom prst="roundRect">
             <a:avLst>
-              <a:gd name="adj" fmla="val 12500"/>
-            </a:avLst>
-          </a:prstGeom>
-          <a:solidFill>
-            <a:srgbClr val="009B98"/>
-          </a:solidFill>
-          <a:ln/>
-        </p:spPr>
-      </p:sp>
-      <p:sp>
-        <p:nvSpPr>
-          <p:cNvPr id="8" name="Text 6"/>
-          <p:cNvSpPr txBox="1"/>
-          <p:nvPr/>
-        </p:nvSpPr>
-        <p:spPr>
-          <a:xfrm>
-            <a:off x="749808" y="1618488"/>
-            <a:ext cx="1371600" cy="365760"/>
-          </a:xfrm>
-          <a:prstGeom prst="rect">
-            <a:avLst/>
-          </a:prstGeom>
-          <a:noFill/>
-          <a:ln/>
-        </p:spPr>
-        <p:txBody>
-          <a:bodyPr wrap="square" lIns="0" tIns="0" rIns="0" bIns="0" rtlCol="0" anchor="ctr"/>
-          <a:lstStyle/>
-          <a:p>
-            <a:pPr algn="ctr" indent="0" marL="0">
-              <a:buNone/>
-            </a:pPr>
-            <a:r>
-              <a:rPr lang="en-US" sz="1000" b="1" dirty="0">
-                <a:solidFill>
-                  <a:srgbClr val="FFFFFF"/>
-                </a:solidFill>
-                <a:latin typeface="Calibri" pitchFamily="34" charset="0"/>
-                <a:ea typeface="Calibri" pitchFamily="34" charset="-122"/>
-                <a:cs typeface="Calibri" pitchFamily="34" charset="-120"/>
-              </a:rPr>
-              <a:t>00:00 – 00:30</a:t>
-            </a:r>
-            <a:endParaRPr lang="en-US" sz="1000" dirty="0"/>
-          </a:p>
-        </p:txBody>
-      </p:sp>
-      <p:sp>
-        <p:nvSpPr>
-          <p:cNvPr id="9" name="Text 7"/>
-          <p:cNvSpPr txBox="1"/>
-          <p:nvPr/>
-        </p:nvSpPr>
-        <p:spPr>
-          <a:xfrm>
-            <a:off x="2286000" y="1481328"/>
-            <a:ext cx="3931920" cy="640080"/>
-          </a:xfrm>
-          <a:prstGeom prst="rect">
-            <a:avLst/>
-          </a:prstGeom>
-          <a:noFill/>
-          <a:ln/>
-        </p:spPr>
-        <p:txBody>
-          <a:bodyPr wrap="square" lIns="0" tIns="0" rIns="0" bIns="0" rtlCol="0" anchor="ctr"/>
-          <a:lstStyle/>
-          <a:p>
-            <a:pPr indent="0" marL="0">
-              <a:buNone/>
-            </a:pPr>
-            <a:r>
-              <a:rPr lang="en-US" sz="1200" b="1" dirty="0">
-                <a:solidFill>
-                  <a:srgbClr val="0A2A3B"/>
-                </a:solidFill>
-                <a:latin typeface="Arial" pitchFamily="34" charset="0"/>
-                <a:ea typeface="Arial" pitchFamily="34" charset="-122"/>
-                <a:cs typeface="Arial" pitchFamily="34" charset="-120"/>
-              </a:rPr>
-              <a:t>Abertura e contextualização</a:t>
-            </a:r>
-            <a:endParaRPr lang="en-US" sz="1200" dirty="0"/>
-          </a:p>
-        </p:txBody>
-      </p:sp>
-      <p:sp>
-        <p:nvSpPr>
-          <p:cNvPr id="10" name="Text 8"/>
-          <p:cNvSpPr txBox="1"/>
-          <p:nvPr/>
-        </p:nvSpPr>
-        <p:spPr>
-          <a:xfrm>
-            <a:off x="6327648" y="1481328"/>
-            <a:ext cx="5093208" cy="640080"/>
-          </a:xfrm>
-          <a:prstGeom prst="rect">
-            <a:avLst/>
-          </a:prstGeom>
-          <a:noFill/>
-          <a:ln/>
-        </p:spPr>
-        <p:txBody>
-          <a:bodyPr wrap="square" lIns="0" tIns="0" rIns="0" bIns="0" rtlCol="0" anchor="ctr"/>
-          <a:lstStyle/>
-          <a:p>
-            <a:pPr indent="0" marL="0">
-              <a:buNone/>
-            </a:pPr>
-            <a:r>
-              <a:rPr lang="en-US" sz="1100" dirty="0">
-                <a:solidFill>
-                  <a:srgbClr val="3C5C6B"/>
-                </a:solidFill>
-                <a:latin typeface="Calibri" pitchFamily="34" charset="0"/>
-                <a:ea typeface="Calibri" pitchFamily="34" charset="-122"/>
-                <a:cs typeface="Calibri" pitchFamily="34" charset="-120"/>
-              </a:rPr>
-              <a:t>A gestão de saúde decide com o dado do mês passado</a:t>
-            </a:r>
-            <a:endParaRPr lang="en-US" sz="1100" dirty="0"/>
-          </a:p>
-        </p:txBody>
-      </p:sp>
-      <p:sp>
-        <p:nvSpPr>
-          <p:cNvPr id="11" name="Shape 9"/>
-          <p:cNvSpPr/>
-          <p:nvPr/>
-        </p:nvSpPr>
-        <p:spPr>
-          <a:xfrm>
-            <a:off x="566928" y="2194560"/>
-            <a:ext cx="11055096" cy="640080"/>
-          </a:xfrm>
-          <a:prstGeom prst="roundRect">
-            <a:avLst>
-              <a:gd name="adj" fmla="val 12857"/>
+              <a:gd name="adj" fmla="val 10714"/>
             </a:avLst>
           </a:prstGeom>
           <a:solidFill>
@@ -13852,157 +13363,96 @@
       </p:sp>
       <p:sp>
         <p:nvSpPr>
+          <p:cNvPr id="10" name="Text 8"/>
+          <p:cNvSpPr txBox="1"/>
+          <p:nvPr/>
+        </p:nvSpPr>
+        <p:spPr>
+          <a:xfrm>
+            <a:off x="6035040" y="1572768"/>
+            <a:ext cx="5330952" cy="256032"/>
+          </a:xfrm>
+          <a:prstGeom prst="rect">
+            <a:avLst/>
+          </a:prstGeom>
+          <a:noFill/>
+          <a:ln/>
+        </p:spPr>
+        <p:txBody>
+          <a:bodyPr wrap="square" lIns="0" tIns="0" rIns="0" bIns="0" rtlCol="0" anchor="ctr"/>
+          <a:lstStyle/>
+          <a:p>
+            <a:pPr indent="0" marL="0">
+              <a:buNone/>
+            </a:pPr>
+            <a:r>
+              <a:rPr lang="en-US" sz="1100" b="1" dirty="0">
+                <a:solidFill>
+                  <a:srgbClr val="009B98"/>
+                </a:solidFill>
+                <a:latin typeface="Courier New" pitchFamily="34" charset="0"/>
+                <a:ea typeface="Courier New" pitchFamily="34" charset="-122"/>
+                <a:cs typeface="Courier New" pitchFamily="34" charset="-120"/>
+              </a:rPr>
+              <a:t>README.md</a:t>
+            </a:r>
+            <a:endParaRPr lang="en-US" sz="1100" dirty="0"/>
+          </a:p>
+        </p:txBody>
+      </p:sp>
+      <p:sp>
+        <p:nvSpPr>
+          <p:cNvPr id="11" name="Text 9"/>
+          <p:cNvSpPr txBox="1"/>
+          <p:nvPr/>
+        </p:nvSpPr>
+        <p:spPr>
+          <a:xfrm>
+            <a:off x="6035040" y="1828800"/>
+            <a:ext cx="5330952" cy="365760"/>
+          </a:xfrm>
+          <a:prstGeom prst="rect">
+            <a:avLst/>
+          </a:prstGeom>
+          <a:noFill/>
+          <a:ln/>
+        </p:spPr>
+        <p:txBody>
+          <a:bodyPr wrap="square" lIns="0" tIns="0" rIns="0" bIns="0" rtlCol="0" anchor="t"/>
+          <a:lstStyle/>
+          <a:p>
+            <a:pPr indent="0" marL="0">
+              <a:buNone/>
+            </a:pPr>
+            <a:r>
+              <a:rPr lang="en-US" sz="1050" dirty="0">
+                <a:solidFill>
+                  <a:srgbClr val="3C5C6B"/>
+                </a:solidFill>
+                <a:latin typeface="Calibri" pitchFamily="34" charset="0"/>
+                <a:ea typeface="Calibri" pitchFamily="34" charset="-122"/>
+                <a:cs typeface="Calibri" pitchFamily="34" charset="-120"/>
+              </a:rPr>
+              <a:t>Problema, arquitetura, resultados com dados reais, como executar e limitações declaradas</a:t>
+            </a:r>
+            <a:endParaRPr lang="en-US" sz="1050" dirty="0"/>
+          </a:p>
+        </p:txBody>
+      </p:sp>
+      <p:sp>
+        <p:nvSpPr>
           <p:cNvPr id="12" name="Shape 10"/>
           <p:cNvSpPr/>
           <p:nvPr/>
         </p:nvSpPr>
         <p:spPr>
           <a:xfrm>
-            <a:off x="749808" y="2331720"/>
-            <a:ext cx="1371600" cy="365760"/>
+            <a:off x="5779008" y="2340864"/>
+            <a:ext cx="5843016" cy="768096"/>
           </a:xfrm>
           <a:prstGeom prst="roundRect">
             <a:avLst>
-              <a:gd name="adj" fmla="val 12500"/>
-            </a:avLst>
-          </a:prstGeom>
-          <a:solidFill>
-            <a:srgbClr val="009B98"/>
-          </a:solidFill>
-          <a:ln/>
-        </p:spPr>
-      </p:sp>
-      <p:sp>
-        <p:nvSpPr>
-          <p:cNvPr id="13" name="Text 11"/>
-          <p:cNvSpPr txBox="1"/>
-          <p:nvPr/>
-        </p:nvSpPr>
-        <p:spPr>
-          <a:xfrm>
-            <a:off x="749808" y="2331720"/>
-            <a:ext cx="1371600" cy="365760"/>
-          </a:xfrm>
-          <a:prstGeom prst="rect">
-            <a:avLst/>
-          </a:prstGeom>
-          <a:noFill/>
-          <a:ln/>
-        </p:spPr>
-        <p:txBody>
-          <a:bodyPr wrap="square" lIns="0" tIns="0" rIns="0" bIns="0" rtlCol="0" anchor="ctr"/>
-          <a:lstStyle/>
-          <a:p>
-            <a:pPr algn="ctr" indent="0" marL="0">
-              <a:buNone/>
-            </a:pPr>
-            <a:r>
-              <a:rPr lang="en-US" sz="1000" b="1" dirty="0">
-                <a:solidFill>
-                  <a:srgbClr val="FFFFFF"/>
-                </a:solidFill>
-                <a:latin typeface="Calibri" pitchFamily="34" charset="0"/>
-                <a:ea typeface="Calibri" pitchFamily="34" charset="-122"/>
-                <a:cs typeface="Calibri" pitchFamily="34" charset="-120"/>
-              </a:rPr>
-              <a:t>00:30 – 01:00</a:t>
-            </a:r>
-            <a:endParaRPr lang="en-US" sz="1000" dirty="0"/>
-          </a:p>
-        </p:txBody>
-      </p:sp>
-      <p:sp>
-        <p:nvSpPr>
-          <p:cNvPr id="14" name="Text 12"/>
-          <p:cNvSpPr txBox="1"/>
-          <p:nvPr/>
-        </p:nvSpPr>
-        <p:spPr>
-          <a:xfrm>
-            <a:off x="2286000" y="2194560"/>
-            <a:ext cx="3931920" cy="640080"/>
-          </a:xfrm>
-          <a:prstGeom prst="rect">
-            <a:avLst/>
-          </a:prstGeom>
-          <a:noFill/>
-          <a:ln/>
-        </p:spPr>
-        <p:txBody>
-          <a:bodyPr wrap="square" lIns="0" tIns="0" rIns="0" bIns="0" rtlCol="0" anchor="ctr"/>
-          <a:lstStyle/>
-          <a:p>
-            <a:pPr indent="0" marL="0">
-              <a:buNone/>
-            </a:pPr>
-            <a:r>
-              <a:rPr lang="en-US" sz="1200" b="1" dirty="0">
-                <a:solidFill>
-                  <a:srgbClr val="0A2A3B"/>
-                </a:solidFill>
-                <a:latin typeface="Arial" pitchFamily="34" charset="0"/>
-                <a:ea typeface="Arial" pitchFamily="34" charset="-122"/>
-                <a:cs typeface="Arial" pitchFamily="34" charset="-120"/>
-              </a:rPr>
-              <a:t>Objetivo do projeto</a:t>
-            </a:r>
-            <a:endParaRPr lang="en-US" sz="1200" dirty="0"/>
-          </a:p>
-        </p:txBody>
-      </p:sp>
-      <p:sp>
-        <p:nvSpPr>
-          <p:cNvPr id="15" name="Text 13"/>
-          <p:cNvSpPr txBox="1"/>
-          <p:nvPr/>
-        </p:nvSpPr>
-        <p:spPr>
-          <a:xfrm>
-            <a:off x="6327648" y="2194560"/>
-            <a:ext cx="5093208" cy="640080"/>
-          </a:xfrm>
-          <a:prstGeom prst="rect">
-            <a:avLst/>
-          </a:prstGeom>
-          <a:noFill/>
-          <a:ln/>
-        </p:spPr>
-        <p:txBody>
-          <a:bodyPr wrap="square" lIns="0" tIns="0" rIns="0" bIns="0" rtlCol="0" anchor="ctr"/>
-          <a:lstStyle/>
-          <a:p>
-            <a:pPr indent="0" marL="0">
-              <a:buNone/>
-            </a:pPr>
-            <a:r>
-              <a:rPr lang="en-US" sz="1100" dirty="0">
-                <a:solidFill>
-                  <a:srgbClr val="3C5C6B"/>
-                </a:solidFill>
-                <a:latin typeface="Calibri" pitchFamily="34" charset="0"/>
-                <a:ea typeface="Calibri" pitchFamily="34" charset="-122"/>
-                <a:cs typeface="Calibri" pitchFamily="34" charset="-120"/>
-              </a:rPr>
-              <a:t>Encurtar o caminho entre a pergunta e a resposta</a:t>
-            </a:r>
-            <a:endParaRPr lang="en-US" sz="1100" dirty="0"/>
-          </a:p>
-        </p:txBody>
-      </p:sp>
-      <p:sp>
-        <p:nvSpPr>
-          <p:cNvPr id="16" name="Shape 14"/>
-          <p:cNvSpPr/>
-          <p:nvPr/>
-        </p:nvSpPr>
-        <p:spPr>
-          <a:xfrm>
-            <a:off x="566928" y="2907792"/>
-            <a:ext cx="11055096" cy="640080"/>
-          </a:xfrm>
-          <a:prstGeom prst="roundRect">
-            <a:avLst>
-              <a:gd name="adj" fmla="val 12857"/>
+              <a:gd name="adj" fmla="val 10714"/>
             </a:avLst>
           </a:prstGeom>
           <a:solidFill>
@@ -14013,157 +13463,96 @@
       </p:sp>
       <p:sp>
         <p:nvSpPr>
-          <p:cNvPr id="17" name="Shape 15"/>
+          <p:cNvPr id="13" name="Text 11"/>
+          <p:cNvSpPr txBox="1"/>
+          <p:nvPr/>
+        </p:nvSpPr>
+        <p:spPr>
+          <a:xfrm>
+            <a:off x="6035040" y="2432304"/>
+            <a:ext cx="5330952" cy="256032"/>
+          </a:xfrm>
+          <a:prstGeom prst="rect">
+            <a:avLst/>
+          </a:prstGeom>
+          <a:noFill/>
+          <a:ln/>
+        </p:spPr>
+        <p:txBody>
+          <a:bodyPr wrap="square" lIns="0" tIns="0" rIns="0" bIns="0" rtlCol="0" anchor="ctr"/>
+          <a:lstStyle/>
+          <a:p>
+            <a:pPr indent="0" marL="0">
+              <a:buNone/>
+            </a:pPr>
+            <a:r>
+              <a:rPr lang="en-US" sz="1100" b="1" dirty="0">
+                <a:solidFill>
+                  <a:srgbClr val="009B98"/>
+                </a:solidFill>
+                <a:latin typeface="Courier New" pitchFamily="34" charset="0"/>
+                <a:ea typeface="Courier New" pitchFamily="34" charset="-122"/>
+                <a:cs typeface="Courier New" pitchFamily="34" charset="-120"/>
+              </a:rPr>
+              <a:t>docs/arquitetura.md</a:t>
+            </a:r>
+            <a:endParaRPr lang="en-US" sz="1100" dirty="0"/>
+          </a:p>
+        </p:txBody>
+      </p:sp>
+      <p:sp>
+        <p:nvSpPr>
+          <p:cNvPr id="14" name="Text 12"/>
+          <p:cNvSpPr txBox="1"/>
+          <p:nvPr/>
+        </p:nvSpPr>
+        <p:spPr>
+          <a:xfrm>
+            <a:off x="6035040" y="2688336"/>
+            <a:ext cx="5330952" cy="365760"/>
+          </a:xfrm>
+          <a:prstGeom prst="rect">
+            <a:avLst/>
+          </a:prstGeom>
+          <a:noFill/>
+          <a:ln/>
+        </p:spPr>
+        <p:txBody>
+          <a:bodyPr wrap="square" lIns="0" tIns="0" rIns="0" bIns="0" rtlCol="0" anchor="t"/>
+          <a:lstStyle/>
+          <a:p>
+            <a:pPr indent="0" marL="0">
+              <a:buNone/>
+            </a:pPr>
+            <a:r>
+              <a:rPr lang="en-US" sz="1050" dirty="0">
+                <a:solidFill>
+                  <a:srgbClr val="3C5C6B"/>
+                </a:solidFill>
+                <a:latin typeface="Calibri" pitchFamily="34" charset="0"/>
+                <a:ea typeface="Calibri" pitchFamily="34" charset="-122"/>
+                <a:cs typeface="Calibri" pitchFamily="34" charset="-120"/>
+              </a:rPr>
+              <a:t>Arquitetura em cinco camadas, fluxo do dado ponta a ponta, implementado × planejado</a:t>
+            </a:r>
+            <a:endParaRPr lang="en-US" sz="1050" dirty="0"/>
+          </a:p>
+        </p:txBody>
+      </p:sp>
+      <p:sp>
+        <p:nvSpPr>
+          <p:cNvPr id="15" name="Shape 13"/>
           <p:cNvSpPr/>
           <p:nvPr/>
         </p:nvSpPr>
         <p:spPr>
           <a:xfrm>
-            <a:off x="749808" y="3044952"/>
-            <a:ext cx="1371600" cy="365760"/>
+            <a:off x="5779008" y="3200400"/>
+            <a:ext cx="5843016" cy="768096"/>
           </a:xfrm>
           <a:prstGeom prst="roundRect">
             <a:avLst>
-              <a:gd name="adj" fmla="val 12500"/>
-            </a:avLst>
-          </a:prstGeom>
-          <a:solidFill>
-            <a:srgbClr val="B5820A"/>
-          </a:solidFill>
-          <a:ln/>
-        </p:spPr>
-      </p:sp>
-      <p:sp>
-        <p:nvSpPr>
-          <p:cNvPr id="18" name="Text 16"/>
-          <p:cNvSpPr txBox="1"/>
-          <p:nvPr/>
-        </p:nvSpPr>
-        <p:spPr>
-          <a:xfrm>
-            <a:off x="749808" y="3044952"/>
-            <a:ext cx="1371600" cy="365760"/>
-          </a:xfrm>
-          <a:prstGeom prst="rect">
-            <a:avLst/>
-          </a:prstGeom>
-          <a:noFill/>
-          <a:ln/>
-        </p:spPr>
-        <p:txBody>
-          <a:bodyPr wrap="square" lIns="0" tIns="0" rIns="0" bIns="0" rtlCol="0" anchor="ctr"/>
-          <a:lstStyle/>
-          <a:p>
-            <a:pPr algn="ctr" indent="0" marL="0">
-              <a:buNone/>
-            </a:pPr>
-            <a:r>
-              <a:rPr lang="en-US" sz="1000" b="1" dirty="0">
-                <a:solidFill>
-                  <a:srgbClr val="FFFFFF"/>
-                </a:solidFill>
-                <a:latin typeface="Calibri" pitchFamily="34" charset="0"/>
-                <a:ea typeface="Calibri" pitchFamily="34" charset="-122"/>
-                <a:cs typeface="Calibri" pitchFamily="34" charset="-120"/>
-              </a:rPr>
-              <a:t>01:00 – 02:00</a:t>
-            </a:r>
-            <a:endParaRPr lang="en-US" sz="1000" dirty="0"/>
-          </a:p>
-        </p:txBody>
-      </p:sp>
-      <p:sp>
-        <p:nvSpPr>
-          <p:cNvPr id="19" name="Text 17"/>
-          <p:cNvSpPr txBox="1"/>
-          <p:nvPr/>
-        </p:nvSpPr>
-        <p:spPr>
-          <a:xfrm>
-            <a:off x="2286000" y="2907792"/>
-            <a:ext cx="3931920" cy="640080"/>
-          </a:xfrm>
-          <a:prstGeom prst="rect">
-            <a:avLst/>
-          </a:prstGeom>
-          <a:noFill/>
-          <a:ln/>
-        </p:spPr>
-        <p:txBody>
-          <a:bodyPr wrap="square" lIns="0" tIns="0" rIns="0" bIns="0" rtlCol="0" anchor="ctr"/>
-          <a:lstStyle/>
-          <a:p>
-            <a:pPr indent="0" marL="0">
-              <a:buNone/>
-            </a:pPr>
-            <a:r>
-              <a:rPr lang="en-US" sz="1200" b="1" dirty="0">
-                <a:solidFill>
-                  <a:srgbClr val="0A2A3B"/>
-                </a:solidFill>
-                <a:latin typeface="Arial" pitchFamily="34" charset="0"/>
-                <a:ea typeface="Arial" pitchFamily="34" charset="-122"/>
-                <a:cs typeface="Arial" pitchFamily="34" charset="-120"/>
-              </a:rPr>
-              <a:t>Proposta de solução</a:t>
-            </a:r>
-            <a:endParaRPr lang="en-US" sz="1200" dirty="0"/>
-          </a:p>
-        </p:txBody>
-      </p:sp>
-      <p:sp>
-        <p:nvSpPr>
-          <p:cNvPr id="20" name="Text 18"/>
-          <p:cNvSpPr txBox="1"/>
-          <p:nvPr/>
-        </p:nvSpPr>
-        <p:spPr>
-          <a:xfrm>
-            <a:off x="6327648" y="2907792"/>
-            <a:ext cx="5093208" cy="640080"/>
-          </a:xfrm>
-          <a:prstGeom prst="rect">
-            <a:avLst/>
-          </a:prstGeom>
-          <a:noFill/>
-          <a:ln/>
-        </p:spPr>
-        <p:txBody>
-          <a:bodyPr wrap="square" lIns="0" tIns="0" rIns="0" bIns="0" rtlCol="0" anchor="ctr"/>
-          <a:lstStyle/>
-          <a:p>
-            <a:pPr indent="0" marL="0">
-              <a:buNone/>
-            </a:pPr>
-            <a:r>
-              <a:rPr lang="en-US" sz="1100" dirty="0">
-                <a:solidFill>
-                  <a:srgbClr val="3C5C6B"/>
-                </a:solidFill>
-                <a:latin typeface="Calibri" pitchFamily="34" charset="0"/>
-                <a:ea typeface="Calibri" pitchFamily="34" charset="-122"/>
-                <a:cs typeface="Calibri" pitchFamily="34" charset="-120"/>
-              </a:rPr>
-              <a:t>Arquitetura, as três fontes e o diferencial Select AI</a:t>
-            </a:r>
-            <a:endParaRPr lang="en-US" sz="1100" dirty="0"/>
-          </a:p>
-        </p:txBody>
-      </p:sp>
-      <p:sp>
-        <p:nvSpPr>
-          <p:cNvPr id="21" name="Shape 19"/>
-          <p:cNvSpPr/>
-          <p:nvPr/>
-        </p:nvSpPr>
-        <p:spPr>
-          <a:xfrm>
-            <a:off x="566928" y="3621024"/>
-            <a:ext cx="11055096" cy="640080"/>
-          </a:xfrm>
-          <a:prstGeom prst="roundRect">
-            <a:avLst>
-              <a:gd name="adj" fmla="val 12857"/>
+              <a:gd name="adj" fmla="val 10714"/>
             </a:avLst>
           </a:prstGeom>
           <a:solidFill>
@@ -14174,157 +13563,96 @@
       </p:sp>
       <p:sp>
         <p:nvSpPr>
-          <p:cNvPr id="22" name="Shape 20"/>
+          <p:cNvPr id="16" name="Text 14"/>
+          <p:cNvSpPr txBox="1"/>
+          <p:nvPr/>
+        </p:nvSpPr>
+        <p:spPr>
+          <a:xfrm>
+            <a:off x="6035040" y="3291840"/>
+            <a:ext cx="5330952" cy="256032"/>
+          </a:xfrm>
+          <a:prstGeom prst="rect">
+            <a:avLst/>
+          </a:prstGeom>
+          <a:noFill/>
+          <a:ln/>
+        </p:spPr>
+        <p:txBody>
+          <a:bodyPr wrap="square" lIns="0" tIns="0" rIns="0" bIns="0" rtlCol="0" anchor="ctr"/>
+          <a:lstStyle/>
+          <a:p>
+            <a:pPr indent="0" marL="0">
+              <a:buNone/>
+            </a:pPr>
+            <a:r>
+              <a:rPr lang="en-US" sz="1100" b="1" dirty="0">
+                <a:solidFill>
+                  <a:srgbClr val="009B98"/>
+                </a:solidFill>
+                <a:latin typeface="Courier New" pitchFamily="34" charset="0"/>
+                <a:ea typeface="Courier New" pitchFamily="34" charset="-122"/>
+                <a:cs typeface="Courier New" pitchFamily="34" charset="-120"/>
+              </a:rPr>
+              <a:t>docs/dicionario_dados.md</a:t>
+            </a:r>
+            <a:endParaRPr lang="en-US" sz="1100" dirty="0"/>
+          </a:p>
+        </p:txBody>
+      </p:sp>
+      <p:sp>
+        <p:nvSpPr>
+          <p:cNvPr id="17" name="Text 15"/>
+          <p:cNvSpPr txBox="1"/>
+          <p:nvPr/>
+        </p:nvSpPr>
+        <p:spPr>
+          <a:xfrm>
+            <a:off x="6035040" y="3547872"/>
+            <a:ext cx="5330952" cy="365760"/>
+          </a:xfrm>
+          <a:prstGeom prst="rect">
+            <a:avLst/>
+          </a:prstGeom>
+          <a:noFill/>
+          <a:ln/>
+        </p:spPr>
+        <p:txBody>
+          <a:bodyPr wrap="square" lIns="0" tIns="0" rIns="0" bIns="0" rtlCol="0" anchor="t"/>
+          <a:lstStyle/>
+          <a:p>
+            <a:pPr indent="0" marL="0">
+              <a:buNone/>
+            </a:pPr>
+            <a:r>
+              <a:rPr lang="en-US" sz="1050" dirty="0">
+                <a:solidFill>
+                  <a:srgbClr val="3C5C6B"/>
+                </a:solidFill>
+                <a:latin typeface="Calibri" pitchFamily="34" charset="0"/>
+                <a:ea typeface="Calibri" pitchFamily="34" charset="-122"/>
+                <a:cs typeface="Calibri" pitchFamily="34" charset="-120"/>
+              </a:rPr>
+              <a:t>Cada campo de cada tabela, com a ressalva metodológica de cada indicador</a:t>
+            </a:r>
+            <a:endParaRPr lang="en-US" sz="1050" dirty="0"/>
+          </a:p>
+        </p:txBody>
+      </p:sp>
+      <p:sp>
+        <p:nvSpPr>
+          <p:cNvPr id="18" name="Shape 16"/>
           <p:cNvSpPr/>
           <p:nvPr/>
         </p:nvSpPr>
         <p:spPr>
           <a:xfrm>
-            <a:off x="749808" y="3758184"/>
-            <a:ext cx="1371600" cy="365760"/>
+            <a:off x="5779008" y="4059936"/>
+            <a:ext cx="5843016" cy="768096"/>
           </a:xfrm>
           <a:prstGeom prst="roundRect">
             <a:avLst>
-              <a:gd name="adj" fmla="val 12500"/>
-            </a:avLst>
-          </a:prstGeom>
-          <a:solidFill>
-            <a:srgbClr val="D9452B"/>
-          </a:solidFill>
-          <a:ln/>
-        </p:spPr>
-      </p:sp>
-      <p:sp>
-        <p:nvSpPr>
-          <p:cNvPr id="23" name="Text 21"/>
-          <p:cNvSpPr txBox="1"/>
-          <p:nvPr/>
-        </p:nvSpPr>
-        <p:spPr>
-          <a:xfrm>
-            <a:off x="749808" y="3758184"/>
-            <a:ext cx="1371600" cy="365760"/>
-          </a:xfrm>
-          <a:prstGeom prst="rect">
-            <a:avLst/>
-          </a:prstGeom>
-          <a:noFill/>
-          <a:ln/>
-        </p:spPr>
-        <p:txBody>
-          <a:bodyPr wrap="square" lIns="0" tIns="0" rIns="0" bIns="0" rtlCol="0" anchor="ctr"/>
-          <a:lstStyle/>
-          <a:p>
-            <a:pPr algn="ctr" indent="0" marL="0">
-              <a:buNone/>
-            </a:pPr>
-            <a:r>
-              <a:rPr lang="en-US" sz="1000" b="1" dirty="0">
-                <a:solidFill>
-                  <a:srgbClr val="FFFFFF"/>
-                </a:solidFill>
-                <a:latin typeface="Calibri" pitchFamily="34" charset="0"/>
-                <a:ea typeface="Calibri" pitchFamily="34" charset="-122"/>
-                <a:cs typeface="Calibri" pitchFamily="34" charset="-120"/>
-              </a:rPr>
-              <a:t>02:00 – 04:00</a:t>
-            </a:r>
-            <a:endParaRPr lang="en-US" sz="1000" dirty="0"/>
-          </a:p>
-        </p:txBody>
-      </p:sp>
-      <p:sp>
-        <p:nvSpPr>
-          <p:cNvPr id="24" name="Text 22"/>
-          <p:cNvSpPr txBox="1"/>
-          <p:nvPr/>
-        </p:nvSpPr>
-        <p:spPr>
-          <a:xfrm>
-            <a:off x="2286000" y="3621024"/>
-            <a:ext cx="3931920" cy="640080"/>
-          </a:xfrm>
-          <a:prstGeom prst="rect">
-            <a:avLst/>
-          </a:prstGeom>
-          <a:noFill/>
-          <a:ln/>
-        </p:spPr>
-        <p:txBody>
-          <a:bodyPr wrap="square" lIns="0" tIns="0" rIns="0" bIns="0" rtlCol="0" anchor="ctr"/>
-          <a:lstStyle/>
-          <a:p>
-            <a:pPr indent="0" marL="0">
-              <a:buNone/>
-            </a:pPr>
-            <a:r>
-              <a:rPr lang="en-US" sz="1200" b="1" dirty="0">
-                <a:solidFill>
-                  <a:srgbClr val="0A2A3B"/>
-                </a:solidFill>
-                <a:latin typeface="Arial" pitchFamily="34" charset="0"/>
-                <a:ea typeface="Arial" pitchFamily="34" charset="-122"/>
-                <a:cs typeface="Arial" pitchFamily="34" charset="-120"/>
-              </a:rPr>
-              <a:t>Demonstração da solução funcionando</a:t>
-            </a:r>
-            <a:endParaRPr lang="en-US" sz="1200" dirty="0"/>
-          </a:p>
-        </p:txBody>
-      </p:sp>
-      <p:sp>
-        <p:nvSpPr>
-          <p:cNvPr id="25" name="Text 23"/>
-          <p:cNvSpPr txBox="1"/>
-          <p:nvPr/>
-        </p:nvSpPr>
-        <p:spPr>
-          <a:xfrm>
-            <a:off x="6327648" y="3621024"/>
-            <a:ext cx="5093208" cy="640080"/>
-          </a:xfrm>
-          <a:prstGeom prst="rect">
-            <a:avLst/>
-          </a:prstGeom>
-          <a:noFill/>
-          <a:ln/>
-        </p:spPr>
-        <p:txBody>
-          <a:bodyPr wrap="square" lIns="0" tIns="0" rIns="0" bIns="0" rtlCol="0" anchor="ctr"/>
-          <a:lstStyle/>
-          <a:p>
-            <a:pPr indent="0" marL="0">
-              <a:buNone/>
-            </a:pPr>
-            <a:r>
-              <a:rPr lang="en-US" sz="1100" dirty="0">
-                <a:solidFill>
-                  <a:srgbClr val="3C5C6B"/>
-                </a:solidFill>
-                <a:latin typeface="Calibri" pitchFamily="34" charset="0"/>
-                <a:ea typeface="Calibri" pitchFamily="34" charset="-122"/>
-                <a:cs typeface="Calibri" pitchFamily="34" charset="-120"/>
-              </a:rPr>
-              <a:t>Dashboard navegável e Select AI respondendo em português</a:t>
-            </a:r>
-            <a:endParaRPr lang="en-US" sz="1100" dirty="0"/>
-          </a:p>
-        </p:txBody>
-      </p:sp>
-      <p:sp>
-        <p:nvSpPr>
-          <p:cNvPr id="26" name="Shape 24"/>
-          <p:cNvSpPr/>
-          <p:nvPr/>
-        </p:nvSpPr>
-        <p:spPr>
-          <a:xfrm>
-            <a:off x="566928" y="4334256"/>
-            <a:ext cx="11055096" cy="640080"/>
-          </a:xfrm>
-          <a:prstGeom prst="roundRect">
-            <a:avLst>
-              <a:gd name="adj" fmla="val 12857"/>
+              <a:gd name="adj" fmla="val 10714"/>
             </a:avLst>
           </a:prstGeom>
           <a:solidFill>
@@ -14335,157 +13663,96 @@
       </p:sp>
       <p:sp>
         <p:nvSpPr>
-          <p:cNvPr id="27" name="Shape 25"/>
+          <p:cNvPr id="19" name="Text 17"/>
+          <p:cNvSpPr txBox="1"/>
+          <p:nvPr/>
+        </p:nvSpPr>
+        <p:spPr>
+          <a:xfrm>
+            <a:off x="6035040" y="4151376"/>
+            <a:ext cx="5330952" cy="256032"/>
+          </a:xfrm>
+          <a:prstGeom prst="rect">
+            <a:avLst/>
+          </a:prstGeom>
+          <a:noFill/>
+          <a:ln/>
+        </p:spPr>
+        <p:txBody>
+          <a:bodyPr wrap="square" lIns="0" tIns="0" rIns="0" bIns="0" rtlCol="0" anchor="ctr"/>
+          <a:lstStyle/>
+          <a:p>
+            <a:pPr indent="0" marL="0">
+              <a:buNone/>
+            </a:pPr>
+            <a:r>
+              <a:rPr lang="en-US" sz="1100" b="1" dirty="0">
+                <a:solidFill>
+                  <a:srgbClr val="009B98"/>
+                </a:solidFill>
+                <a:latin typeface="Courier New" pitchFamily="34" charset="0"/>
+                <a:ea typeface="Courier New" pitchFamily="34" charset="-122"/>
+                <a:cs typeface="Courier New" pitchFamily="34" charset="-120"/>
+              </a:rPr>
+              <a:t>docs/implantacao_oracle.md</a:t>
+            </a:r>
+            <a:endParaRPr lang="en-US" sz="1100" dirty="0"/>
+          </a:p>
+        </p:txBody>
+      </p:sp>
+      <p:sp>
+        <p:nvSpPr>
+          <p:cNvPr id="20" name="Text 18"/>
+          <p:cNvSpPr txBox="1"/>
+          <p:nvPr/>
+        </p:nvSpPr>
+        <p:spPr>
+          <a:xfrm>
+            <a:off x="6035040" y="4407408"/>
+            <a:ext cx="5330952" cy="365760"/>
+          </a:xfrm>
+          <a:prstGeom prst="rect">
+            <a:avLst/>
+          </a:prstGeom>
+          <a:noFill/>
+          <a:ln/>
+        </p:spPr>
+        <p:txBody>
+          <a:bodyPr wrap="square" lIns="0" tIns="0" rIns="0" bIns="0" rtlCol="0" anchor="t"/>
+          <a:lstStyle/>
+          <a:p>
+            <a:pPr indent="0" marL="0">
+              <a:buNone/>
+            </a:pPr>
+            <a:r>
+              <a:rPr lang="en-US" sz="1050" dirty="0">
+                <a:solidFill>
+                  <a:srgbClr val="3C5C6B"/>
+                </a:solidFill>
+                <a:latin typeface="Calibri" pitchFamily="34" charset="0"/>
+                <a:ea typeface="Calibri" pitchFamily="34" charset="-122"/>
+                <a:cs typeface="Calibri" pitchFamily="34" charset="-120"/>
+              </a:rPr>
+              <a:t>Implantação da camada Oracle: ordem dos scripts, validação da carga e diagnóstico do Select AI</a:t>
+            </a:r>
+            <a:endParaRPr lang="en-US" sz="1050" dirty="0"/>
+          </a:p>
+        </p:txBody>
+      </p:sp>
+      <p:sp>
+        <p:nvSpPr>
+          <p:cNvPr id="21" name="Shape 19"/>
           <p:cNvSpPr/>
           <p:nvPr/>
         </p:nvSpPr>
         <p:spPr>
           <a:xfrm>
-            <a:off x="749808" y="4471416"/>
-            <a:ext cx="1371600" cy="365760"/>
+            <a:off x="5779008" y="4919472"/>
+            <a:ext cx="5843016" cy="768096"/>
           </a:xfrm>
           <a:prstGeom prst="roundRect">
             <a:avLst>
-              <a:gd name="adj" fmla="val 12500"/>
-            </a:avLst>
-          </a:prstGeom>
-          <a:solidFill>
-            <a:srgbClr val="7A4FA8"/>
-          </a:solidFill>
-          <a:ln/>
-        </p:spPr>
-      </p:sp>
-      <p:sp>
-        <p:nvSpPr>
-          <p:cNvPr id="28" name="Text 26"/>
-          <p:cNvSpPr txBox="1"/>
-          <p:nvPr/>
-        </p:nvSpPr>
-        <p:spPr>
-          <a:xfrm>
-            <a:off x="749808" y="4471416"/>
-            <a:ext cx="1371600" cy="365760"/>
-          </a:xfrm>
-          <a:prstGeom prst="rect">
-            <a:avLst/>
-          </a:prstGeom>
-          <a:noFill/>
-          <a:ln/>
-        </p:spPr>
-        <p:txBody>
-          <a:bodyPr wrap="square" lIns="0" tIns="0" rIns="0" bIns="0" rtlCol="0" anchor="ctr"/>
-          <a:lstStyle/>
-          <a:p>
-            <a:pPr algn="ctr" indent="0" marL="0">
-              <a:buNone/>
-            </a:pPr>
-            <a:r>
-              <a:rPr lang="en-US" sz="1000" b="1" dirty="0">
-                <a:solidFill>
-                  <a:srgbClr val="FFFFFF"/>
-                </a:solidFill>
-                <a:latin typeface="Calibri" pitchFamily="34" charset="0"/>
-                <a:ea typeface="Calibri" pitchFamily="34" charset="-122"/>
-                <a:cs typeface="Calibri" pitchFamily="34" charset="-120"/>
-              </a:rPr>
-              <a:t>04:00 – 04:30</a:t>
-            </a:r>
-            <a:endParaRPr lang="en-US" sz="1000" dirty="0"/>
-          </a:p>
-        </p:txBody>
-      </p:sp>
-      <p:sp>
-        <p:nvSpPr>
-          <p:cNvPr id="29" name="Text 27"/>
-          <p:cNvSpPr txBox="1"/>
-          <p:nvPr/>
-        </p:nvSpPr>
-        <p:spPr>
-          <a:xfrm>
-            <a:off x="2286000" y="4334256"/>
-            <a:ext cx="3931920" cy="640080"/>
-          </a:xfrm>
-          <a:prstGeom prst="rect">
-            <a:avLst/>
-          </a:prstGeom>
-          <a:noFill/>
-          <a:ln/>
-        </p:spPr>
-        <p:txBody>
-          <a:bodyPr wrap="square" lIns="0" tIns="0" rIns="0" bIns="0" rtlCol="0" anchor="ctr"/>
-          <a:lstStyle/>
-          <a:p>
-            <a:pPr indent="0" marL="0">
-              <a:buNone/>
-            </a:pPr>
-            <a:r>
-              <a:rPr lang="en-US" sz="1200" b="1" dirty="0">
-                <a:solidFill>
-                  <a:srgbClr val="0A2A3B"/>
-                </a:solidFill>
-                <a:latin typeface="Arial" pitchFamily="34" charset="0"/>
-                <a:ea typeface="Arial" pitchFamily="34" charset="-122"/>
-                <a:cs typeface="Arial" pitchFamily="34" charset="-120"/>
-              </a:rPr>
-              <a:t>Benefícios gerados</a:t>
-            </a:r>
-            <a:endParaRPr lang="en-US" sz="1200" dirty="0"/>
-          </a:p>
-        </p:txBody>
-      </p:sp>
-      <p:sp>
-        <p:nvSpPr>
-          <p:cNvPr id="30" name="Text 28"/>
-          <p:cNvSpPr txBox="1"/>
-          <p:nvPr/>
-        </p:nvSpPr>
-        <p:spPr>
-          <a:xfrm>
-            <a:off x="6327648" y="4334256"/>
-            <a:ext cx="5093208" cy="640080"/>
-          </a:xfrm>
-          <a:prstGeom prst="rect">
-            <a:avLst/>
-          </a:prstGeom>
-          <a:noFill/>
-          <a:ln/>
-        </p:spPr>
-        <p:txBody>
-          <a:bodyPr wrap="square" lIns="0" tIns="0" rIns="0" bIns="0" rtlCol="0" anchor="ctr"/>
-          <a:lstStyle/>
-          <a:p>
-            <a:pPr indent="0" marL="0">
-              <a:buNone/>
-            </a:pPr>
-            <a:r>
-              <a:rPr lang="en-US" sz="1100" dirty="0">
-                <a:solidFill>
-                  <a:srgbClr val="3C5C6B"/>
-                </a:solidFill>
-                <a:latin typeface="Calibri" pitchFamily="34" charset="0"/>
-                <a:ea typeface="Calibri" pitchFamily="34" charset="-122"/>
-                <a:cs typeface="Calibri" pitchFamily="34" charset="-120"/>
-              </a:rPr>
-              <a:t>15 municípios críticos identificados com dado real</a:t>
-            </a:r>
-            <a:endParaRPr lang="en-US" sz="1100" dirty="0"/>
-          </a:p>
-        </p:txBody>
-      </p:sp>
-      <p:sp>
-        <p:nvSpPr>
-          <p:cNvPr id="31" name="Shape 29"/>
-          <p:cNvSpPr/>
-          <p:nvPr/>
-        </p:nvSpPr>
-        <p:spPr>
-          <a:xfrm>
-            <a:off x="566928" y="5047488"/>
-            <a:ext cx="11055096" cy="640080"/>
-          </a:xfrm>
-          <a:prstGeom prst="roundRect">
-            <a:avLst>
-              <a:gd name="adj" fmla="val 12857"/>
+              <a:gd name="adj" fmla="val 10714"/>
             </a:avLst>
           </a:prstGeom>
           <a:solidFill>
@@ -14496,157 +13763,96 @@
       </p:sp>
       <p:sp>
         <p:nvSpPr>
-          <p:cNvPr id="32" name="Shape 30"/>
+          <p:cNvPr id="22" name="Text 20"/>
+          <p:cNvSpPr txBox="1"/>
+          <p:nvPr/>
+        </p:nvSpPr>
+        <p:spPr>
+          <a:xfrm>
+            <a:off x="6035040" y="5010912"/>
+            <a:ext cx="5330952" cy="256032"/>
+          </a:xfrm>
+          <a:prstGeom prst="rect">
+            <a:avLst/>
+          </a:prstGeom>
+          <a:noFill/>
+          <a:ln/>
+        </p:spPr>
+        <p:txBody>
+          <a:bodyPr wrap="square" lIns="0" tIns="0" rIns="0" bIns="0" rtlCol="0" anchor="ctr"/>
+          <a:lstStyle/>
+          <a:p>
+            <a:pPr indent="0" marL="0">
+              <a:buNone/>
+            </a:pPr>
+            <a:r>
+              <a:rPr lang="en-US" sz="1100" b="1" dirty="0">
+                <a:solidFill>
+                  <a:srgbClr val="009B98"/>
+                </a:solidFill>
+                <a:latin typeface="Courier New" pitchFamily="34" charset="0"/>
+                <a:ea typeface="Courier New" pitchFamily="34" charset="-122"/>
+                <a:cs typeface="Courier New" pitchFamily="34" charset="-120"/>
+              </a:rPr>
+              <a:t>notebooks/</a:t>
+            </a:r>
+            <a:endParaRPr lang="en-US" sz="1100" dirty="0"/>
+          </a:p>
+        </p:txBody>
+      </p:sp>
+      <p:sp>
+        <p:nvSpPr>
+          <p:cNvPr id="23" name="Text 21"/>
+          <p:cNvSpPr txBox="1"/>
+          <p:nvPr/>
+        </p:nvSpPr>
+        <p:spPr>
+          <a:xfrm>
+            <a:off x="6035040" y="5266944"/>
+            <a:ext cx="5330952" cy="365760"/>
+          </a:xfrm>
+          <a:prstGeom prst="rect">
+            <a:avLst/>
+          </a:prstGeom>
+          <a:noFill/>
+          <a:ln/>
+        </p:spPr>
+        <p:txBody>
+          <a:bodyPr wrap="square" lIns="0" tIns="0" rIns="0" bIns="0" rtlCol="0" anchor="t"/>
+          <a:lstStyle/>
+          <a:p>
+            <a:pPr indent="0" marL="0">
+              <a:buNone/>
+            </a:pPr>
+            <a:r>
+              <a:rPr lang="en-US" sz="1050" dirty="0">
+                <a:solidFill>
+                  <a:srgbClr val="3C5C6B"/>
+                </a:solidFill>
+                <a:latin typeface="Calibri" pitchFamily="34" charset="0"/>
+                <a:ea typeface="Calibri" pitchFamily="34" charset="-122"/>
+                <a:cs typeface="Calibri" pitchFamily="34" charset="-120"/>
+              </a:rPr>
+              <a:t>Análise exploratória que precedeu e justifica as decisões de modelagem</a:t>
+            </a:r>
+            <a:endParaRPr lang="en-US" sz="1050" dirty="0"/>
+          </a:p>
+        </p:txBody>
+      </p:sp>
+      <p:sp>
+        <p:nvSpPr>
+          <p:cNvPr id="24" name="Shape 22"/>
           <p:cNvSpPr/>
           <p:nvPr/>
         </p:nvSpPr>
         <p:spPr>
           <a:xfrm>
-            <a:off x="749808" y="5184648"/>
-            <a:ext cx="1371600" cy="365760"/>
+            <a:off x="566928" y="5797296"/>
+            <a:ext cx="11055096" cy="475488"/>
           </a:xfrm>
           <a:prstGeom prst="roundRect">
             <a:avLst>
-              <a:gd name="adj" fmla="val 12500"/>
-            </a:avLst>
-          </a:prstGeom>
-          <a:solidFill>
-            <a:srgbClr val="123B4F"/>
-          </a:solidFill>
-          <a:ln/>
-        </p:spPr>
-      </p:sp>
-      <p:sp>
-        <p:nvSpPr>
-          <p:cNvPr id="33" name="Text 31"/>
-          <p:cNvSpPr txBox="1"/>
-          <p:nvPr/>
-        </p:nvSpPr>
-        <p:spPr>
-          <a:xfrm>
-            <a:off x="749808" y="5184648"/>
-            <a:ext cx="1371600" cy="365760"/>
-          </a:xfrm>
-          <a:prstGeom prst="rect">
-            <a:avLst/>
-          </a:prstGeom>
-          <a:noFill/>
-          <a:ln/>
-        </p:spPr>
-        <p:txBody>
-          <a:bodyPr wrap="square" lIns="0" tIns="0" rIns="0" bIns="0" rtlCol="0" anchor="ctr"/>
-          <a:lstStyle/>
-          <a:p>
-            <a:pPr algn="ctr" indent="0" marL="0">
-              <a:buNone/>
-            </a:pPr>
-            <a:r>
-              <a:rPr lang="en-US" sz="1000" b="1" dirty="0">
-                <a:solidFill>
-                  <a:srgbClr val="FFFFFF"/>
-                </a:solidFill>
-                <a:latin typeface="Calibri" pitchFamily="34" charset="0"/>
-                <a:ea typeface="Calibri" pitchFamily="34" charset="-122"/>
-                <a:cs typeface="Calibri" pitchFamily="34" charset="-120"/>
-              </a:rPr>
-              <a:t>04:30 – 05:00</a:t>
-            </a:r>
-            <a:endParaRPr lang="en-US" sz="1000" dirty="0"/>
-          </a:p>
-        </p:txBody>
-      </p:sp>
-      <p:sp>
-        <p:nvSpPr>
-          <p:cNvPr id="34" name="Text 32"/>
-          <p:cNvSpPr txBox="1"/>
-          <p:nvPr/>
-        </p:nvSpPr>
-        <p:spPr>
-          <a:xfrm>
-            <a:off x="2286000" y="5047488"/>
-            <a:ext cx="3931920" cy="640080"/>
-          </a:xfrm>
-          <a:prstGeom prst="rect">
-            <a:avLst/>
-          </a:prstGeom>
-          <a:noFill/>
-          <a:ln/>
-        </p:spPr>
-        <p:txBody>
-          <a:bodyPr wrap="square" lIns="0" tIns="0" rIns="0" bIns="0" rtlCol="0" anchor="ctr"/>
-          <a:lstStyle/>
-          <a:p>
-            <a:pPr indent="0" marL="0">
-              <a:buNone/>
-            </a:pPr>
-            <a:r>
-              <a:rPr lang="en-US" sz="1200" b="1" dirty="0">
-                <a:solidFill>
-                  <a:srgbClr val="0A2A3B"/>
-                </a:solidFill>
-                <a:latin typeface="Arial" pitchFamily="34" charset="0"/>
-                <a:ea typeface="Arial" pitchFamily="34" charset="-122"/>
-                <a:cs typeface="Arial" pitchFamily="34" charset="-120"/>
-              </a:rPr>
-              <a:t>Conclusão e próximos passos</a:t>
-            </a:r>
-            <a:endParaRPr lang="en-US" sz="1200" dirty="0"/>
-          </a:p>
-        </p:txBody>
-      </p:sp>
-      <p:sp>
-        <p:nvSpPr>
-          <p:cNvPr id="35" name="Text 33"/>
-          <p:cNvSpPr txBox="1"/>
-          <p:nvPr/>
-        </p:nvSpPr>
-        <p:spPr>
-          <a:xfrm>
-            <a:off x="6327648" y="5047488"/>
-            <a:ext cx="5093208" cy="640080"/>
-          </a:xfrm>
-          <a:prstGeom prst="rect">
-            <a:avLst/>
-          </a:prstGeom>
-          <a:noFill/>
-          <a:ln/>
-        </p:spPr>
-        <p:txBody>
-          <a:bodyPr wrap="square" lIns="0" tIns="0" rIns="0" bIns="0" rtlCol="0" anchor="ctr"/>
-          <a:lstStyle/>
-          <a:p>
-            <a:pPr indent="0" marL="0">
-              <a:buNone/>
-            </a:pPr>
-            <a:r>
-              <a:rPr lang="en-US" sz="1100" dirty="0">
-                <a:solidFill>
-                  <a:srgbClr val="3C5C6B"/>
-                </a:solidFill>
-                <a:latin typeface="Calibri" pitchFamily="34" charset="0"/>
-                <a:ea typeface="Calibri" pitchFamily="34" charset="-122"/>
-                <a:cs typeface="Calibri" pitchFamily="34" charset="-120"/>
-              </a:rPr>
-              <a:t>Escala nacional e ingestão automatizada</a:t>
-            </a:r>
-            <a:endParaRPr lang="en-US" sz="1100" dirty="0"/>
-          </a:p>
-        </p:txBody>
-      </p:sp>
-      <p:sp>
-        <p:nvSpPr>
-          <p:cNvPr id="36" name="Shape 34"/>
-          <p:cNvSpPr/>
-          <p:nvPr/>
-        </p:nvSpPr>
-        <p:spPr>
-          <a:xfrm>
-            <a:off x="566928" y="5797296"/>
-            <a:ext cx="11055096" cy="457200"/>
-          </a:xfrm>
-          <a:prstGeom prst="roundRect">
-            <a:avLst>
-              <a:gd name="adj" fmla="val 18000"/>
+              <a:gd name="adj" fmla="val 17308"/>
             </a:avLst>
           </a:prstGeom>
           <a:solidFill>
@@ -14657,14 +13863,14 @@
       </p:sp>
       <p:sp>
         <p:nvSpPr>
-          <p:cNvPr id="37" name="Text 35"/>
+          <p:cNvPr id="25" name="Text 23"/>
           <p:cNvSpPr txBox="1"/>
           <p:nvPr/>
         </p:nvSpPr>
         <p:spPr>
           <a:xfrm>
             <a:off x="859536" y="5797296"/>
-            <a:ext cx="10469880" cy="457200"/>
+            <a:ext cx="10469880" cy="475488"/>
           </a:xfrm>
           <a:prstGeom prst="rect">
             <a:avLst/>
@@ -14688,21 +13894,7 @@
                 <a:ea typeface="Calibri" pitchFamily="34" charset="-122"/>
                 <a:cs typeface="Calibri" pitchFamily="34" charset="-120"/>
               </a:rPr>
-              <a:t>Link do vídeo no YouTube:   </a:t>
-            </a:r>
-            <a:pPr indent="0" marL="0">
-              <a:buNone/>
-            </a:pPr>
-            <a:r>
-              <a:rPr lang="en-US" sz="1200" b="1" dirty="0">
-                <a:solidFill>
-                  <a:srgbClr val="D9452B"/>
-                </a:solidFill>
-                <a:latin typeface="Calibri" pitchFamily="34" charset="0"/>
-                <a:ea typeface="Calibri" pitchFamily="34" charset="-122"/>
-                <a:cs typeface="Calibri" pitchFamily="34" charset="-120"/>
-              </a:rPr>
-              <a:t>colar aqui antes de fechar a entrega</a:t>
+              <a:t>Repositório público:   github.com/nelsondiniz-p/pulso-vital-analytics</a:t>
             </a:r>
             <a:endParaRPr lang="en-US" sz="1200" dirty="0"/>
           </a:p>
@@ -14710,7 +13902,7 @@
       </p:sp>
       <p:sp>
         <p:nvSpPr>
-          <p:cNvPr id="38" name="Text 36"/>
+          <p:cNvPr id="26" name="Text 24"/>
           <p:cNvSpPr txBox="1"/>
           <p:nvPr/>
         </p:nvSpPr>
@@ -14741,7 +13933,7 @@
                 <a:ea typeface="Calibri" pitchFamily="34" charset="-122"/>
                 <a:cs typeface="Calibri" pitchFamily="34" charset="-120"/>
               </a:rPr>
-              <a:t>PULSO · Vital Analytics · 1TSCOA</a:t>
+              <a:t>PULSO · Vital Analytics · 1TSCOB</a:t>
             </a:r>
             <a:endParaRPr lang="en-US" sz="850" dirty="0"/>
           </a:p>
@@ -14749,7 +13941,7 @@
       </p:sp>
       <p:sp>
         <p:nvSpPr>
-          <p:cNvPr id="39" name="Text 37"/>
+          <p:cNvPr id="27" name="Text 25"/>
           <p:cNvSpPr txBox="1"/>
           <p:nvPr/>
         </p:nvSpPr>
@@ -14797,6 +13989,1287 @@
 <file path=ppt/slides/slide22.xml><?xml version="1.0" encoding="utf-8"?>
 <p:sld xmlns:a="http://schemas.openxmlformats.org/drawingml/2006/main" xmlns:r="http://schemas.openxmlformats.org/officeDocument/2006/relationships" xmlns:p="http://schemas.openxmlformats.org/presentationml/2006/main">
   <p:cSld name="Slide 22">
+    <p:spTree>
+      <p:nvGrpSpPr>
+        <p:cNvPr id="1" name=""/>
+        <p:cNvGrpSpPr/>
+        <p:nvPr/>
+      </p:nvGrpSpPr>
+      <p:grpSpPr>
+        <a:xfrm>
+          <a:off x="0" y="0"/>
+          <a:ext cx="0" cy="0"/>
+          <a:chOff x="0" y="0"/>
+          <a:chExt cx="0" cy="0"/>
+        </a:xfrm>
+      </p:grpSpPr>
+      <p:sp>
+        <p:nvSpPr>
+          <p:cNvPr id="2" name="Shape 0"/>
+          <p:cNvSpPr/>
+          <p:nvPr/>
+        </p:nvSpPr>
+        <p:spPr>
+          <a:xfrm>
+            <a:off x="566928" y="384048"/>
+            <a:ext cx="475488" cy="475488"/>
+          </a:xfrm>
+          <a:prstGeom prst="ellipse">
+            <a:avLst/>
+          </a:prstGeom>
+          <a:solidFill>
+            <a:srgbClr val="009B98"/>
+          </a:solidFill>
+          <a:ln/>
+        </p:spPr>
+      </p:sp>
+      <p:sp>
+        <p:nvSpPr>
+          <p:cNvPr id="3" name="Text 1"/>
+          <p:cNvSpPr txBox="1"/>
+          <p:nvPr/>
+        </p:nvSpPr>
+        <p:spPr>
+          <a:xfrm>
+            <a:off x="566928" y="384048"/>
+            <a:ext cx="475488" cy="475488"/>
+          </a:xfrm>
+          <a:prstGeom prst="rect">
+            <a:avLst/>
+          </a:prstGeom>
+          <a:noFill/>
+          <a:ln/>
+        </p:spPr>
+        <p:txBody>
+          <a:bodyPr wrap="square" lIns="0" tIns="0" rIns="0" bIns="0" rtlCol="0" anchor="ctr"/>
+          <a:lstStyle/>
+          <a:p>
+            <a:pPr algn="ctr" indent="0" marL="0">
+              <a:buNone/>
+            </a:pPr>
+            <a:r>
+              <a:rPr lang="en-US" sz="1700" b="1" dirty="0">
+                <a:solidFill>
+                  <a:srgbClr val="FFFFFF"/>
+                </a:solidFill>
+                <a:latin typeface="Arial" pitchFamily="34" charset="0"/>
+                <a:ea typeface="Arial" pitchFamily="34" charset="-122"/>
+                <a:cs typeface="Arial" pitchFamily="34" charset="-120"/>
+              </a:rPr>
+              <a:t>7</a:t>
+            </a:r>
+            <a:endParaRPr lang="en-US" sz="1700" dirty="0"/>
+          </a:p>
+        </p:txBody>
+      </p:sp>
+      <p:sp>
+        <p:nvSpPr>
+          <p:cNvPr id="4" name="Text 2"/>
+          <p:cNvSpPr txBox="1"/>
+          <p:nvPr/>
+        </p:nvSpPr>
+        <p:spPr>
+          <a:xfrm>
+            <a:off x="1225296" y="347472"/>
+            <a:ext cx="10396728" cy="420624"/>
+          </a:xfrm>
+          <a:prstGeom prst="rect">
+            <a:avLst/>
+          </a:prstGeom>
+          <a:noFill/>
+          <a:ln/>
+        </p:spPr>
+        <p:txBody>
+          <a:bodyPr wrap="square" lIns="0" tIns="0" rIns="0" bIns="0" rtlCol="0" anchor="ctr"/>
+          <a:lstStyle/>
+          <a:p>
+            <a:pPr indent="0" marL="0">
+              <a:buNone/>
+            </a:pPr>
+            <a:r>
+              <a:rPr lang="en-US" sz="2500" b="1" dirty="0">
+                <a:solidFill>
+                  <a:srgbClr val="0A2A3B"/>
+                </a:solidFill>
+                <a:latin typeface="Arial" pitchFamily="34" charset="0"/>
+                <a:ea typeface="Arial" pitchFamily="34" charset="-122"/>
+                <a:cs typeface="Arial" pitchFamily="34" charset="-120"/>
+              </a:rPr>
+              <a:t>Vídeo pitch e demonstração hands on</a:t>
+            </a:r>
+            <a:endParaRPr lang="en-US" sz="2500" dirty="0"/>
+          </a:p>
+        </p:txBody>
+      </p:sp>
+      <p:sp>
+        <p:nvSpPr>
+          <p:cNvPr id="5" name="Text 3"/>
+          <p:cNvSpPr txBox="1"/>
+          <p:nvPr/>
+        </p:nvSpPr>
+        <p:spPr>
+          <a:xfrm>
+            <a:off x="1225296" y="786384"/>
+            <a:ext cx="10396728" cy="274320"/>
+          </a:xfrm>
+          <a:prstGeom prst="rect">
+            <a:avLst/>
+          </a:prstGeom>
+          <a:noFill/>
+          <a:ln/>
+        </p:spPr>
+        <p:txBody>
+          <a:bodyPr wrap="square" lIns="0" tIns="0" rIns="0" bIns="0" rtlCol="0" anchor="ctr"/>
+          <a:lstStyle/>
+          <a:p>
+            <a:pPr indent="0" marL="0">
+              <a:buNone/>
+            </a:pPr>
+            <a:r>
+              <a:rPr lang="en-US" sz="1250" dirty="0">
+                <a:solidFill>
+                  <a:srgbClr val="6B8592"/>
+                </a:solidFill>
+                <a:latin typeface="Calibri" pitchFamily="34" charset="0"/>
+                <a:ea typeface="Calibri" pitchFamily="34" charset="-122"/>
+                <a:cs typeface="Calibri" pitchFamily="34" charset="-120"/>
+              </a:rPr>
+              <a:t>Cinco minutos: problema, solução, demonstração ao vivo e resultados</a:t>
+            </a:r>
+            <a:endParaRPr lang="en-US" sz="1250" dirty="0"/>
+          </a:p>
+        </p:txBody>
+      </p:sp>
+      <p:sp>
+        <p:nvSpPr>
+          <p:cNvPr id="6" name="Shape 4"/>
+          <p:cNvSpPr/>
+          <p:nvPr/>
+        </p:nvSpPr>
+        <p:spPr>
+          <a:xfrm>
+            <a:off x="566928" y="1481328"/>
+            <a:ext cx="11055096" cy="640080"/>
+          </a:xfrm>
+          <a:prstGeom prst="roundRect">
+            <a:avLst>
+              <a:gd name="adj" fmla="val 12857"/>
+            </a:avLst>
+          </a:prstGeom>
+          <a:solidFill>
+            <a:srgbClr val="EEF3F4"/>
+          </a:solidFill>
+          <a:ln/>
+        </p:spPr>
+      </p:sp>
+      <p:sp>
+        <p:nvSpPr>
+          <p:cNvPr id="7" name="Shape 5"/>
+          <p:cNvSpPr/>
+          <p:nvPr/>
+        </p:nvSpPr>
+        <p:spPr>
+          <a:xfrm>
+            <a:off x="749808" y="1618488"/>
+            <a:ext cx="1371600" cy="365760"/>
+          </a:xfrm>
+          <a:prstGeom prst="roundRect">
+            <a:avLst>
+              <a:gd name="adj" fmla="val 12500"/>
+            </a:avLst>
+          </a:prstGeom>
+          <a:solidFill>
+            <a:srgbClr val="009B98"/>
+          </a:solidFill>
+          <a:ln/>
+        </p:spPr>
+      </p:sp>
+      <p:sp>
+        <p:nvSpPr>
+          <p:cNvPr id="8" name="Text 6"/>
+          <p:cNvSpPr txBox="1"/>
+          <p:nvPr/>
+        </p:nvSpPr>
+        <p:spPr>
+          <a:xfrm>
+            <a:off x="749808" y="1618488"/>
+            <a:ext cx="1371600" cy="365760"/>
+          </a:xfrm>
+          <a:prstGeom prst="rect">
+            <a:avLst/>
+          </a:prstGeom>
+          <a:noFill/>
+          <a:ln/>
+        </p:spPr>
+        <p:txBody>
+          <a:bodyPr wrap="square" lIns="0" tIns="0" rIns="0" bIns="0" rtlCol="0" anchor="ctr"/>
+          <a:lstStyle/>
+          <a:p>
+            <a:pPr algn="ctr" indent="0" marL="0">
+              <a:buNone/>
+            </a:pPr>
+            <a:r>
+              <a:rPr lang="en-US" sz="1000" b="1" dirty="0">
+                <a:solidFill>
+                  <a:srgbClr val="FFFFFF"/>
+                </a:solidFill>
+                <a:latin typeface="Calibri" pitchFamily="34" charset="0"/>
+                <a:ea typeface="Calibri" pitchFamily="34" charset="-122"/>
+                <a:cs typeface="Calibri" pitchFamily="34" charset="-120"/>
+              </a:rPr>
+              <a:t>00:00 – 00:30</a:t>
+            </a:r>
+            <a:endParaRPr lang="en-US" sz="1000" dirty="0"/>
+          </a:p>
+        </p:txBody>
+      </p:sp>
+      <p:sp>
+        <p:nvSpPr>
+          <p:cNvPr id="9" name="Text 7"/>
+          <p:cNvSpPr txBox="1"/>
+          <p:nvPr/>
+        </p:nvSpPr>
+        <p:spPr>
+          <a:xfrm>
+            <a:off x="2286000" y="1481328"/>
+            <a:ext cx="3931920" cy="640080"/>
+          </a:xfrm>
+          <a:prstGeom prst="rect">
+            <a:avLst/>
+          </a:prstGeom>
+          <a:noFill/>
+          <a:ln/>
+        </p:spPr>
+        <p:txBody>
+          <a:bodyPr wrap="square" lIns="0" tIns="0" rIns="0" bIns="0" rtlCol="0" anchor="ctr"/>
+          <a:lstStyle/>
+          <a:p>
+            <a:pPr indent="0" marL="0">
+              <a:buNone/>
+            </a:pPr>
+            <a:r>
+              <a:rPr lang="en-US" sz="1200" b="1" dirty="0">
+                <a:solidFill>
+                  <a:srgbClr val="0A2A3B"/>
+                </a:solidFill>
+                <a:latin typeface="Arial" pitchFamily="34" charset="0"/>
+                <a:ea typeface="Arial" pitchFamily="34" charset="-122"/>
+                <a:cs typeface="Arial" pitchFamily="34" charset="-120"/>
+              </a:rPr>
+              <a:t>Abertura e contextualização</a:t>
+            </a:r>
+            <a:endParaRPr lang="en-US" sz="1200" dirty="0"/>
+          </a:p>
+        </p:txBody>
+      </p:sp>
+      <p:sp>
+        <p:nvSpPr>
+          <p:cNvPr id="10" name="Text 8"/>
+          <p:cNvSpPr txBox="1"/>
+          <p:nvPr/>
+        </p:nvSpPr>
+        <p:spPr>
+          <a:xfrm>
+            <a:off x="6327648" y="1481328"/>
+            <a:ext cx="5093208" cy="640080"/>
+          </a:xfrm>
+          <a:prstGeom prst="rect">
+            <a:avLst/>
+          </a:prstGeom>
+          <a:noFill/>
+          <a:ln/>
+        </p:spPr>
+        <p:txBody>
+          <a:bodyPr wrap="square" lIns="0" tIns="0" rIns="0" bIns="0" rtlCol="0" anchor="ctr"/>
+          <a:lstStyle/>
+          <a:p>
+            <a:pPr indent="0" marL="0">
+              <a:buNone/>
+            </a:pPr>
+            <a:r>
+              <a:rPr lang="en-US" sz="1100" dirty="0">
+                <a:solidFill>
+                  <a:srgbClr val="3C5C6B"/>
+                </a:solidFill>
+                <a:latin typeface="Calibri" pitchFamily="34" charset="0"/>
+                <a:ea typeface="Calibri" pitchFamily="34" charset="-122"/>
+                <a:cs typeface="Calibri" pitchFamily="34" charset="-120"/>
+              </a:rPr>
+              <a:t>A gestão de saúde decide com o dado do mês passado</a:t>
+            </a:r>
+            <a:endParaRPr lang="en-US" sz="1100" dirty="0"/>
+          </a:p>
+        </p:txBody>
+      </p:sp>
+      <p:sp>
+        <p:nvSpPr>
+          <p:cNvPr id="11" name="Shape 9"/>
+          <p:cNvSpPr/>
+          <p:nvPr/>
+        </p:nvSpPr>
+        <p:spPr>
+          <a:xfrm>
+            <a:off x="566928" y="2194560"/>
+            <a:ext cx="11055096" cy="640080"/>
+          </a:xfrm>
+          <a:prstGeom prst="roundRect">
+            <a:avLst>
+              <a:gd name="adj" fmla="val 12857"/>
+            </a:avLst>
+          </a:prstGeom>
+          <a:solidFill>
+            <a:srgbClr val="EEF3F4"/>
+          </a:solidFill>
+          <a:ln/>
+        </p:spPr>
+      </p:sp>
+      <p:sp>
+        <p:nvSpPr>
+          <p:cNvPr id="12" name="Shape 10"/>
+          <p:cNvSpPr/>
+          <p:nvPr/>
+        </p:nvSpPr>
+        <p:spPr>
+          <a:xfrm>
+            <a:off x="749808" y="2331720"/>
+            <a:ext cx="1371600" cy="365760"/>
+          </a:xfrm>
+          <a:prstGeom prst="roundRect">
+            <a:avLst>
+              <a:gd name="adj" fmla="val 12500"/>
+            </a:avLst>
+          </a:prstGeom>
+          <a:solidFill>
+            <a:srgbClr val="009B98"/>
+          </a:solidFill>
+          <a:ln/>
+        </p:spPr>
+      </p:sp>
+      <p:sp>
+        <p:nvSpPr>
+          <p:cNvPr id="13" name="Text 11"/>
+          <p:cNvSpPr txBox="1"/>
+          <p:nvPr/>
+        </p:nvSpPr>
+        <p:spPr>
+          <a:xfrm>
+            <a:off x="749808" y="2331720"/>
+            <a:ext cx="1371600" cy="365760"/>
+          </a:xfrm>
+          <a:prstGeom prst="rect">
+            <a:avLst/>
+          </a:prstGeom>
+          <a:noFill/>
+          <a:ln/>
+        </p:spPr>
+        <p:txBody>
+          <a:bodyPr wrap="square" lIns="0" tIns="0" rIns="0" bIns="0" rtlCol="0" anchor="ctr"/>
+          <a:lstStyle/>
+          <a:p>
+            <a:pPr algn="ctr" indent="0" marL="0">
+              <a:buNone/>
+            </a:pPr>
+            <a:r>
+              <a:rPr lang="en-US" sz="1000" b="1" dirty="0">
+                <a:solidFill>
+                  <a:srgbClr val="FFFFFF"/>
+                </a:solidFill>
+                <a:latin typeface="Calibri" pitchFamily="34" charset="0"/>
+                <a:ea typeface="Calibri" pitchFamily="34" charset="-122"/>
+                <a:cs typeface="Calibri" pitchFamily="34" charset="-120"/>
+              </a:rPr>
+              <a:t>00:30 – 01:00</a:t>
+            </a:r>
+            <a:endParaRPr lang="en-US" sz="1000" dirty="0"/>
+          </a:p>
+        </p:txBody>
+      </p:sp>
+      <p:sp>
+        <p:nvSpPr>
+          <p:cNvPr id="14" name="Text 12"/>
+          <p:cNvSpPr txBox="1"/>
+          <p:nvPr/>
+        </p:nvSpPr>
+        <p:spPr>
+          <a:xfrm>
+            <a:off x="2286000" y="2194560"/>
+            <a:ext cx="3931920" cy="640080"/>
+          </a:xfrm>
+          <a:prstGeom prst="rect">
+            <a:avLst/>
+          </a:prstGeom>
+          <a:noFill/>
+          <a:ln/>
+        </p:spPr>
+        <p:txBody>
+          <a:bodyPr wrap="square" lIns="0" tIns="0" rIns="0" bIns="0" rtlCol="0" anchor="ctr"/>
+          <a:lstStyle/>
+          <a:p>
+            <a:pPr indent="0" marL="0">
+              <a:buNone/>
+            </a:pPr>
+            <a:r>
+              <a:rPr lang="en-US" sz="1200" b="1" dirty="0">
+                <a:solidFill>
+                  <a:srgbClr val="0A2A3B"/>
+                </a:solidFill>
+                <a:latin typeface="Arial" pitchFamily="34" charset="0"/>
+                <a:ea typeface="Arial" pitchFamily="34" charset="-122"/>
+                <a:cs typeface="Arial" pitchFamily="34" charset="-120"/>
+              </a:rPr>
+              <a:t>Objetivo do projeto</a:t>
+            </a:r>
+            <a:endParaRPr lang="en-US" sz="1200" dirty="0"/>
+          </a:p>
+        </p:txBody>
+      </p:sp>
+      <p:sp>
+        <p:nvSpPr>
+          <p:cNvPr id="15" name="Text 13"/>
+          <p:cNvSpPr txBox="1"/>
+          <p:nvPr/>
+        </p:nvSpPr>
+        <p:spPr>
+          <a:xfrm>
+            <a:off x="6327648" y="2194560"/>
+            <a:ext cx="5093208" cy="640080"/>
+          </a:xfrm>
+          <a:prstGeom prst="rect">
+            <a:avLst/>
+          </a:prstGeom>
+          <a:noFill/>
+          <a:ln/>
+        </p:spPr>
+        <p:txBody>
+          <a:bodyPr wrap="square" lIns="0" tIns="0" rIns="0" bIns="0" rtlCol="0" anchor="ctr"/>
+          <a:lstStyle/>
+          <a:p>
+            <a:pPr indent="0" marL="0">
+              <a:buNone/>
+            </a:pPr>
+            <a:r>
+              <a:rPr lang="en-US" sz="1100" dirty="0">
+                <a:solidFill>
+                  <a:srgbClr val="3C5C6B"/>
+                </a:solidFill>
+                <a:latin typeface="Calibri" pitchFamily="34" charset="0"/>
+                <a:ea typeface="Calibri" pitchFamily="34" charset="-122"/>
+                <a:cs typeface="Calibri" pitchFamily="34" charset="-120"/>
+              </a:rPr>
+              <a:t>Encurtar o caminho entre a pergunta e a resposta</a:t>
+            </a:r>
+            <a:endParaRPr lang="en-US" sz="1100" dirty="0"/>
+          </a:p>
+        </p:txBody>
+      </p:sp>
+      <p:sp>
+        <p:nvSpPr>
+          <p:cNvPr id="16" name="Shape 14"/>
+          <p:cNvSpPr/>
+          <p:nvPr/>
+        </p:nvSpPr>
+        <p:spPr>
+          <a:xfrm>
+            <a:off x="566928" y="2907792"/>
+            <a:ext cx="11055096" cy="640080"/>
+          </a:xfrm>
+          <a:prstGeom prst="roundRect">
+            <a:avLst>
+              <a:gd name="adj" fmla="val 12857"/>
+            </a:avLst>
+          </a:prstGeom>
+          <a:solidFill>
+            <a:srgbClr val="EEF3F4"/>
+          </a:solidFill>
+          <a:ln/>
+        </p:spPr>
+      </p:sp>
+      <p:sp>
+        <p:nvSpPr>
+          <p:cNvPr id="17" name="Shape 15"/>
+          <p:cNvSpPr/>
+          <p:nvPr/>
+        </p:nvSpPr>
+        <p:spPr>
+          <a:xfrm>
+            <a:off x="749808" y="3044952"/>
+            <a:ext cx="1371600" cy="365760"/>
+          </a:xfrm>
+          <a:prstGeom prst="roundRect">
+            <a:avLst>
+              <a:gd name="adj" fmla="val 12500"/>
+            </a:avLst>
+          </a:prstGeom>
+          <a:solidFill>
+            <a:srgbClr val="B5820A"/>
+          </a:solidFill>
+          <a:ln/>
+        </p:spPr>
+      </p:sp>
+      <p:sp>
+        <p:nvSpPr>
+          <p:cNvPr id="18" name="Text 16"/>
+          <p:cNvSpPr txBox="1"/>
+          <p:nvPr/>
+        </p:nvSpPr>
+        <p:spPr>
+          <a:xfrm>
+            <a:off x="749808" y="3044952"/>
+            <a:ext cx="1371600" cy="365760"/>
+          </a:xfrm>
+          <a:prstGeom prst="rect">
+            <a:avLst/>
+          </a:prstGeom>
+          <a:noFill/>
+          <a:ln/>
+        </p:spPr>
+        <p:txBody>
+          <a:bodyPr wrap="square" lIns="0" tIns="0" rIns="0" bIns="0" rtlCol="0" anchor="ctr"/>
+          <a:lstStyle/>
+          <a:p>
+            <a:pPr algn="ctr" indent="0" marL="0">
+              <a:buNone/>
+            </a:pPr>
+            <a:r>
+              <a:rPr lang="en-US" sz="1000" b="1" dirty="0">
+                <a:solidFill>
+                  <a:srgbClr val="FFFFFF"/>
+                </a:solidFill>
+                <a:latin typeface="Calibri" pitchFamily="34" charset="0"/>
+                <a:ea typeface="Calibri" pitchFamily="34" charset="-122"/>
+                <a:cs typeface="Calibri" pitchFamily="34" charset="-120"/>
+              </a:rPr>
+              <a:t>01:00 – 02:00</a:t>
+            </a:r>
+            <a:endParaRPr lang="en-US" sz="1000" dirty="0"/>
+          </a:p>
+        </p:txBody>
+      </p:sp>
+      <p:sp>
+        <p:nvSpPr>
+          <p:cNvPr id="19" name="Text 17"/>
+          <p:cNvSpPr txBox="1"/>
+          <p:nvPr/>
+        </p:nvSpPr>
+        <p:spPr>
+          <a:xfrm>
+            <a:off x="2286000" y="2907792"/>
+            <a:ext cx="3931920" cy="640080"/>
+          </a:xfrm>
+          <a:prstGeom prst="rect">
+            <a:avLst/>
+          </a:prstGeom>
+          <a:noFill/>
+          <a:ln/>
+        </p:spPr>
+        <p:txBody>
+          <a:bodyPr wrap="square" lIns="0" tIns="0" rIns="0" bIns="0" rtlCol="0" anchor="ctr"/>
+          <a:lstStyle/>
+          <a:p>
+            <a:pPr indent="0" marL="0">
+              <a:buNone/>
+            </a:pPr>
+            <a:r>
+              <a:rPr lang="en-US" sz="1200" b="1" dirty="0">
+                <a:solidFill>
+                  <a:srgbClr val="0A2A3B"/>
+                </a:solidFill>
+                <a:latin typeface="Arial" pitchFamily="34" charset="0"/>
+                <a:ea typeface="Arial" pitchFamily="34" charset="-122"/>
+                <a:cs typeface="Arial" pitchFamily="34" charset="-120"/>
+              </a:rPr>
+              <a:t>Proposta de solução</a:t>
+            </a:r>
+            <a:endParaRPr lang="en-US" sz="1200" dirty="0"/>
+          </a:p>
+        </p:txBody>
+      </p:sp>
+      <p:sp>
+        <p:nvSpPr>
+          <p:cNvPr id="20" name="Text 18"/>
+          <p:cNvSpPr txBox="1"/>
+          <p:nvPr/>
+        </p:nvSpPr>
+        <p:spPr>
+          <a:xfrm>
+            <a:off x="6327648" y="2907792"/>
+            <a:ext cx="5093208" cy="640080"/>
+          </a:xfrm>
+          <a:prstGeom prst="rect">
+            <a:avLst/>
+          </a:prstGeom>
+          <a:noFill/>
+          <a:ln/>
+        </p:spPr>
+        <p:txBody>
+          <a:bodyPr wrap="square" lIns="0" tIns="0" rIns="0" bIns="0" rtlCol="0" anchor="ctr"/>
+          <a:lstStyle/>
+          <a:p>
+            <a:pPr indent="0" marL="0">
+              <a:buNone/>
+            </a:pPr>
+            <a:r>
+              <a:rPr lang="en-US" sz="1100" dirty="0">
+                <a:solidFill>
+                  <a:srgbClr val="3C5C6B"/>
+                </a:solidFill>
+                <a:latin typeface="Calibri" pitchFamily="34" charset="0"/>
+                <a:ea typeface="Calibri" pitchFamily="34" charset="-122"/>
+                <a:cs typeface="Calibri" pitchFamily="34" charset="-120"/>
+              </a:rPr>
+              <a:t>Arquitetura, as três fontes e o diferencial Select AI</a:t>
+            </a:r>
+            <a:endParaRPr lang="en-US" sz="1100" dirty="0"/>
+          </a:p>
+        </p:txBody>
+      </p:sp>
+      <p:sp>
+        <p:nvSpPr>
+          <p:cNvPr id="21" name="Shape 19"/>
+          <p:cNvSpPr/>
+          <p:nvPr/>
+        </p:nvSpPr>
+        <p:spPr>
+          <a:xfrm>
+            <a:off x="566928" y="3621024"/>
+            <a:ext cx="11055096" cy="640080"/>
+          </a:xfrm>
+          <a:prstGeom prst="roundRect">
+            <a:avLst>
+              <a:gd name="adj" fmla="val 12857"/>
+            </a:avLst>
+          </a:prstGeom>
+          <a:solidFill>
+            <a:srgbClr val="EEF3F4"/>
+          </a:solidFill>
+          <a:ln/>
+        </p:spPr>
+      </p:sp>
+      <p:sp>
+        <p:nvSpPr>
+          <p:cNvPr id="22" name="Shape 20"/>
+          <p:cNvSpPr/>
+          <p:nvPr/>
+        </p:nvSpPr>
+        <p:spPr>
+          <a:xfrm>
+            <a:off x="749808" y="3758184"/>
+            <a:ext cx="1371600" cy="365760"/>
+          </a:xfrm>
+          <a:prstGeom prst="roundRect">
+            <a:avLst>
+              <a:gd name="adj" fmla="val 12500"/>
+            </a:avLst>
+          </a:prstGeom>
+          <a:solidFill>
+            <a:srgbClr val="D9452B"/>
+          </a:solidFill>
+          <a:ln/>
+        </p:spPr>
+      </p:sp>
+      <p:sp>
+        <p:nvSpPr>
+          <p:cNvPr id="23" name="Text 21"/>
+          <p:cNvSpPr txBox="1"/>
+          <p:nvPr/>
+        </p:nvSpPr>
+        <p:spPr>
+          <a:xfrm>
+            <a:off x="749808" y="3758184"/>
+            <a:ext cx="1371600" cy="365760"/>
+          </a:xfrm>
+          <a:prstGeom prst="rect">
+            <a:avLst/>
+          </a:prstGeom>
+          <a:noFill/>
+          <a:ln/>
+        </p:spPr>
+        <p:txBody>
+          <a:bodyPr wrap="square" lIns="0" tIns="0" rIns="0" bIns="0" rtlCol="0" anchor="ctr"/>
+          <a:lstStyle/>
+          <a:p>
+            <a:pPr algn="ctr" indent="0" marL="0">
+              <a:buNone/>
+            </a:pPr>
+            <a:r>
+              <a:rPr lang="en-US" sz="1000" b="1" dirty="0">
+                <a:solidFill>
+                  <a:srgbClr val="FFFFFF"/>
+                </a:solidFill>
+                <a:latin typeface="Calibri" pitchFamily="34" charset="0"/>
+                <a:ea typeface="Calibri" pitchFamily="34" charset="-122"/>
+                <a:cs typeface="Calibri" pitchFamily="34" charset="-120"/>
+              </a:rPr>
+              <a:t>02:00 – 04:00</a:t>
+            </a:r>
+            <a:endParaRPr lang="en-US" sz="1000" dirty="0"/>
+          </a:p>
+        </p:txBody>
+      </p:sp>
+      <p:sp>
+        <p:nvSpPr>
+          <p:cNvPr id="24" name="Text 22"/>
+          <p:cNvSpPr txBox="1"/>
+          <p:nvPr/>
+        </p:nvSpPr>
+        <p:spPr>
+          <a:xfrm>
+            <a:off x="2286000" y="3621024"/>
+            <a:ext cx="3931920" cy="640080"/>
+          </a:xfrm>
+          <a:prstGeom prst="rect">
+            <a:avLst/>
+          </a:prstGeom>
+          <a:noFill/>
+          <a:ln/>
+        </p:spPr>
+        <p:txBody>
+          <a:bodyPr wrap="square" lIns="0" tIns="0" rIns="0" bIns="0" rtlCol="0" anchor="ctr"/>
+          <a:lstStyle/>
+          <a:p>
+            <a:pPr indent="0" marL="0">
+              <a:buNone/>
+            </a:pPr>
+            <a:r>
+              <a:rPr lang="en-US" sz="1200" b="1" dirty="0">
+                <a:solidFill>
+                  <a:srgbClr val="0A2A3B"/>
+                </a:solidFill>
+                <a:latin typeface="Arial" pitchFamily="34" charset="0"/>
+                <a:ea typeface="Arial" pitchFamily="34" charset="-122"/>
+                <a:cs typeface="Arial" pitchFamily="34" charset="-120"/>
+              </a:rPr>
+              <a:t>Demonstração da solução funcionando</a:t>
+            </a:r>
+            <a:endParaRPr lang="en-US" sz="1200" dirty="0"/>
+          </a:p>
+        </p:txBody>
+      </p:sp>
+      <p:sp>
+        <p:nvSpPr>
+          <p:cNvPr id="25" name="Text 23"/>
+          <p:cNvSpPr txBox="1"/>
+          <p:nvPr/>
+        </p:nvSpPr>
+        <p:spPr>
+          <a:xfrm>
+            <a:off x="6327648" y="3621024"/>
+            <a:ext cx="5093208" cy="640080"/>
+          </a:xfrm>
+          <a:prstGeom prst="rect">
+            <a:avLst/>
+          </a:prstGeom>
+          <a:noFill/>
+          <a:ln/>
+        </p:spPr>
+        <p:txBody>
+          <a:bodyPr wrap="square" lIns="0" tIns="0" rIns="0" bIns="0" rtlCol="0" anchor="ctr"/>
+          <a:lstStyle/>
+          <a:p>
+            <a:pPr indent="0" marL="0">
+              <a:buNone/>
+            </a:pPr>
+            <a:r>
+              <a:rPr lang="en-US" sz="1100" dirty="0">
+                <a:solidFill>
+                  <a:srgbClr val="3C5C6B"/>
+                </a:solidFill>
+                <a:latin typeface="Calibri" pitchFamily="34" charset="0"/>
+                <a:ea typeface="Calibri" pitchFamily="34" charset="-122"/>
+                <a:cs typeface="Calibri" pitchFamily="34" charset="-120"/>
+              </a:rPr>
+              <a:t>Dashboard navegável e Select AI respondendo em português</a:t>
+            </a:r>
+            <a:endParaRPr lang="en-US" sz="1100" dirty="0"/>
+          </a:p>
+        </p:txBody>
+      </p:sp>
+      <p:sp>
+        <p:nvSpPr>
+          <p:cNvPr id="26" name="Shape 24"/>
+          <p:cNvSpPr/>
+          <p:nvPr/>
+        </p:nvSpPr>
+        <p:spPr>
+          <a:xfrm>
+            <a:off x="566928" y="4334256"/>
+            <a:ext cx="11055096" cy="640080"/>
+          </a:xfrm>
+          <a:prstGeom prst="roundRect">
+            <a:avLst>
+              <a:gd name="adj" fmla="val 12857"/>
+            </a:avLst>
+          </a:prstGeom>
+          <a:solidFill>
+            <a:srgbClr val="EEF3F4"/>
+          </a:solidFill>
+          <a:ln/>
+        </p:spPr>
+      </p:sp>
+      <p:sp>
+        <p:nvSpPr>
+          <p:cNvPr id="27" name="Shape 25"/>
+          <p:cNvSpPr/>
+          <p:nvPr/>
+        </p:nvSpPr>
+        <p:spPr>
+          <a:xfrm>
+            <a:off x="749808" y="4471416"/>
+            <a:ext cx="1371600" cy="365760"/>
+          </a:xfrm>
+          <a:prstGeom prst="roundRect">
+            <a:avLst>
+              <a:gd name="adj" fmla="val 12500"/>
+            </a:avLst>
+          </a:prstGeom>
+          <a:solidFill>
+            <a:srgbClr val="7A4FA8"/>
+          </a:solidFill>
+          <a:ln/>
+        </p:spPr>
+      </p:sp>
+      <p:sp>
+        <p:nvSpPr>
+          <p:cNvPr id="28" name="Text 26"/>
+          <p:cNvSpPr txBox="1"/>
+          <p:nvPr/>
+        </p:nvSpPr>
+        <p:spPr>
+          <a:xfrm>
+            <a:off x="749808" y="4471416"/>
+            <a:ext cx="1371600" cy="365760"/>
+          </a:xfrm>
+          <a:prstGeom prst="rect">
+            <a:avLst/>
+          </a:prstGeom>
+          <a:noFill/>
+          <a:ln/>
+        </p:spPr>
+        <p:txBody>
+          <a:bodyPr wrap="square" lIns="0" tIns="0" rIns="0" bIns="0" rtlCol="0" anchor="ctr"/>
+          <a:lstStyle/>
+          <a:p>
+            <a:pPr algn="ctr" indent="0" marL="0">
+              <a:buNone/>
+            </a:pPr>
+            <a:r>
+              <a:rPr lang="en-US" sz="1000" b="1" dirty="0">
+                <a:solidFill>
+                  <a:srgbClr val="FFFFFF"/>
+                </a:solidFill>
+                <a:latin typeface="Calibri" pitchFamily="34" charset="0"/>
+                <a:ea typeface="Calibri" pitchFamily="34" charset="-122"/>
+                <a:cs typeface="Calibri" pitchFamily="34" charset="-120"/>
+              </a:rPr>
+              <a:t>04:00 – 04:30</a:t>
+            </a:r>
+            <a:endParaRPr lang="en-US" sz="1000" dirty="0"/>
+          </a:p>
+        </p:txBody>
+      </p:sp>
+      <p:sp>
+        <p:nvSpPr>
+          <p:cNvPr id="29" name="Text 27"/>
+          <p:cNvSpPr txBox="1"/>
+          <p:nvPr/>
+        </p:nvSpPr>
+        <p:spPr>
+          <a:xfrm>
+            <a:off x="2286000" y="4334256"/>
+            <a:ext cx="3931920" cy="640080"/>
+          </a:xfrm>
+          <a:prstGeom prst="rect">
+            <a:avLst/>
+          </a:prstGeom>
+          <a:noFill/>
+          <a:ln/>
+        </p:spPr>
+        <p:txBody>
+          <a:bodyPr wrap="square" lIns="0" tIns="0" rIns="0" bIns="0" rtlCol="0" anchor="ctr"/>
+          <a:lstStyle/>
+          <a:p>
+            <a:pPr indent="0" marL="0">
+              <a:buNone/>
+            </a:pPr>
+            <a:r>
+              <a:rPr lang="en-US" sz="1200" b="1" dirty="0">
+                <a:solidFill>
+                  <a:srgbClr val="0A2A3B"/>
+                </a:solidFill>
+                <a:latin typeface="Arial" pitchFamily="34" charset="0"/>
+                <a:ea typeface="Arial" pitchFamily="34" charset="-122"/>
+                <a:cs typeface="Arial" pitchFamily="34" charset="-120"/>
+              </a:rPr>
+              <a:t>Benefícios gerados</a:t>
+            </a:r>
+            <a:endParaRPr lang="en-US" sz="1200" dirty="0"/>
+          </a:p>
+        </p:txBody>
+      </p:sp>
+      <p:sp>
+        <p:nvSpPr>
+          <p:cNvPr id="30" name="Text 28"/>
+          <p:cNvSpPr txBox="1"/>
+          <p:nvPr/>
+        </p:nvSpPr>
+        <p:spPr>
+          <a:xfrm>
+            <a:off x="6327648" y="4334256"/>
+            <a:ext cx="5093208" cy="640080"/>
+          </a:xfrm>
+          <a:prstGeom prst="rect">
+            <a:avLst/>
+          </a:prstGeom>
+          <a:noFill/>
+          <a:ln/>
+        </p:spPr>
+        <p:txBody>
+          <a:bodyPr wrap="square" lIns="0" tIns="0" rIns="0" bIns="0" rtlCol="0" anchor="ctr"/>
+          <a:lstStyle/>
+          <a:p>
+            <a:pPr indent="0" marL="0">
+              <a:buNone/>
+            </a:pPr>
+            <a:r>
+              <a:rPr lang="en-US" sz="1100" dirty="0">
+                <a:solidFill>
+                  <a:srgbClr val="3C5C6B"/>
+                </a:solidFill>
+                <a:latin typeface="Calibri" pitchFamily="34" charset="0"/>
+                <a:ea typeface="Calibri" pitchFamily="34" charset="-122"/>
+                <a:cs typeface="Calibri" pitchFamily="34" charset="-120"/>
+              </a:rPr>
+              <a:t>15 municípios críticos identificados com dado real</a:t>
+            </a:r>
+            <a:endParaRPr lang="en-US" sz="1100" dirty="0"/>
+          </a:p>
+        </p:txBody>
+      </p:sp>
+      <p:sp>
+        <p:nvSpPr>
+          <p:cNvPr id="31" name="Shape 29"/>
+          <p:cNvSpPr/>
+          <p:nvPr/>
+        </p:nvSpPr>
+        <p:spPr>
+          <a:xfrm>
+            <a:off x="566928" y="5047488"/>
+            <a:ext cx="11055096" cy="640080"/>
+          </a:xfrm>
+          <a:prstGeom prst="roundRect">
+            <a:avLst>
+              <a:gd name="adj" fmla="val 12857"/>
+            </a:avLst>
+          </a:prstGeom>
+          <a:solidFill>
+            <a:srgbClr val="EEF3F4"/>
+          </a:solidFill>
+          <a:ln/>
+        </p:spPr>
+      </p:sp>
+      <p:sp>
+        <p:nvSpPr>
+          <p:cNvPr id="32" name="Shape 30"/>
+          <p:cNvSpPr/>
+          <p:nvPr/>
+        </p:nvSpPr>
+        <p:spPr>
+          <a:xfrm>
+            <a:off x="749808" y="5184648"/>
+            <a:ext cx="1371600" cy="365760"/>
+          </a:xfrm>
+          <a:prstGeom prst="roundRect">
+            <a:avLst>
+              <a:gd name="adj" fmla="val 12500"/>
+            </a:avLst>
+          </a:prstGeom>
+          <a:solidFill>
+            <a:srgbClr val="123B4F"/>
+          </a:solidFill>
+          <a:ln/>
+        </p:spPr>
+      </p:sp>
+      <p:sp>
+        <p:nvSpPr>
+          <p:cNvPr id="33" name="Text 31"/>
+          <p:cNvSpPr txBox="1"/>
+          <p:nvPr/>
+        </p:nvSpPr>
+        <p:spPr>
+          <a:xfrm>
+            <a:off x="749808" y="5184648"/>
+            <a:ext cx="1371600" cy="365760"/>
+          </a:xfrm>
+          <a:prstGeom prst="rect">
+            <a:avLst/>
+          </a:prstGeom>
+          <a:noFill/>
+          <a:ln/>
+        </p:spPr>
+        <p:txBody>
+          <a:bodyPr wrap="square" lIns="0" tIns="0" rIns="0" bIns="0" rtlCol="0" anchor="ctr"/>
+          <a:lstStyle/>
+          <a:p>
+            <a:pPr algn="ctr" indent="0" marL="0">
+              <a:buNone/>
+            </a:pPr>
+            <a:r>
+              <a:rPr lang="en-US" sz="1000" b="1" dirty="0">
+                <a:solidFill>
+                  <a:srgbClr val="FFFFFF"/>
+                </a:solidFill>
+                <a:latin typeface="Calibri" pitchFamily="34" charset="0"/>
+                <a:ea typeface="Calibri" pitchFamily="34" charset="-122"/>
+                <a:cs typeface="Calibri" pitchFamily="34" charset="-120"/>
+              </a:rPr>
+              <a:t>04:30 – 05:00</a:t>
+            </a:r>
+            <a:endParaRPr lang="en-US" sz="1000" dirty="0"/>
+          </a:p>
+        </p:txBody>
+      </p:sp>
+      <p:sp>
+        <p:nvSpPr>
+          <p:cNvPr id="34" name="Text 32"/>
+          <p:cNvSpPr txBox="1"/>
+          <p:nvPr/>
+        </p:nvSpPr>
+        <p:spPr>
+          <a:xfrm>
+            <a:off x="2286000" y="5047488"/>
+            <a:ext cx="3931920" cy="640080"/>
+          </a:xfrm>
+          <a:prstGeom prst="rect">
+            <a:avLst/>
+          </a:prstGeom>
+          <a:noFill/>
+          <a:ln/>
+        </p:spPr>
+        <p:txBody>
+          <a:bodyPr wrap="square" lIns="0" tIns="0" rIns="0" bIns="0" rtlCol="0" anchor="ctr"/>
+          <a:lstStyle/>
+          <a:p>
+            <a:pPr indent="0" marL="0">
+              <a:buNone/>
+            </a:pPr>
+            <a:r>
+              <a:rPr lang="en-US" sz="1200" b="1" dirty="0">
+                <a:solidFill>
+                  <a:srgbClr val="0A2A3B"/>
+                </a:solidFill>
+                <a:latin typeface="Arial" pitchFamily="34" charset="0"/>
+                <a:ea typeface="Arial" pitchFamily="34" charset="-122"/>
+                <a:cs typeface="Arial" pitchFamily="34" charset="-120"/>
+              </a:rPr>
+              <a:t>Conclusão e próximos passos</a:t>
+            </a:r>
+            <a:endParaRPr lang="en-US" sz="1200" dirty="0"/>
+          </a:p>
+        </p:txBody>
+      </p:sp>
+      <p:sp>
+        <p:nvSpPr>
+          <p:cNvPr id="35" name="Text 33"/>
+          <p:cNvSpPr txBox="1"/>
+          <p:nvPr/>
+        </p:nvSpPr>
+        <p:spPr>
+          <a:xfrm>
+            <a:off x="6327648" y="5047488"/>
+            <a:ext cx="5093208" cy="640080"/>
+          </a:xfrm>
+          <a:prstGeom prst="rect">
+            <a:avLst/>
+          </a:prstGeom>
+          <a:noFill/>
+          <a:ln/>
+        </p:spPr>
+        <p:txBody>
+          <a:bodyPr wrap="square" lIns="0" tIns="0" rIns="0" bIns="0" rtlCol="0" anchor="ctr"/>
+          <a:lstStyle/>
+          <a:p>
+            <a:pPr indent="0" marL="0">
+              <a:buNone/>
+            </a:pPr>
+            <a:r>
+              <a:rPr lang="en-US" sz="1100" dirty="0">
+                <a:solidFill>
+                  <a:srgbClr val="3C5C6B"/>
+                </a:solidFill>
+                <a:latin typeface="Calibri" pitchFamily="34" charset="0"/>
+                <a:ea typeface="Calibri" pitchFamily="34" charset="-122"/>
+                <a:cs typeface="Calibri" pitchFamily="34" charset="-120"/>
+              </a:rPr>
+              <a:t>Escala nacional e ingestão automatizada</a:t>
+            </a:r>
+            <a:endParaRPr lang="en-US" sz="1100" dirty="0"/>
+          </a:p>
+        </p:txBody>
+      </p:sp>
+      <p:sp>
+        <p:nvSpPr>
+          <p:cNvPr id="36" name="Shape 34"/>
+          <p:cNvSpPr/>
+          <p:nvPr/>
+        </p:nvSpPr>
+        <p:spPr>
+          <a:xfrm>
+            <a:off x="566928" y="5797296"/>
+            <a:ext cx="11055096" cy="457200"/>
+          </a:xfrm>
+          <a:prstGeom prst="roundRect">
+            <a:avLst>
+              <a:gd name="adj" fmla="val 18000"/>
+            </a:avLst>
+          </a:prstGeom>
+          <a:solidFill>
+            <a:srgbClr val="0A2A3B"/>
+          </a:solidFill>
+          <a:ln/>
+        </p:spPr>
+      </p:sp>
+      <p:sp>
+        <p:nvSpPr>
+          <p:cNvPr id="37" name="Text 35"/>
+          <p:cNvSpPr txBox="1"/>
+          <p:nvPr/>
+        </p:nvSpPr>
+        <p:spPr>
+          <a:xfrm>
+            <a:off x="859536" y="5797296"/>
+            <a:ext cx="10469880" cy="457200"/>
+          </a:xfrm>
+          <a:prstGeom prst="rect">
+            <a:avLst/>
+          </a:prstGeom>
+          <a:noFill/>
+          <a:ln/>
+        </p:spPr>
+        <p:txBody>
+          <a:bodyPr wrap="square" lIns="0" tIns="0" rIns="0" bIns="0" rtlCol="0" anchor="ctr"/>
+          <a:lstStyle/>
+          <a:p>
+            <a:pPr indent="0" marL="0">
+              <a:buNone/>
+            </a:pPr>
+            <a:r>
+              <a:rPr lang="en-US" sz="1200" b="1" dirty="0">
+                <a:solidFill>
+                  <a:srgbClr val="009B98"/>
+                </a:solidFill>
+                <a:latin typeface="Calibri" pitchFamily="34" charset="0"/>
+                <a:ea typeface="Calibri" pitchFamily="34" charset="-122"/>
+                <a:cs typeface="Calibri" pitchFamily="34" charset="-120"/>
+              </a:rPr>
+              <a:t>Link do vídeo no YouTube:   </a:t>
+            </a:r>
+            <a:pPr indent="0" marL="0">
+              <a:buNone/>
+            </a:pPr>
+            <a:r>
+              <a:rPr lang="en-US" sz="1200" b="1" dirty="0">
+                <a:solidFill>
+                  <a:srgbClr val="D9452B"/>
+                </a:solidFill>
+                <a:latin typeface="Calibri" pitchFamily="34" charset="0"/>
+                <a:ea typeface="Calibri" pitchFamily="34" charset="-122"/>
+                <a:cs typeface="Calibri" pitchFamily="34" charset="-120"/>
+              </a:rPr>
+              <a:t>colar aqui antes de fechar a entrega</a:t>
+            </a:r>
+            <a:endParaRPr lang="en-US" sz="1200" dirty="0"/>
+          </a:p>
+        </p:txBody>
+      </p:sp>
+      <p:sp>
+        <p:nvSpPr>
+          <p:cNvPr id="38" name="Text 36"/>
+          <p:cNvSpPr txBox="1"/>
+          <p:nvPr/>
+        </p:nvSpPr>
+        <p:spPr>
+          <a:xfrm>
+            <a:off x="566928" y="6382512"/>
+            <a:ext cx="5029200" cy="256032"/>
+          </a:xfrm>
+          <a:prstGeom prst="rect">
+            <a:avLst/>
+          </a:prstGeom>
+          <a:noFill/>
+          <a:ln/>
+        </p:spPr>
+        <p:txBody>
+          <a:bodyPr wrap="square" lIns="0" tIns="0" rIns="0" bIns="0" rtlCol="0" anchor="ctr"/>
+          <a:lstStyle/>
+          <a:p>
+            <a:pPr indent="0" marL="0">
+              <a:buNone/>
+            </a:pPr>
+            <a:r>
+              <a:rPr lang="en-US" sz="850" dirty="0">
+                <a:solidFill>
+                  <a:srgbClr val="6B8592"/>
+                </a:solidFill>
+                <a:latin typeface="Calibri" pitchFamily="34" charset="0"/>
+                <a:ea typeface="Calibri" pitchFamily="34" charset="-122"/>
+                <a:cs typeface="Calibri" pitchFamily="34" charset="-120"/>
+              </a:rPr>
+              <a:t>PULSO · Vital Analytics · 1TSCOB</a:t>
+            </a:r>
+            <a:endParaRPr lang="en-US" sz="850" dirty="0"/>
+          </a:p>
+        </p:txBody>
+      </p:sp>
+      <p:sp>
+        <p:nvSpPr>
+          <p:cNvPr id="39" name="Text 37"/>
+          <p:cNvSpPr txBox="1"/>
+          <p:nvPr/>
+        </p:nvSpPr>
+        <p:spPr>
+          <a:xfrm>
+            <a:off x="11073384" y="6382512"/>
+            <a:ext cx="548640" cy="256032"/>
+          </a:xfrm>
+          <a:prstGeom prst="rect">
+            <a:avLst/>
+          </a:prstGeom>
+          <a:noFill/>
+          <a:ln/>
+        </p:spPr>
+        <p:txBody>
+          <a:bodyPr wrap="square" lIns="0" tIns="0" rIns="0" bIns="0" rtlCol="0" anchor="ctr"/>
+          <a:lstStyle/>
+          <a:p>
+            <a:pPr algn="r" indent="0" marL="0">
+              <a:buNone/>
+            </a:pPr>
+            <a:r>
+              <a:rPr lang="en-US" sz="850" dirty="0">
+                <a:solidFill>
+                  <a:srgbClr val="6B8592"/>
+                </a:solidFill>
+                <a:latin typeface="Calibri" pitchFamily="34" charset="0"/>
+                <a:ea typeface="Calibri" pitchFamily="34" charset="-122"/>
+                <a:cs typeface="Calibri" pitchFamily="34" charset="-120"/>
+              </a:rPr>
+              <a:t>22</a:t>
+            </a:r>
+            <a:endParaRPr lang="en-US" sz="850" dirty="0"/>
+          </a:p>
+        </p:txBody>
+      </p:sp>
+    </p:spTree>
+  </p:cSld>
+  <p:clrMapOvr>
+    <a:masterClrMapping/>
+  </p:clrMapOvr>
+</p:sld>
+</file>
+
+<file path=ppt/slides/slide23.xml><?xml version="1.0" encoding="utf-8"?>
+<p:sld xmlns:a="http://schemas.openxmlformats.org/drawingml/2006/main" xmlns:r="http://schemas.openxmlformats.org/officeDocument/2006/relationships" xmlns:p="http://schemas.openxmlformats.org/presentationml/2006/main">
+  <p:cSld name="Slide 23">
     <p:bg>
       <p:bgPr>
         <a:solidFill>
@@ -14820,24 +15293,22 @@
       </p:grpSpPr>
       <p:pic>
         <p:nvPicPr>
-          <p:cNvPr id="2" name="Image 0" descr="/home/claude/pulso/docs/evidencias/m2_ecg_branco.png">    </p:cNvPr>
+          <p:cNvPr id="2" name="Image 0" descr="/home/claude/pulso/docs/evidencias/logo_pulso.png">    </p:cNvPr>
           <p:cNvPicPr>
             <a:picLocks noChangeAspect="1"/>
           </p:cNvPicPr>
           <p:nvPr/>
         </p:nvPicPr>
         <p:blipFill>
-          <a:blip r:embed="rId1">
-            <a:alphaModFix amt="14000"/>
-          </a:blip>
+          <a:blip r:embed="rId1"/>
           <a:stretch>
             <a:fillRect/>
           </a:stretch>
         </p:blipFill>
         <p:spPr>
           <a:xfrm>
-            <a:off x="0" y="256032"/>
-            <a:ext cx="12188952" cy="658368"/>
+            <a:off x="10049256" y="786384"/>
+            <a:ext cx="1572768" cy="896112"/>
           </a:xfrm>
           <a:prstGeom prst="rect">
             <a:avLst/>
@@ -15828,9 +16299,9 @@
 </p:sld>
 </file>
 
-<file path=ppt/slides/slide23.xml><?xml version="1.0" encoding="utf-8"?>
+<file path=ppt/slides/slide24.xml><?xml version="1.0" encoding="utf-8"?>
 <p:sld xmlns:a="http://schemas.openxmlformats.org/drawingml/2006/main" xmlns:r="http://schemas.openxmlformats.org/officeDocument/2006/relationships" xmlns:p="http://schemas.openxmlformats.org/presentationml/2006/main">
-  <p:cSld name="Slide 23">
+  <p:cSld name="Slide 24">
     <p:spTree>
       <p:nvGrpSpPr>
         <p:cNvPr id="1" name=""/>
@@ -16659,7 +17130,7 @@
                 <a:ea typeface="Calibri" pitchFamily="34" charset="-122"/>
                 <a:cs typeface="Calibri" pitchFamily="34" charset="-120"/>
               </a:rPr>
-              <a:t>PULSO · Vital Analytics · 1TSCOA</a:t>
+              <a:t>PULSO · Vital Analytics · 1TSCOB</a:t>
             </a:r>
             <a:endParaRPr lang="en-US" sz="850" dirty="0"/>
           </a:p>
@@ -16698,7 +17169,7 @@
                 <a:ea typeface="Calibri" pitchFamily="34" charset="-122"/>
                 <a:cs typeface="Calibri" pitchFamily="34" charset="-120"/>
               </a:rPr>
-              <a:t>23</a:t>
+              <a:t>24</a:t>
             </a:r>
             <a:endParaRPr lang="en-US" sz="850" dirty="0"/>
           </a:p>
@@ -16712,9 +17183,9 @@
 </p:sld>
 </file>
 
-<file path=ppt/slides/slide24.xml><?xml version="1.0" encoding="utf-8"?>
+<file path=ppt/slides/slide25.xml><?xml version="1.0" encoding="utf-8"?>
 <p:sld xmlns:a="http://schemas.openxmlformats.org/drawingml/2006/main" xmlns:r="http://schemas.openxmlformats.org/officeDocument/2006/relationships" xmlns:p="http://schemas.openxmlformats.org/presentationml/2006/main">
-  <p:cSld name="Slide 24">
+  <p:cSld name="Slide 25">
     <p:bg>
       <p:bgPr>
         <a:solidFill>
@@ -16738,24 +17209,22 @@
       </p:grpSpPr>
       <p:pic>
         <p:nvPicPr>
-          <p:cNvPr id="2" name="Image 0" descr="/home/claude/pulso/docs/evidencias/m2_ecg_branco.png">    </p:cNvPr>
+          <p:cNvPr id="2" name="Image 0" descr="/home/claude/pulso/docs/evidencias/logo_pulso.png">    </p:cNvPr>
           <p:cNvPicPr>
             <a:picLocks noChangeAspect="1"/>
           </p:cNvPicPr>
           <p:nvPr/>
         </p:nvPicPr>
         <p:blipFill>
-          <a:blip r:embed="rId1">
-            <a:alphaModFix amt="20000"/>
-          </a:blip>
+          <a:blip r:embed="rId1"/>
           <a:stretch>
             <a:fillRect/>
           </a:stretch>
         </p:blipFill>
         <p:spPr>
           <a:xfrm>
-            <a:off x="0" y="1920240"/>
-            <a:ext cx="12188952" cy="1005840"/>
+            <a:off x="566928" y="1481328"/>
+            <a:ext cx="2651760" cy="1499616"/>
           </a:xfrm>
           <a:prstGeom prst="rect">
             <a:avLst/>
@@ -16958,7 +17427,7 @@
                 <a:ea typeface="Calibri" pitchFamily="34" charset="-122"/>
                 <a:cs typeface="Calibri" pitchFamily="34" charset="-120"/>
               </a:rPr>
-              <a:t>Equipe Vital Analytics · Turma 1TSCOA · Challenge Oracle + FIAP 2026</a:t>
+              <a:t>Equipe Vital Analytics · Turma 1TSCOB · Challenge Oracle + FIAP 2026</a:t>
             </a:r>
             <a:endParaRPr lang="en-US" sz="1100" dirty="0"/>
           </a:p>
@@ -18105,7 +18574,7 @@
                 <a:ea typeface="Calibri" pitchFamily="34" charset="-122"/>
                 <a:cs typeface="Calibri" pitchFamily="34" charset="-120"/>
               </a:rPr>
-              <a:t>PULSO · Vital Analytics · 1TSCOA</a:t>
+              <a:t>PULSO · Vital Analytics · 1TSCOB</a:t>
             </a:r>
             <a:endParaRPr lang="en-US" sz="850" dirty="0"/>
           </a:p>
@@ -19107,7 +19576,7 @@
                 <a:ea typeface="Calibri" pitchFamily="34" charset="-122"/>
                 <a:cs typeface="Calibri" pitchFamily="34" charset="-120"/>
               </a:rPr>
-              <a:t>PULSO · Vital Analytics · 1TSCOA</a:t>
+              <a:t>PULSO · Vital Analytics · 1TSCOB</a:t>
             </a:r>
             <a:endParaRPr lang="en-US" sz="850" dirty="0"/>
           </a:p>
@@ -19877,7 +20346,7 @@
                 <a:ea typeface="Calibri" pitchFamily="34" charset="-122"/>
                 <a:cs typeface="Calibri" pitchFamily="34" charset="-120"/>
               </a:rPr>
-              <a:t>PULSO · Vital Analytics · 1TSCOA</a:t>
+              <a:t>PULSO · Vital Analytics · 1TSCOB</a:t>
             </a:r>
             <a:endParaRPr lang="en-US" sz="850" dirty="0"/>
           </a:p>
@@ -20319,7 +20788,7 @@
                 <a:ea typeface="Calibri" pitchFamily="34" charset="-122"/>
                 <a:cs typeface="Calibri" pitchFamily="34" charset="-120"/>
               </a:rPr>
-              <a:t>PULSO · Vital Analytics · 1TSCOA</a:t>
+              <a:t>PULSO · Vital Analytics · 1TSCOB</a:t>
             </a:r>
             <a:endParaRPr lang="en-US" sz="850" dirty="0"/>
           </a:p>
@@ -20761,7 +21230,7 @@
                 <a:ea typeface="Calibri" pitchFamily="34" charset="-122"/>
                 <a:cs typeface="Calibri" pitchFamily="34" charset="-120"/>
               </a:rPr>
-              <a:t>PULSO · Vital Analytics · 1TSCOA</a:t>
+              <a:t>PULSO · Vital Analytics · 1TSCOB</a:t>
             </a:r>
             <a:endParaRPr lang="en-US" sz="850" dirty="0"/>
           </a:p>
@@ -21203,7 +21672,7 @@
                 <a:ea typeface="Calibri" pitchFamily="34" charset="-122"/>
                 <a:cs typeface="Calibri" pitchFamily="34" charset="-120"/>
               </a:rPr>
-              <a:t>PULSO · Vital Analytics · 1TSCOA</a:t>
+              <a:t>PULSO · Vital Analytics · 1TSCOB</a:t>
             </a:r>
             <a:endParaRPr lang="en-US" sz="850" dirty="0"/>
           </a:p>
@@ -21506,7 +21975,7 @@
                 <a:ea typeface="Calibri" pitchFamily="34" charset="-122"/>
                 <a:cs typeface="Calibri" pitchFamily="34" charset="-120"/>
               </a:rPr>
-              <a:t>PULSO · Vital Analytics · 1TSCOA</a:t>
+              <a:t>PULSO · Vital Analytics · 1TSCOB</a:t>
             </a:r>
             <a:endParaRPr lang="en-US" sz="850" dirty="0"/>
           </a:p>
